--- a/docs/apresentacao/Lab03S03-Apresentacao.pptx
+++ b/docs/apresentacao/Lab03S03-Apresentacao.pptx
@@ -135,7 +135,7 @@
   <p:extLst>
     <p:ext uri="{521415D9-36F7-43E2-AB2F-B90AF26B5E84}">
       <p14:sectionLst xmlns:p14="http://schemas.microsoft.com/office/powerpoint/2010/main">
-        <p14:section name="O trabalho" id="{67d722b9-4b64-7d5f-0174-b8c982d65f43}">
+        <p14:section name="O trabalho" id="{599d5791-adfe-ac9a-2f69-d8e718107a4e}">
           <p14:sldIdLst>
             <p14:sldId id="256"/>
             <p14:sldId id="257"/>
@@ -157,7 +157,7 @@
             <p14:sldId id="273"/>
           </p14:sldIdLst>
         </p14:section>
-        <p14:section name="Tutorial das tecnologias" id="{6eb22da7-6af1-b66b-67b1-61cc6ee2e24a}">
+        <p14:section name="Tutorial das tecnologias" id="{cd24d311-024d-9314-acc1-0c55df1d024b}">
           <p14:sldIdLst>
             <p14:sldId id="274"/>
             <p14:sldId id="275"/>
@@ -8040,7 +8040,7 @@
                   <a:schemeClr val="tx1"/>
                 </a:solidFill>
               </a:rPr>
-              <a:t>É um comando (python -m creditar_semestre), ainda sem agendamento automático.</a:t>
+              <a:t>É um comando (python -m app.tarefas.creditar_semestre), ainda sem agendamento automático.</a:t>
             </a:r>
             <a:endParaRPr lang="en-US" sz="1600" dirty="0"/>
           </a:p>
@@ -10900,7 +10900,7 @@
                 <a:ea typeface="Courier New" pitchFamily="34" charset="-122"/>
                 <a:cs typeface="Courier New" pitchFamily="34" charset="-120"/>
               </a:rPr>
-              <a:t>      &amp;&amp; python -m seed</a:t>
+              <a:t>      &amp;&amp; python -m app.tarefas.seed</a:t>
             </a:r>
             <a:endParaRPr lang="en-US" sz="1300" dirty="0"/>
           </a:p>
@@ -10917,7 +10917,7 @@
                 <a:ea typeface="Courier New" pitchFamily="34" charset="-122"/>
                 <a:cs typeface="Courier New" pitchFamily="34" charset="-120"/>
               </a:rPr>
-              <a:t>      &amp;&amp; uvicorn main:app --port 8000"</a:t>
+              <a:t>      &amp;&amp; uvicorn app.main:app --port 8000"</a:t>
             </a:r>
             <a:endParaRPr lang="en-US" sz="1300" dirty="0"/>
           </a:p>
@@ -12379,7 +12379,7 @@
                   <a:schemeClr val="accent6"/>
                 </a:solidFill>
               </a:rPr>
-              <a:t>src/back/model/conta.py (trecho resumido e reformatado)</a:t>
+              <a:t>src/back/app/model/conta.py (trecho resumido e reformatado)</a:t>
             </a:r>
             <a:endParaRPr lang="en-US" sz="1100" dirty="0"/>
           </a:p>
@@ -13049,7 +13049,7 @@
                   <a:schemeClr val="accent6"/>
                 </a:solidFill>
               </a:rPr>
-              <a:t>src/back/controller/moedas_controller.py (trecho resumido e reformatado)</a:t>
+              <a:t>src/back/app/controller/rotas/moedas.py (trecho resumido e reformatado)</a:t>
             </a:r>
             <a:endParaRPr lang="en-US" sz="1100" dirty="0"/>
           </a:p>
@@ -13759,7 +13759,7 @@
                   <a:schemeClr val="accent6"/>
                 </a:solidFill>
               </a:rPr>
-              <a:t>src/back/service/servico_autenticacao.py (trecho resumido e reformatado)</a:t>
+              <a:t>src/back/app/service/servico_autenticacao.py (trecho resumido e reformatado)</a:t>
             </a:r>
             <a:endParaRPr lang="en-US" sz="1100" dirty="0"/>
           </a:p>
@@ -14429,7 +14429,7 @@
                   <a:schemeClr val="accent6"/>
                 </a:solidFill>
               </a:rPr>
-              <a:t>src/front/src/componentes/RotaProtegida.tsx (trecho resumido e reformatado)</a:t>
+              <a:t>src/front/src/componentes/acesso/RotaProtegida.tsx (trecho resumido e reformatado)</a:t>
             </a:r>
             <a:endParaRPr lang="en-US" sz="1100" dirty="0"/>
           </a:p>
@@ -19948,7 +19948,7 @@
                   <a:schemeClr val="accent6"/>
                 </a:solidFill>
               </a:rPr>
-              <a:t>src/back/repository (trecho resumido e reformatado)</a:t>
+              <a:t>src/back/app/repository (trecho resumido e reformatado)</a:t>
             </a:r>
             <a:endParaRPr lang="en-US" sz="1100" dirty="0"/>
           </a:p>

--- a/docs/apresentacao/Lab03S03-Apresentacao.pptx
+++ b/docs/apresentacao/Lab03S03-Apresentacao.pptx
@@ -17,9 +17,12 @@
     <p:sldId id="265" r:id="rId11"/>
     <p:sldId id="266" r:id="rId12"/>
     <p:sldId id="267" r:id="rId13"/>
+    <p:sldId id="268" r:id="rId14"/>
+    <p:sldId id="269" r:id="rId15"/>
+    <p:sldId id="270" r:id="rId16"/>
   </p:sldIdLst>
   <p:notesMasterIdLst>
-    <p:notesMasterId r:id="rId14"/>
+    <p:notesMasterId r:id="rId17"/>
   </p:notesMasterIdLst>
   <p:sldSz cx="12192000" cy="6858000"/>
   <p:notesSz cx="6858000" cy="12192000"/>
@@ -118,7 +121,7 @@
   <p:extLst>
     <p:ext uri="{521415D9-36F7-43E2-AB2F-B90AF26B5E84}">
       <p14:sectionLst xmlns:p14="http://schemas.microsoft.com/office/powerpoint/2010/main">
-        <p14:section name="O trabalho" id="{8fb8f00f-edfa-3dc8-8bfe-16f2960b1209}">
+        <p14:section name="O trabalho" id="{f151c33d-9b6f-d4e3-d97b-2c448b5e0bba}">
           <p14:sldIdLst>
             <p14:sldId id="256"/>
             <p14:sldId id="257"/>
@@ -128,7 +131,7 @@
             <p14:sldId id="261"/>
           </p14:sldIdLst>
         </p14:section>
-        <p14:section name="Oficina" id="{7841427f-6c0e-7c37-4b4f-9c9ea3f80e68}">
+        <p14:section name="Oficina" id="{df22f3b3-0236-d9eb-0fd5-727beb7dcc73}">
           <p14:sldIdLst>
             <p14:sldId id="262"/>
             <p14:sldId id="263"/>
@@ -136,6 +139,9 @@
             <p14:sldId id="265"/>
             <p14:sldId id="266"/>
             <p14:sldId id="267"/>
+            <p14:sldId id="268"/>
+            <p14:sldId id="269"/>
+            <p14:sldId id="270"/>
           </p14:sldIdLst>
         </p14:section>
       </p14:sectionLst>
@@ -542,8 +548,8 @@
           <a:p>
             <a:r>
               <a:rPr lang="en-US" dirty="0"/>
-              <a:t>Boa tarde, eu sou o Lucas e vou apresentar o Sistema de Moeda Estudantil, o projeto do Laboratório 3. Em cerca de dez minutos eu mostro o que foi construído, a aplicação funcionando e, como numa oficina, as tecnologias que usei e como usar cada uma.
-[Tempo: 0:20 | Dica: Sorria, olhe para a turma e não leia o slide. Diga o nome do projeto e o que vem pela frente.]</a:t>
+              <a:t>Boa tarde, eu sou o Lucas e vou apresentar o Sistema de Moeda Estudantil, o projeto do Laboratório de Desenvolvimento de Software. Primeiro mostro o que foi construído e a aplicação funcionando; depois, em formato de oficina, as tecnologias que usei, camada por camada, e como começar a usar cada uma.
+[Tempo: 0:10 | Dica: Sorria, olhe para a turma e não leia o slide.]</a:t>
             </a:r>
             <a:endParaRPr lang="en-US" dirty="0"/>
           </a:p>
@@ -631,8 +637,8 @@
           <a:p>
             <a:r>
               <a:rPr lang="en-US" dirty="0"/>
-              <a:t>O login funciona assim: a senha é guardada com bcrypt, só o hash com salt vai para o banco. No login o servidor confere a senha e devolve um token JWT assinado, com validade de duas horas. O front guarda o token e envia em todas as requisições no cabeçalho Authorization. Cada rota confere o perfil: aluno, professor ou empresa. Token inválido ou vencido volta para o login.
-[Tempo: 0:45 | Dica: Reforce que o servidor não guarda sessão e que a senha nunca fica legível.]</a:t>
+              <a:t>Agora o Controller, a API. O FastAPI transforma uma função com um decorador em uma rota HTTP. O Pydantic descreve o formato dos dados: no exemplo, o título não pode ser vazio e as páginas têm que ser maiores que zero. Se alguém mandar errado, a API já responde com erro 422 explicando o campo, como mostra o painel de baixo. Rodando com o uvicorn, a página barra docs mostra a documentação e deixa testar a rota no navegador.
+[Tempo: 0:45 | Dica: Cite http://localhost:8000/docs: é um bom momento para perguntar quem já fez uma API.]</a:t>
             </a:r>
             <a:endParaRPr lang="en-US" dirty="0"/>
           </a:p>
@@ -720,8 +726,8 @@
           <a:p>
             <a:r>
               <a:rPr lang="en-US" dirty="0"/>
-              <a:t>No front uso React com TypeScript. Cada tela é um componente e a lógica fica em hooks, como o de enviar moedas. O Vite compila e serve a aplicação rápido. O Tailwind estiliza com classes utilitárias direto no componente, sem arquivo de CSS solto. O exemplo é o guarda de rotas: quem não entrou vai para o login, e quem tem outro perfil volta ao início.
-[Tempo: 0:50 | Dica: Mostre o exemplo do RotaProtegida e as classes do botão. Cite os comandos npm run dev e npm test.]</a:t>
+              <a:t>Ainda no Controller, a segurança. A senha nunca é guardada como texto: o bcrypt gera um hash com salt, e só ele vai para o banco. No login, o servidor confere a senha e devolve um token JWT, assinado com um segredo e com validade. Nas rotas protegidas, o front envia o token no cabeçalho Authorization, o servidor valida a assinatura e descobre quem fez o pedido, sem guardar sessão.
+[Tempo: 0:40 | Dica: Frase-chave: o servidor não guarda sessão, o token identifica quem pediu.]</a:t>
             </a:r>
             <a:endParaRPr lang="en-US" dirty="0"/>
           </a:p>
@@ -809,8 +815,8 @@
           <a:p>
             <a:r>
               <a:rPr lang="en-US" dirty="0"/>
-              <a:t>Para fechar, a qualidade. São mais de duzentos testes automáticos no back-end, cento e quarenta e sete no front-end e quarenta e seis verificações no navegador real, que percorrem o sistema inteiro. Também testei envios simultâneos contra o banco real e fiz auditoria de dependências. O que ficou como próximo passo: agendar o crédito do semestre e validar o envio real pelo Gmail. O código e as instruções estão no GitHub. Obrigado, e fico à disposição para perguntas.
-[Tempo: 0:45 | Dica: Deixe este slide na tela durante as perguntas.]</a:t>
+              <a:t>Descendo para a persistência. O SQLAlchemy é um ORM: cada classe vira uma tabela e cada objeto, uma linha. Declaro a classe, aponto para o banco na engine e escrevo um repositório, que é uma classe que guarda e busca os objetos. As regras de negócio chamam o repositório sem saber que existe um banco por trás, e é isso que permite testar com repositórios falsos.
+[Tempo: 0:40 | Dica: Conecte com a arquitetura: no projeto o repositório tem uma interface, e o serviço depende dela.]</a:t>
             </a:r>
             <a:endParaRPr lang="en-US" dirty="0"/>
           </a:p>
@@ -834,6 +840,273 @@
             <a:fld id="{F7021451-1387-4CA6-816F-3879F97B5CBC}" type="slidenum">
               <a:rPr lang="en-US"/>
               <a:t>12</a:t>
+            </a:fld>
+            <a:endParaRPr lang="en-US"/>
+          </a:p>
+        </p:txBody>
+      </p:sp>
+    </p:spTree>
+    <p:extLst>
+      <p:ext uri="{BB962C8B-B14F-4D97-AF65-F5344CB8AC3E}">
+        <p14:creationId xmlns:p14="http://schemas.microsoft.com/office/powerpoint/2010/main" val="1024086991"/>
+      </p:ext>
+    </p:extLst>
+  </p:cSld>
+  <p:clrMapOvr>
+    <a:masterClrMapping/>
+  </p:clrMapOvr>
+</p:notes>
+</file>
+
+<file path=ppt/notesSlides/notesSlide13.xml><?xml version="1.0" encoding="utf-8"?>
+<p:notes xmlns:a="http://schemas.openxmlformats.org/drawingml/2006/main" xmlns:r="http://schemas.openxmlformats.org/officeDocument/2006/relationships" xmlns:p="http://schemas.openxmlformats.org/presentationml/2006/main">
+  <p:cSld>
+    <p:spTree>
+      <p:nvGrpSpPr>
+        <p:cNvPr id="1" name=""/>
+        <p:cNvGrpSpPr/>
+        <p:nvPr/>
+      </p:nvGrpSpPr>
+      <p:grpSpPr>
+        <a:xfrm>
+          <a:off x="0" y="0"/>
+          <a:ext cx="0" cy="0"/>
+          <a:chOff x="0" y="0"/>
+          <a:chExt cx="0" cy="0"/>
+        </a:xfrm>
+      </p:grpSpPr>
+      <p:sp>
+        <p:nvSpPr>
+          <p:cNvPr id="2" name="Slide Image Placeholder 1"/>
+          <p:cNvSpPr>
+            <a:spLocks noGrp="1" noRot="1" noChangeAspect="1"/>
+          </p:cNvSpPr>
+          <p:nvPr>
+            <p:ph type="sldImg"/>
+          </p:nvPr>
+        </p:nvSpPr>
+        <p:spPr/>
+      </p:sp>
+      <p:sp>
+        <p:nvSpPr>
+          <p:cNvPr id="3" name="Notes Placeholder 2"/>
+          <p:cNvSpPr>
+            <a:spLocks noGrp="1"/>
+          </p:cNvSpPr>
+          <p:nvPr>
+            <p:ph type="body" idx="1"/>
+          </p:nvPr>
+        </p:nvSpPr>
+        <p:spPr/>
+        <p:txBody>
+          <a:bodyPr/>
+          <a:lstStyle/>
+          <a:p>
+            <a:r>
+              <a:rPr lang="en-US" dirty="0"/>
+              <a:t>O banco é o PostgreSQL, que guarda os dados em tabelas, com chaves e restrições. E para o esquema não depender de ninguém lembrar o que mudou, uso o Alembic: cada alteração vira um arquivo de migração, com uma função para aplicar e outra para desfazer. Gero com autogenerate, aplico com upgrade head, e qualquer máquina chega ao mesmo esquema. Embaixo, o resultado visto no psql.
+[Tempo: 0:35 | Dica: Se sobrar tempo, comente que a migração do projeto é aplicada sozinha quando o contêiner da API sobe.]</a:t>
+            </a:r>
+            <a:endParaRPr lang="en-US" dirty="0"/>
+          </a:p>
+        </p:txBody>
+      </p:sp>
+      <p:sp>
+        <p:nvSpPr>
+          <p:cNvPr id="4" name="Slide Number Placeholder 3"/>
+          <p:cNvSpPr>
+            <a:spLocks noGrp="1"/>
+          </p:cNvSpPr>
+          <p:nvPr>
+            <p:ph type="sldNum" sz="quarter" idx="10"/>
+          </p:nvPr>
+        </p:nvSpPr>
+        <p:spPr/>
+        <p:txBody>
+          <a:bodyPr/>
+          <a:lstStyle/>
+          <a:p>
+            <a:fld id="{F7021451-1387-4CA6-816F-3879F97B5CBC}" type="slidenum">
+              <a:rPr lang="en-US"/>
+              <a:t>13</a:t>
+            </a:fld>
+            <a:endParaRPr lang="en-US"/>
+          </a:p>
+        </p:txBody>
+      </p:sp>
+    </p:spTree>
+    <p:extLst>
+      <p:ext uri="{BB962C8B-B14F-4D97-AF65-F5344CB8AC3E}">
+        <p14:creationId xmlns:p14="http://schemas.microsoft.com/office/powerpoint/2010/main" val="1024086991"/>
+      </p:ext>
+    </p:extLst>
+  </p:cSld>
+  <p:clrMapOvr>
+    <a:masterClrMapping/>
+  </p:clrMapOvr>
+</p:notes>
+</file>
+
+<file path=ppt/notesSlides/notesSlide14.xml><?xml version="1.0" encoding="utf-8"?>
+<p:notes xmlns:a="http://schemas.openxmlformats.org/drawingml/2006/main" xmlns:r="http://schemas.openxmlformats.org/officeDocument/2006/relationships" xmlns:p="http://schemas.openxmlformats.org/presentationml/2006/main">
+  <p:cSld>
+    <p:spTree>
+      <p:nvGrpSpPr>
+        <p:cNvPr id="1" name=""/>
+        <p:cNvGrpSpPr/>
+        <p:nvPr/>
+      </p:nvGrpSpPr>
+      <p:grpSpPr>
+        <a:xfrm>
+          <a:off x="0" y="0"/>
+          <a:ext cx="0" cy="0"/>
+          <a:chOff x="0" y="0"/>
+          <a:chExt cx="0" cy="0"/>
+        </a:xfrm>
+      </p:grpSpPr>
+      <p:sp>
+        <p:nvSpPr>
+          <p:cNvPr id="2" name="Slide Image Placeholder 1"/>
+          <p:cNvSpPr>
+            <a:spLocks noGrp="1" noRot="1" noChangeAspect="1"/>
+          </p:cNvSpPr>
+          <p:nvPr>
+            <p:ph type="sldImg"/>
+          </p:nvPr>
+        </p:nvSpPr>
+        <p:spPr/>
+      </p:sp>
+      <p:sp>
+        <p:nvSpPr>
+          <p:cNvPr id="3" name="Notes Placeholder 2"/>
+          <p:cNvSpPr>
+            <a:spLocks noGrp="1"/>
+          </p:cNvSpPr>
+          <p:nvPr>
+            <p:ph type="body" idx="1"/>
+          </p:nvPr>
+        </p:nvSpPr>
+        <p:spPr/>
+        <p:txBody>
+          <a:bodyPr/>
+          <a:lstStyle/>
+          <a:p>
+            <a:r>
+              <a:rPr lang="en-US" dirty="0"/>
+              <a:t>Por fim, o ambiente. O Docker empacota cada serviço em um contêiner, descrito por um Dockerfile. O Compose liga os três, banco, API e front, em um único arquivo. Com um comando, docker compose up, tudo sobe junto, e quem baixar o projeto não precisa instalar Python, Node nem PostgreSQL. Para limpar tudo, docker compose down com a opção menos v.
+[Tempo: 0:35 | Dica: Os comandos do slide são os mesmos que usará na demonstração ao vivo.]</a:t>
+            </a:r>
+            <a:endParaRPr lang="en-US" dirty="0"/>
+          </a:p>
+        </p:txBody>
+      </p:sp>
+      <p:sp>
+        <p:nvSpPr>
+          <p:cNvPr id="4" name="Slide Number Placeholder 3"/>
+          <p:cNvSpPr>
+            <a:spLocks noGrp="1"/>
+          </p:cNvSpPr>
+          <p:nvPr>
+            <p:ph type="sldNum" sz="quarter" idx="10"/>
+          </p:nvPr>
+        </p:nvSpPr>
+        <p:spPr/>
+        <p:txBody>
+          <a:bodyPr/>
+          <a:lstStyle/>
+          <a:p>
+            <a:fld id="{F7021451-1387-4CA6-816F-3879F97B5CBC}" type="slidenum">
+              <a:rPr lang="en-US"/>
+              <a:t>14</a:t>
+            </a:fld>
+            <a:endParaRPr lang="en-US"/>
+          </a:p>
+        </p:txBody>
+      </p:sp>
+    </p:spTree>
+    <p:extLst>
+      <p:ext uri="{BB962C8B-B14F-4D97-AF65-F5344CB8AC3E}">
+        <p14:creationId xmlns:p14="http://schemas.microsoft.com/office/powerpoint/2010/main" val="1024086991"/>
+      </p:ext>
+    </p:extLst>
+  </p:cSld>
+  <p:clrMapOvr>
+    <a:masterClrMapping/>
+  </p:clrMapOvr>
+</p:notes>
+</file>
+
+<file path=ppt/notesSlides/notesSlide15.xml><?xml version="1.0" encoding="utf-8"?>
+<p:notes xmlns:a="http://schemas.openxmlformats.org/drawingml/2006/main" xmlns:r="http://schemas.openxmlformats.org/officeDocument/2006/relationships" xmlns:p="http://schemas.openxmlformats.org/presentationml/2006/main">
+  <p:cSld>
+    <p:spTree>
+      <p:nvGrpSpPr>
+        <p:cNvPr id="1" name=""/>
+        <p:cNvGrpSpPr/>
+        <p:nvPr/>
+      </p:nvGrpSpPr>
+      <p:grpSpPr>
+        <a:xfrm>
+          <a:off x="0" y="0"/>
+          <a:ext cx="0" cy="0"/>
+          <a:chOff x="0" y="0"/>
+          <a:chExt cx="0" cy="0"/>
+        </a:xfrm>
+      </p:grpSpPr>
+      <p:sp>
+        <p:nvSpPr>
+          <p:cNvPr id="2" name="Slide Image Placeholder 1"/>
+          <p:cNvSpPr>
+            <a:spLocks noGrp="1" noRot="1" noChangeAspect="1"/>
+          </p:cNvSpPr>
+          <p:nvPr>
+            <p:ph type="sldImg"/>
+          </p:nvPr>
+        </p:nvSpPr>
+        <p:spPr/>
+      </p:sp>
+      <p:sp>
+        <p:nvSpPr>
+          <p:cNvPr id="3" name="Notes Placeholder 2"/>
+          <p:cNvSpPr>
+            <a:spLocks noGrp="1"/>
+          </p:cNvSpPr>
+          <p:nvPr>
+            <p:ph type="body" idx="1"/>
+          </p:nvPr>
+        </p:nvSpPr>
+        <p:spPr/>
+        <p:txBody>
+          <a:bodyPr/>
+          <a:lstStyle/>
+          <a:p>
+            <a:r>
+              <a:rPr lang="en-US" dirty="0"/>
+              <a:t>Era isso. Muito obrigado pela atenção. O código, os diagramas e as instruções para rodar estão no GitHub.
+[Tempo: 0:10 | Dica: Deixe este slide na tela durante as perguntas.]</a:t>
+            </a:r>
+            <a:endParaRPr lang="en-US" dirty="0"/>
+          </a:p>
+        </p:txBody>
+      </p:sp>
+      <p:sp>
+        <p:nvSpPr>
+          <p:cNvPr id="4" name="Slide Number Placeholder 3"/>
+          <p:cNvSpPr>
+            <a:spLocks noGrp="1"/>
+          </p:cNvSpPr>
+          <p:nvPr>
+            <p:ph type="sldNum" sz="quarter" idx="10"/>
+          </p:nvPr>
+        </p:nvSpPr>
+        <p:spPr/>
+        <p:txBody>
+          <a:bodyPr/>
+          <a:lstStyle/>
+          <a:p>
+            <a:fld id="{F7021451-1387-4CA6-816F-3879F97B5CBC}" type="slidenum">
+              <a:rPr lang="en-US"/>
+              <a:t>15</a:t>
             </a:fld>
             <a:endParaRPr lang="en-US"/>
           </a:p>
@@ -898,8 +1171,8 @@
           <a:p>
             <a:r>
               <a:rPr lang="en-US" dirty="0"/>
-              <a:t>A ideia é reconhecer o mérito dos alunos. O professor recebe mil moedas por semestre e envia aos alunos com uma mensagem explicando o motivo. O aluno acumula as moedas e troca por vantagens oferecidas por empresas parceiras. A empresa cadastra a vantagem com foto e custo e confere o código do cupom. Todos entram com login e senha, e o sistema manda e-mails automáticos. Cobri todos os requisitos do enunciado.
-[Tempo: 0:50 | Dica: Aponte para os três cartões da esquerda para a direita, seguindo as setas. Termine na faixa dos e-mails.]</a:t>
+              <a:t>A ideia é reconhecer o mérito dos alunos. O professor recebe mil moedas por semestre e envia aos alunos com uma mensagem explicando o motivo. O aluno acumula as moedas e troca por vantagens oferecidas por empresas parceiras. A empresa cadastra a vantagem com foto e custo e confere o código do cupom que o aluno apresenta. Todos entram com login e senha e o sistema manda e-mails automáticos.
+[Tempo: 0:40 | Dica: Aponte para os três cartões da esquerda para a direita, seguindo as setas.]</a:t>
             </a:r>
             <a:endParaRPr lang="en-US" dirty="0"/>
           </a:p>
@@ -987,8 +1260,8 @@
           <a:p>
             <a:r>
               <a:rPr lang="en-US" dirty="0"/>
-              <a:t>Segui o padrão MVC em camadas. O React é a View, o FastAPI é o Controller, os serviços e as entidades formam o Model e a persistência fica com repositórios, SQLAlchemy e PostgreSQL. Cada camada só conversa com a de baixo, por interfaces. Por isso eu consigo testar as regras sem banco e trocar o banco sem mexer nelas. O e-mail é um sistema externo ligado por uma interface.
-[Tempo: 0:50 | Dica: Percorra o diagrama de cima para baixo com o dedo ou o ponteiro. Se perguntarem, o diagrama de classes está no README.]</a:t>
+              <a:t>Segui o padrão MVC em camadas. O React é a View, o FastAPI é o Controller, os serviços e as entidades formam o Model, e a persistência fica com repositórios, SQLAlchemy e PostgreSQL. Cada camada só conversa com a de baixo, por interfaces. Por isso dá para testar as regras sem banco e trocar o banco sem mexer nelas. O e-mail é um sistema externo ligado por uma interface.
+[Tempo: 0:40 | Dica: Percorra o diagrama de cima para baixo com o ponteiro. O diagrama de classes está no README, se alguém perguntar.]</a:t>
             </a:r>
             <a:endParaRPr lang="en-US" dirty="0"/>
           </a:p>
@@ -1076,8 +1349,8 @@
           <a:p>
             <a:r>
               <a:rPr lang="en-US" dirty="0"/>
-              <a:t>Aqui a aplicação funcionando. À esquerda o cadastro do aluno, com validação em português por campo. No meio a empresa cadastrando uma vantagem: descrição, custo e a foto do produto. À direita a lista das vantagens da empresa. Cada perfil só enxerga as telas dele: a empresa não acessa o extrato e o aluno não acessa o envio de moedas.
-[Tempo: 0:55 | Dica: Se for fazer a demonstração ao vivo, é aqui: cadastre uma empresa e uma vantagem (roteiro no guia). Senão, narre os prints.]</a:t>
+              <a:t>Aqui a aplicação funcionando. À esquerda o cadastro do aluno, com validação em português por campo. À direita a empresa com as vantagens que cadastrou: descrição, custo e a foto do produto. Cada perfil só enxerga as telas dele: a empresa não acessa o extrato e o aluno não acessa o envio de moedas.
+[Tempo: 0:40 | Dica: Se for fazer a demonstração ao vivo, é aqui: cadastre uma empresa e uma vantagem (roteiro no fim deste guia). Senão, narre os prints.]</a:t>
             </a:r>
             <a:endParaRPr lang="en-US" dirty="0"/>
           </a:p>
@@ -1165,8 +1438,8 @@
           <a:p>
             <a:r>
               <a:rPr lang="en-US" dirty="0"/>
-              <a:t>Agora o coração do sistema. O professor escolhe o aluno, informa o valor e o motivo, que é obrigatório. O saldo é conferido antes e o aluno recebe um e-mail. Do lado do aluno, o catálogo mostra as vantagens com foto e custo. Ao resgatar, o saldo é descontado e o sistema gera um código de cupom. O botão fica desabilitado quando o saldo não cobre o custo.
-[Tempo: 0:55 | Dica: Destaque dois pontos: o motivo obrigatório e o código do cupom na mensagem de sucesso.]</a:t>
+              <a:t>Agora o coração do sistema. O professor escolhe o aluno, informa o valor e o motivo, que é obrigatório. O saldo é conferido antes e o aluno recebe um e-mail. Do lado do aluno, ao resgatar uma vantagem o saldo é descontado e o sistema gera um código de cupom. O botão de resgatar fica desabilitado quando o saldo não cobre o custo.
+[Tempo: 0:45 | Dica: Destaque dois pontos: o motivo obrigatório e o código do cupom na mensagem de sucesso.]</a:t>
             </a:r>
             <a:endParaRPr lang="en-US" dirty="0"/>
           </a:p>
@@ -1254,8 +1527,8 @@
           <a:p>
             <a:r>
               <a:rPr lang="en-US" dirty="0"/>
-              <a:t>O extrato do aluno mostra o saldo e cada movimentação: o que entrou, em verde, e o que saiu, em vermelho. No resgate saem dois e-mails com o mesmo código: o cupom para o aluno e a conferência para a empresa. O envio usa o SMTP do Gmail configurado no arquivo .env. Sem credenciais, o texto aparece no log da API e nada é enviado.
-[Tempo: 0:45 | Dica: Seja transparente: o envio real pelo Gmail depende da senha de aplicativo; nos testes usei um SMTP simulado.]</a:t>
+              <a:t>O extrato do aluno mostra o saldo e cada movimentação: o que entrou, em verde, e o que saiu, em vermelho. No resgate saem dois e-mails. O primeiro vai para o aluno, com o cupom. O segundo vai para a empresa, avisando que aquele aluno resgatou a vantagem. O código é o mesmo nos dois de propósito: o aluno apresenta o cupom na empresa e ela confere se bate com o código que recebeu. O envio usa o SMTP do Gmail configurado no arquivo .env; sem credenciais, o texto aparece no log da API e nada é enviado.
+[Tempo: 0:35 | Dica: Se perguntarem por que o código se repete: é a forma de a empresa conferir o cupom do aluno. Seja transparente: o envio real pelo Gmail depende da senha de aplicativo; nos testes foi usado um SMTP simulado.]</a:t>
             </a:r>
             <a:endParaRPr lang="en-US" dirty="0"/>
           </a:p>
@@ -1343,8 +1616,8 @@
           <a:p>
             <a:r>
               <a:rPr lang="en-US" dirty="0"/>
-              <a:t>Agora a parte de oficina. Começando pelo Docker Compose. Ele sobe o banco, a API e o front com um único comando. Na prática: descrevo os serviços em um arquivo, rodo docker compose up, e pronto, o sistema está no ar. A API só inicia depois que o banco está saudável e, ao subir, aplica as migrações e a carga inicial. Quem baixar o projeto não precisa instalar Python, Node ou PostgreSQL.
-[Tempo: 0:45 | Dica: Mostre os comandos do slide; são os mesmos que usará para rodar a demonstração.]</a:t>
+              <a:t>Agora a oficina. Vou seguir as mesmas camadas do MVC, porque cada tecnologia mora em uma delas. Na View, React, TypeScript e Tailwind. No Controller, FastAPI e Pydantic para a API, e JWT e bcrypt para a segurança. No Model ficam as regras de negócio, em Python puro. Na persistência, SQLAlchemy, PostgreSQL e Alembic. E no ambiente, o Docker Compose. Em cada uma mostro um exemplo pequeno e como usar.
+[Tempo: 0:30 | Dica: Passe o dedo pelas linhas de cima para baixo. Os exemplos das próximas telas são genéricos (cadastro de livros), não são do código do projeto.]</a:t>
             </a:r>
             <a:endParaRPr lang="en-US" dirty="0"/>
           </a:p>
@@ -1432,8 +1705,8 @@
           <a:p>
             <a:r>
               <a:rPr lang="en-US" dirty="0"/>
-              <a:t>O FastAPI cria APIs REST em Python. Cada rota é uma função com um decorador. O Pydantic valida os dados que chegam: o corpo da requisição já vem como um objeto tipado, e erros viram mensagens em português. O Depends injeta o serviço e o usuário logado, e é ali que eu confiro o perfil. De graça, ele gera a documentação em barra docs.
-[Tempo: 0:50 | Dica: Aponte o decorador, o schema do corpo e o Depends no código. Cite http://localhost:8000/docs.]</a:t>
+              <a:t>Começando pela tela. O React monta a interface com componentes, que são funções que devolvem um pedaço de tela. O TypeScript acrescenta tipos ao JavaScript e avisa de erros antes de rodar. Para começar, crio o projeto com o Vite, instalo e rodo. No exemplo, declaro o tipo Livro, guardo a lista no estado, busco na API quando o componente aparece e desenho uma lista. Se a API devolver algo fora do tipo, o editor já reclama.
+[Tempo: 0:45 | Dica: Leia o código em quatro pedaços: o tipo, o estado, a busca e o que é desenhado.]</a:t>
             </a:r>
             <a:endParaRPr lang="en-US" dirty="0"/>
           </a:p>
@@ -1521,8 +1794,8 @@
           <a:p>
             <a:r>
               <a:rPr lang="en-US" dirty="0"/>
-              <a:t>Para a camada de persistência usei o padrão Repository sobre o ORM SQLAlchemy. O ORM transforma classes em tabelas. O serviço não conhece o banco: ele recebe uma interface de repositório, e o repositório concreto faz as consultas. Isso permite testar com repositórios falsos em memória. O Alembic versiona o esquema em migrações, e o saldo é protegido com uma trava de linha, o for update, para dois envios ao mesmo tempo não gastarem o mesmo saldo. Eu testei isso com envios simultâneos.
-[Tempo: 0:55 | Dica: Se sobrar tempo, mostre o diagrama entidade-relacionamento do README. O ponto forte é a trava de saldo.]</a:t>
+              <a:t>Ainda na View, o Tailwind. Em vez de escrever um arquivo de CSS, eu uso classes prontas direto no elemento. Cada classe faz uma coisa: px-4 é o espaço lateral, bg-indigo-600 é a cor de fundo, hover muda a cor quando passa o mouse. Para usar, instalo o pacote, registro o plugin no Vite e importo o Tailwind no CSS principal. Depois é só combinar as classes no className.
+[Tempo: 0:35 | Dica: Aponte para o botão e leia duas ou três classes, sem listar todas.]</a:t>
             </a:r>
             <a:endParaRPr lang="en-US" dirty="0"/>
           </a:p>
@@ -2345,7 +2618,7 @@
                   <a:schemeClr val="bg1"/>
                 </a:solidFill>
               </a:rPr>
-              <a:t>Laboratório de Desenvolvimento de Software — Sprint 3</a:t>
+              <a:t>Laboratório de Desenvolvimento de Software</a:t>
             </a:r>
             <a:endParaRPr lang="en-US" sz="2000" dirty="0"/>
           </a:p>
@@ -2362,7 +2635,7 @@
                   <a:schemeClr val="bg2"/>
                 </a:solidFill>
               </a:rPr>
-              <a:t>O que foi feito e uma oficina rápida das tecnologias</a:t>
+              <a:t>Profa. Milena Menezes Adão</a:t>
             </a:r>
             <a:endParaRPr lang="en-US" sz="2000" dirty="0"/>
           </a:p>
@@ -2397,23 +2670,6 @@
                 </a:solidFill>
               </a:rPr>
               <a:t>Lucas Lima Magalhães Lafetá Chaves</a:t>
-            </a:r>
-            <a:endParaRPr lang="en-US" sz="2000" dirty="0"/>
-          </a:p>
-          <a:p>
-            <a:pPr algn="l" indent="0" marL="0">
-              <a:spcAft>
-                <a:spcPts val="600"/>
-              </a:spcAft>
-              <a:buNone/>
-            </a:pPr>
-            <a:r>
-              <a:rPr lang="en-US" sz="2000" dirty="0">
-                <a:solidFill>
-                  <a:schemeClr val="bg2"/>
-                </a:solidFill>
-              </a:rPr>
-              <a:t>Engenharia de Software — PUC Minas  |  Profa. Milena Menezes Adão</a:t>
             </a:r>
             <a:endParaRPr lang="en-US" sz="2000" dirty="0"/>
           </a:p>
@@ -2532,7 +2788,7 @@
                   <a:schemeClr val="tx1"/>
                 </a:solidFill>
               </a:rPr>
-              <a:t>Oficina 4: Login com JWT e bcrypt</a:t>
+              <a:t>FastAPI e Pydantic: uma API validada</a:t>
             </a:r>
             <a:endParaRPr lang="en-US" sz="3200" dirty="0"/>
           </a:p>
@@ -2540,14 +2796,36 @@
       </p:sp>
       <p:sp>
         <p:nvSpPr>
-          <p:cNvPr id="3" name="texto-87"/>
+          <p:cNvPr id="3" name="etiqueta-116"/>
+          <p:cNvSpPr/>
+          <p:nvPr/>
+        </p:nvSpPr>
+        <p:spPr>
+          <a:xfrm>
+            <a:off x="548640" y="1325880"/>
+            <a:ext cx="2286000" cy="347472"/>
+          </a:xfrm>
+          <a:prstGeom prst="roundRect">
+            <a:avLst>
+              <a:gd name="adj" fmla="val 50000"/>
+            </a:avLst>
+          </a:prstGeom>
+          <a:solidFill>
+            <a:schemeClr val="accent1"/>
+          </a:solidFill>
+          <a:ln/>
+        </p:spPr>
+      </p:sp>
+      <p:sp>
+        <p:nvSpPr>
+          <p:cNvPr id="4" name="texto-117"/>
           <p:cNvSpPr txBox="1"/>
           <p:nvPr/>
         </p:nvSpPr>
         <p:spPr>
           <a:xfrm>
-            <a:off x="548640" y="1371600"/>
-            <a:ext cx="4754880" cy="320040"/>
+            <a:off x="548640" y="1325880"/>
+            <a:ext cx="2286000" cy="347472"/>
           </a:xfrm>
           <a:prstGeom prst="rect">
             <a:avLst/>
@@ -2559,13 +2837,49 @@
           <a:bodyPr wrap="square" lIns="0" tIns="0" rIns="0" bIns="0" rtlCol="0" anchor="ctr"/>
           <a:lstStyle/>
           <a:p>
+            <a:pPr algn="ctr" indent="0" marL="0">
+              <a:buNone/>
+            </a:pPr>
+            <a:r>
+              <a:rPr lang="en-US" sz="1300" b="1" dirty="0">
+                <a:solidFill>
+                  <a:schemeClr val="bg1"/>
+                </a:solidFill>
+              </a:rPr>
+              <a:t>Camada Controller</a:t>
+            </a:r>
+            <a:endParaRPr lang="en-US" sz="1300" dirty="0"/>
+          </a:p>
+        </p:txBody>
+      </p:sp>
+      <p:sp>
+        <p:nvSpPr>
+          <p:cNvPr id="5" name="texto-118"/>
+          <p:cNvSpPr txBox="1"/>
+          <p:nvPr/>
+        </p:nvSpPr>
+        <p:spPr>
+          <a:xfrm>
+            <a:off x="548640" y="1874520"/>
+            <a:ext cx="4572000" cy="320040"/>
+          </a:xfrm>
+          <a:prstGeom prst="rect">
+            <a:avLst/>
+          </a:prstGeom>
+          <a:noFill/>
+          <a:ln/>
+        </p:spPr>
+        <p:txBody>
+          <a:bodyPr wrap="square" lIns="0" tIns="0" rIns="0" bIns="0" rtlCol="0" anchor="ctr"/>
+          <a:lstStyle/>
+          <a:p>
             <a:pPr indent="0" marL="0">
               <a:buNone/>
             </a:pPr>
             <a:r>
               <a:rPr lang="en-US" sz="1800" b="1" dirty="0">
                 <a:solidFill>
-                  <a:schemeClr val="accent4"/>
+                  <a:schemeClr val="accent1"/>
                 </a:solidFill>
               </a:rPr>
               <a:t>O que é</a:t>
@@ -2576,14 +2890,14 @@
       </p:sp>
       <p:sp>
         <p:nvSpPr>
-          <p:cNvPr id="4" name="texto-88"/>
+          <p:cNvPr id="6" name="texto-119"/>
           <p:cNvSpPr txBox="1"/>
           <p:nvPr/>
         </p:nvSpPr>
         <p:spPr>
           <a:xfrm>
-            <a:off x="548640" y="1783080"/>
-            <a:ext cx="4754880" cy="1188720"/>
+            <a:off x="548640" y="2240280"/>
+            <a:ext cx="4572000" cy="1371600"/>
           </a:xfrm>
           <a:prstGeom prst="rect">
             <a:avLst/>
@@ -2599,27 +2913,27 @@
               <a:buNone/>
             </a:pPr>
             <a:r>
-              <a:rPr lang="en-US" sz="1600" dirty="0">
+              <a:rPr lang="en-US" sz="1500" dirty="0">
                 <a:solidFill>
                   <a:schemeClr val="tx1"/>
                 </a:solidFill>
               </a:rPr>
-              <a:t>bcrypt guarda a senha como hash com salt. O JWT é um token assinado que identifica o usuário a cada requisição.</a:t>
-            </a:r>
-            <a:endParaRPr lang="en-US" sz="1600" dirty="0"/>
-          </a:p>
-        </p:txBody>
-      </p:sp>
-      <p:sp>
-        <p:nvSpPr>
-          <p:cNvPr id="5" name="texto-89"/>
+              <a:t>O FastAPI transforma uma função com decorador em uma rota HTTP. O Pydantic descreve o formato dos dados e recusa o que não bate, com mensagem clara.</a:t>
+            </a:r>
+            <a:endParaRPr lang="en-US" sz="1500" dirty="0"/>
+          </a:p>
+        </p:txBody>
+      </p:sp>
+      <p:sp>
+        <p:nvSpPr>
+          <p:cNvPr id="7" name="texto-120"/>
           <p:cNvSpPr txBox="1"/>
           <p:nvPr/>
         </p:nvSpPr>
         <p:spPr>
           <a:xfrm>
-            <a:off x="548640" y="3154680"/>
-            <a:ext cx="4754880" cy="320040"/>
+            <a:off x="548640" y="3429000"/>
+            <a:ext cx="4572000" cy="320040"/>
           </a:xfrm>
           <a:prstGeom prst="rect">
             <a:avLst/>
@@ -2637,7 +2951,7 @@
             <a:r>
               <a:rPr lang="en-US" sz="1800" b="1" dirty="0">
                 <a:solidFill>
-                  <a:schemeClr val="accent4"/>
+                  <a:schemeClr val="accent1"/>
                 </a:solidFill>
               </a:rPr>
               <a:t>Como usar</a:t>
@@ -2648,14 +2962,14 @@
       </p:sp>
       <p:sp>
         <p:nvSpPr>
-          <p:cNvPr id="6" name="texto-90"/>
+          <p:cNvPr id="8" name="texto-121"/>
           <p:cNvSpPr txBox="1"/>
           <p:nvPr/>
         </p:nvSpPr>
         <p:spPr>
           <a:xfrm>
-            <a:off x="548640" y="3566160"/>
-            <a:ext cx="4754880" cy="2194560"/>
+            <a:off x="548640" y="3794760"/>
+            <a:ext cx="4572000" cy="2468880"/>
           </a:xfrm>
           <a:prstGeom prst="rect">
             <a:avLst/>
@@ -2676,14 +2990,14 @@
               <a:buAutoNum type="arabicPeriod" startAt="1"/>
             </a:pPr>
             <a:r>
-              <a:rPr lang="en-US" sz="1600" dirty="0">
+              <a:rPr lang="en-US" sz="1500" dirty="0">
                 <a:solidFill>
                   <a:schemeClr val="tx1"/>
                 </a:solidFill>
               </a:rPr>
-              <a:t>POST /autenticacao/entrar devolve o token</a:t>
-            </a:r>
-            <a:endParaRPr lang="en-US" sz="1600" dirty="0"/>
+              <a:t>Instalar: pip install fastapi uvicorn</a:t>
+            </a:r>
+            <a:endParaRPr lang="en-US" sz="1500" dirty="0"/>
           </a:p>
           <a:p>
             <a:pPr marL="342900" indent="-342900">
@@ -2695,14 +3009,14 @@
               <a:buAutoNum type="arabicPeriod" startAt="1"/>
             </a:pPr>
             <a:r>
-              <a:rPr lang="en-US" sz="1600" dirty="0">
+              <a:rPr lang="en-US" sz="1500" dirty="0">
                 <a:solidFill>
                   <a:schemeClr val="tx1"/>
                 </a:solidFill>
               </a:rPr>
-              <a:t>O front envia Authorization: Bearer &lt;token&gt;</a:t>
-            </a:r>
-            <a:endParaRPr lang="en-US" sz="1600" dirty="0"/>
+              <a:t>Descrever os dados com Pydantic</a:t>
+            </a:r>
+            <a:endParaRPr lang="en-US" sz="1500" dirty="0"/>
           </a:p>
           <a:p>
             <a:pPr marL="342900" indent="-342900">
@@ -2714,14 +3028,14 @@
               <a:buAutoNum type="arabicPeriod" startAt="1"/>
             </a:pPr>
             <a:r>
-              <a:rPr lang="en-US" sz="1600" dirty="0">
+              <a:rPr lang="en-US" sz="1500" dirty="0">
                 <a:solidFill>
                   <a:schemeClr val="tx1"/>
                 </a:solidFill>
               </a:rPr>
-              <a:t>Cada rota confere o perfil do usuário</a:t>
-            </a:r>
-            <a:endParaRPr lang="en-US" sz="1600" dirty="0"/>
+              <a:t>Criar a rota com o decorador</a:t>
+            </a:r>
+            <a:endParaRPr lang="en-US" sz="1500" dirty="0"/>
           </a:p>
           <a:p>
             <a:pPr marL="342900" indent="-342900">
@@ -2733,31 +3047,31 @@
               <a:buAutoNum type="arabicPeriod" startAt="1"/>
             </a:pPr>
             <a:r>
-              <a:rPr lang="en-US" sz="1600" dirty="0">
+              <a:rPr lang="en-US" sz="1500" dirty="0">
                 <a:solidFill>
                   <a:schemeClr val="tx1"/>
                 </a:solidFill>
               </a:rPr>
-              <a:t>Token inválido ou vencido: 401 e volta ao login</a:t>
-            </a:r>
-            <a:endParaRPr lang="en-US" sz="1600" dirty="0"/>
-          </a:p>
-        </p:txBody>
-      </p:sp>
-      <p:sp>
-        <p:nvSpPr>
-          <p:cNvPr id="7" name="painel-codigo-91"/>
+              <a:t>Rodar: uvicorn main:app --reload e abrir localhost:8000/docs</a:t>
+            </a:r>
+            <a:endParaRPr lang="en-US" sz="1500" dirty="0"/>
+          </a:p>
+        </p:txBody>
+      </p:sp>
+      <p:sp>
+        <p:nvSpPr>
+          <p:cNvPr id="9" name="painel-codigo-122"/>
           <p:cNvSpPr/>
           <p:nvPr/>
         </p:nvSpPr>
         <p:spPr>
           <a:xfrm>
-            <a:off x="5577840" y="1371600"/>
-            <a:ext cx="6080760" cy="3342132"/>
+            <a:off x="5440680" y="1325880"/>
+            <a:ext cx="6217920" cy="3218688"/>
           </a:xfrm>
           <a:prstGeom prst="roundRect">
             <a:avLst>
-              <a:gd name="adj" fmla="val 2736"/>
+              <a:gd name="adj" fmla="val 2841"/>
             </a:avLst>
           </a:prstGeom>
           <a:solidFill>
@@ -2768,41 +3082,63 @@
       </p:sp>
       <p:sp>
         <p:nvSpPr>
-          <p:cNvPr id="8" name="texto-92"/>
+          <p:cNvPr id="10" name="texto-123"/>
           <p:cNvSpPr txBox="1"/>
           <p:nvPr/>
         </p:nvSpPr>
         <p:spPr>
           <a:xfrm>
-            <a:off x="5806440" y="1554480"/>
-            <a:ext cx="5623560" cy="2976372"/>
-          </a:xfrm>
-          <a:prstGeom prst="rect">
-            <a:avLst/>
-          </a:prstGeom>
-          <a:noFill/>
-          <a:ln/>
-        </p:spPr>
-        <p:txBody>
-          <a:bodyPr wrap="square" lIns="0" tIns="0" rIns="0" bIns="0" rtlCol="0" anchor="t"/>
-          <a:lstStyle/>
-          <a:p>
-            <a:pPr indent="0" marL="0">
-              <a:buNone/>
-            </a:pPr>
-            <a:r>
-              <a:rPr lang="en-US" sz="1300" dirty="0">
-                <a:solidFill>
-                  <a:schemeClr val="bg2"/>
+            <a:off x="5669280" y="1435608"/>
+            <a:ext cx="5760720" cy="274320"/>
+          </a:xfrm>
+          <a:prstGeom prst="rect">
+            <a:avLst/>
+          </a:prstGeom>
+          <a:noFill/>
+          <a:ln/>
+        </p:spPr>
+        <p:txBody>
+          <a:bodyPr wrap="square" lIns="0" tIns="0" rIns="0" bIns="0" rtlCol="0" anchor="ctr"/>
+          <a:lstStyle/>
+          <a:p>
+            <a:pPr indent="0" marL="0">
+              <a:buNone/>
+            </a:pPr>
+            <a:r>
+              <a:rPr lang="en-US" sz="1200" b="1" dirty="0">
+                <a:solidFill>
+                  <a:schemeClr val="accent2"/>
                 </a:solidFill>
                 <a:latin typeface="Courier New" pitchFamily="34" charset="0"/>
                 <a:ea typeface="Courier New" pitchFamily="34" charset="-122"/>
                 <a:cs typeface="Courier New" pitchFamily="34" charset="-120"/>
               </a:rPr>
-              <a:t>def emitir_token(self, usuario) -&gt; str:</a:t>
-            </a:r>
-            <a:endParaRPr lang="en-US" sz="1300" dirty="0"/>
-          </a:p>
+              <a:t>main.py</a:t>
+            </a:r>
+            <a:endParaRPr lang="en-US" sz="1200" dirty="0"/>
+          </a:p>
+        </p:txBody>
+      </p:sp>
+      <p:sp>
+        <p:nvSpPr>
+          <p:cNvPr id="11" name="texto-124"/>
+          <p:cNvSpPr txBox="1"/>
+          <p:nvPr/>
+        </p:nvSpPr>
+        <p:spPr>
+          <a:xfrm>
+            <a:off x="5669280" y="1783080"/>
+            <a:ext cx="5760720" cy="2670048"/>
+          </a:xfrm>
+          <a:prstGeom prst="rect">
+            <a:avLst/>
+          </a:prstGeom>
+          <a:noFill/>
+          <a:ln/>
+        </p:spPr>
+        <p:txBody>
+          <a:bodyPr wrap="square" lIns="0" tIns="0" rIns="0" bIns="0" rtlCol="0" anchor="t"/>
+          <a:lstStyle/>
           <a:p>
             <a:pPr indent="0" marL="0">
               <a:buNone/>
@@ -2816,7 +3152,7 @@
                 <a:ea typeface="Courier New" pitchFamily="34" charset="-122"/>
                 <a:cs typeface="Courier New" pitchFamily="34" charset="-120"/>
               </a:rPr>
-              <a:t>    agora = datetime.now(timezone.utc)</a:t>
+              <a:t>from fastapi import FastAPI</a:t>
             </a:r>
             <a:endParaRPr lang="en-US" sz="1300" dirty="0"/>
           </a:p>
@@ -2833,8 +3169,14 @@
                 <a:ea typeface="Courier New" pitchFamily="34" charset="-122"/>
                 <a:cs typeface="Courier New" pitchFamily="34" charset="-120"/>
               </a:rPr>
-              <a:t>    carga = {</a:t>
-            </a:r>
+              <a:t>from pydantic import BaseModel, Field</a:t>
+            </a:r>
+            <a:endParaRPr lang="en-US" sz="1300" dirty="0"/>
+          </a:p>
+          <a:p>
+            <a:pPr indent="0" marL="0">
+              <a:buNone/>
+            </a:pPr>
             <a:endParaRPr lang="en-US" sz="1300" dirty="0"/>
           </a:p>
           <a:p>
@@ -2850,8 +3192,14 @@
                 <a:ea typeface="Courier New" pitchFamily="34" charset="-122"/>
                 <a:cs typeface="Courier New" pitchFamily="34" charset="-120"/>
               </a:rPr>
-              <a:t>        "sub": str(usuario.id_usuario),</a:t>
-            </a:r>
+              <a:t>app = FastAPI()</a:t>
+            </a:r>
+            <a:endParaRPr lang="en-US" sz="1300" dirty="0"/>
+          </a:p>
+          <a:p>
+            <a:pPr indent="0" marL="0">
+              <a:buNone/>
+            </a:pPr>
             <a:endParaRPr lang="en-US" sz="1300" dirty="0"/>
           </a:p>
           <a:p>
@@ -2867,7 +3215,7 @@
                 <a:ea typeface="Courier New" pitchFamily="34" charset="-122"/>
                 <a:cs typeface="Courier New" pitchFamily="34" charset="-120"/>
               </a:rPr>
-              <a:t>        "tipo": usuario.tipo_usuario.value,</a:t>
+              <a:t>class LivroEntrada(BaseModel):</a:t>
             </a:r>
             <a:endParaRPr lang="en-US" sz="1300" dirty="0"/>
           </a:p>
@@ -2884,7 +3232,7 @@
                 <a:ea typeface="Courier New" pitchFamily="34" charset="-122"/>
                 <a:cs typeface="Courier New" pitchFamily="34" charset="-120"/>
               </a:rPr>
-              <a:t>        "iat": agora,</a:t>
+              <a:t>    titulo: str = Field(min_length=1, max_length=100)</a:t>
             </a:r>
             <a:endParaRPr lang="en-US" sz="1300" dirty="0"/>
           </a:p>
@@ -2901,8 +3249,14 @@
                 <a:ea typeface="Courier New" pitchFamily="34" charset="-122"/>
                 <a:cs typeface="Courier New" pitchFamily="34" charset="-120"/>
               </a:rPr>
-              <a:t>        "exp": agora + timedelta(</a:t>
-            </a:r>
+              <a:t>    paginas: int = Field(gt=0)</a:t>
+            </a:r>
+            <a:endParaRPr lang="en-US" sz="1300" dirty="0"/>
+          </a:p>
+          <a:p>
+            <a:pPr indent="0" marL="0">
+              <a:buNone/>
+            </a:pPr>
             <a:endParaRPr lang="en-US" sz="1300" dirty="0"/>
           </a:p>
           <a:p>
@@ -2918,7 +3272,7 @@
                 <a:ea typeface="Courier New" pitchFamily="34" charset="-122"/>
                 <a:cs typeface="Courier New" pitchFamily="34" charset="-120"/>
               </a:rPr>
-              <a:t>            minutes=self.validade_minutos),</a:t>
+              <a:t>@app.post("/livros", status_code=201)</a:t>
             </a:r>
             <a:endParaRPr lang="en-US" sz="1300" dirty="0"/>
           </a:p>
@@ -2935,7 +3289,7 @@
                 <a:ea typeface="Courier New" pitchFamily="34" charset="-122"/>
                 <a:cs typeface="Courier New" pitchFamily="34" charset="-120"/>
               </a:rPr>
-              <a:t>    }</a:t>
+              <a:t>def criar(dados: LivroEntrada):</a:t>
             </a:r>
             <a:endParaRPr lang="en-US" sz="1300" dirty="0"/>
           </a:p>
@@ -2952,33 +3306,93 @@
                 <a:ea typeface="Courier New" pitchFamily="34" charset="-122"/>
                 <a:cs typeface="Courier New" pitchFamily="34" charset="-120"/>
               </a:rPr>
-              <a:t>    return jwt.encode(</a:t>
+              <a:t>    return {"titulo": dados.titulo}</a:t>
             </a:r>
             <a:endParaRPr lang="en-US" sz="1300" dirty="0"/>
           </a:p>
-          <a:p>
-            <a:pPr indent="0" marL="0">
-              <a:buNone/>
-            </a:pPr>
-            <a:r>
-              <a:rPr lang="en-US" sz="1300" dirty="0">
-                <a:solidFill>
-                  <a:schemeClr val="bg2"/>
+        </p:txBody>
+      </p:sp>
+      <p:sp>
+        <p:nvSpPr>
+          <p:cNvPr id="12" name="painel-codigo-125"/>
+          <p:cNvSpPr/>
+          <p:nvPr/>
+        </p:nvSpPr>
+        <p:spPr>
+          <a:xfrm>
+            <a:off x="5440680" y="4681728"/>
+            <a:ext cx="6217920" cy="1069848"/>
+          </a:xfrm>
+          <a:prstGeom prst="roundRect">
+            <a:avLst>
+              <a:gd name="adj" fmla="val 8547"/>
+            </a:avLst>
+          </a:prstGeom>
+          <a:solidFill>
+            <a:schemeClr val="tx1"/>
+          </a:solidFill>
+          <a:ln/>
+        </p:spPr>
+      </p:sp>
+      <p:sp>
+        <p:nvSpPr>
+          <p:cNvPr id="13" name="texto-126"/>
+          <p:cNvSpPr txBox="1"/>
+          <p:nvPr/>
+        </p:nvSpPr>
+        <p:spPr>
+          <a:xfrm>
+            <a:off x="5669280" y="4791456"/>
+            <a:ext cx="5760720" cy="274320"/>
+          </a:xfrm>
+          <a:prstGeom prst="rect">
+            <a:avLst/>
+          </a:prstGeom>
+          <a:noFill/>
+          <a:ln/>
+        </p:spPr>
+        <p:txBody>
+          <a:bodyPr wrap="square" lIns="0" tIns="0" rIns="0" bIns="0" rtlCol="0" anchor="ctr"/>
+          <a:lstStyle/>
+          <a:p>
+            <a:pPr indent="0" marL="0">
+              <a:buNone/>
+            </a:pPr>
+            <a:r>
+              <a:rPr lang="en-US" sz="1200" b="1" dirty="0">
+                <a:solidFill>
+                  <a:schemeClr val="accent2"/>
                 </a:solidFill>
                 <a:latin typeface="Courier New" pitchFamily="34" charset="0"/>
                 <a:ea typeface="Courier New" pitchFamily="34" charset="-122"/>
                 <a:cs typeface="Courier New" pitchFamily="34" charset="-120"/>
               </a:rPr>
-              <a:t>        carga, self.segredo, algorithm="HS256")</a:t>
-            </a:r>
-            <a:endParaRPr lang="en-US" sz="1300" dirty="0"/>
-          </a:p>
-          <a:p>
-            <a:pPr indent="0" marL="0">
-              <a:buNone/>
-            </a:pPr>
-            <a:endParaRPr lang="en-US" sz="1300" dirty="0"/>
-          </a:p>
+              <a:t>resposta 422 (paginas = 0)</a:t>
+            </a:r>
+            <a:endParaRPr lang="en-US" sz="1200" dirty="0"/>
+          </a:p>
+        </p:txBody>
+      </p:sp>
+      <p:sp>
+        <p:nvSpPr>
+          <p:cNvPr id="14" name="texto-127"/>
+          <p:cNvSpPr txBox="1"/>
+          <p:nvPr/>
+        </p:nvSpPr>
+        <p:spPr>
+          <a:xfrm>
+            <a:off x="5669280" y="5138928"/>
+            <a:ext cx="5760720" cy="521208"/>
+          </a:xfrm>
+          <a:prstGeom prst="rect">
+            <a:avLst/>
+          </a:prstGeom>
+          <a:noFill/>
+          <a:ln/>
+        </p:spPr>
+        <p:txBody>
+          <a:bodyPr wrap="square" lIns="0" tIns="0" rIns="0" bIns="0" rtlCol="0" anchor="t"/>
+          <a:lstStyle/>
           <a:p>
             <a:pPr indent="0" marL="0">
               <a:buNone/>
@@ -2992,45 +3406,26 @@
                 <a:ea typeface="Courier New" pitchFamily="34" charset="-122"/>
                 <a:cs typeface="Courier New" pitchFamily="34" charset="-120"/>
               </a:rPr>
-              <a:t># senha: bcrypt.hashpw(senha, bcrypt.gensalt())</a:t>
+              <a:t>{"detail": [{"loc": ["body", "paginas"],</a:t>
             </a:r>
             <a:endParaRPr lang="en-US" sz="1300" dirty="0"/>
           </a:p>
-        </p:txBody>
-      </p:sp>
-      <p:sp>
-        <p:nvSpPr>
-          <p:cNvPr id="9" name="texto-93"/>
-          <p:cNvSpPr txBox="1"/>
-          <p:nvPr/>
-        </p:nvSpPr>
-        <p:spPr>
-          <a:xfrm>
-            <a:off x="5577840" y="4786884"/>
-            <a:ext cx="6080760" cy="274320"/>
-          </a:xfrm>
-          <a:prstGeom prst="rect">
-            <a:avLst/>
-          </a:prstGeom>
-          <a:noFill/>
-          <a:ln/>
-        </p:spPr>
-        <p:txBody>
-          <a:bodyPr wrap="square" lIns="0" tIns="0" rIns="0" bIns="0" rtlCol="0" anchor="ctr"/>
-          <a:lstStyle/>
-          <a:p>
-            <a:pPr indent="0" marL="0">
-              <a:buNone/>
-            </a:pPr>
-            <a:r>
-              <a:rPr lang="en-US" sz="1100" i="1" dirty="0">
-                <a:solidFill>
-                  <a:schemeClr val="accent6"/>
-                </a:solidFill>
-              </a:rPr>
-              <a:t>src/back/app/service/servico_autenticacao.py (trecho resumido e reformatado)</a:t>
-            </a:r>
-            <a:endParaRPr lang="en-US" sz="1100" dirty="0"/>
+          <a:p>
+            <a:pPr indent="0" marL="0">
+              <a:buNone/>
+            </a:pPr>
+            <a:r>
+              <a:rPr lang="en-US" sz="1300" dirty="0">
+                <a:solidFill>
+                  <a:schemeClr val="bg2"/>
+                </a:solidFill>
+                <a:latin typeface="Courier New" pitchFamily="34" charset="0"/>
+                <a:ea typeface="Courier New" pitchFamily="34" charset="-122"/>
+                <a:cs typeface="Courier New" pitchFamily="34" charset="-120"/>
+              </a:rPr>
+              <a:t>  "msg": "Input should be greater than 0"}]}</a:t>
+            </a:r>
+            <a:endParaRPr lang="en-US" sz="1300" dirty="0"/>
           </a:p>
         </p:txBody>
       </p:sp>
@@ -3136,7 +3531,7 @@
                   <a:schemeClr val="tx1"/>
                 </a:solidFill>
               </a:rPr>
-              <a:t>Oficina 5: React, Vite e Tailwind</a:t>
+              <a:t>JWT e bcrypt: login seguro</a:t>
             </a:r>
             <a:endParaRPr lang="en-US" sz="3200" dirty="0"/>
           </a:p>
@@ -3144,14 +3539,36 @@
       </p:sp>
       <p:sp>
         <p:nvSpPr>
-          <p:cNvPr id="3" name="texto-94"/>
+          <p:cNvPr id="3" name="etiqueta-128"/>
+          <p:cNvSpPr/>
+          <p:nvPr/>
+        </p:nvSpPr>
+        <p:spPr>
+          <a:xfrm>
+            <a:off x="548640" y="1325880"/>
+            <a:ext cx="2286000" cy="347472"/>
+          </a:xfrm>
+          <a:prstGeom prst="roundRect">
+            <a:avLst>
+              <a:gd name="adj" fmla="val 50000"/>
+            </a:avLst>
+          </a:prstGeom>
+          <a:solidFill>
+            <a:schemeClr val="accent1"/>
+          </a:solidFill>
+          <a:ln/>
+        </p:spPr>
+      </p:sp>
+      <p:sp>
+        <p:nvSpPr>
+          <p:cNvPr id="4" name="texto-129"/>
           <p:cNvSpPr txBox="1"/>
           <p:nvPr/>
         </p:nvSpPr>
         <p:spPr>
           <a:xfrm>
-            <a:off x="548640" y="1371600"/>
-            <a:ext cx="4754880" cy="320040"/>
+            <a:off x="548640" y="1325880"/>
+            <a:ext cx="2286000" cy="347472"/>
           </a:xfrm>
           <a:prstGeom prst="rect">
             <a:avLst/>
@@ -3163,13 +3580,49 @@
           <a:bodyPr wrap="square" lIns="0" tIns="0" rIns="0" bIns="0" rtlCol="0" anchor="ctr"/>
           <a:lstStyle/>
           <a:p>
+            <a:pPr algn="ctr" indent="0" marL="0">
+              <a:buNone/>
+            </a:pPr>
+            <a:r>
+              <a:rPr lang="en-US" sz="1300" b="1" dirty="0">
+                <a:solidFill>
+                  <a:schemeClr val="bg1"/>
+                </a:solidFill>
+              </a:rPr>
+              <a:t>Camada Controller</a:t>
+            </a:r>
+            <a:endParaRPr lang="en-US" sz="1300" dirty="0"/>
+          </a:p>
+        </p:txBody>
+      </p:sp>
+      <p:sp>
+        <p:nvSpPr>
+          <p:cNvPr id="5" name="texto-130"/>
+          <p:cNvSpPr txBox="1"/>
+          <p:nvPr/>
+        </p:nvSpPr>
+        <p:spPr>
+          <a:xfrm>
+            <a:off x="548640" y="1874520"/>
+            <a:ext cx="4572000" cy="320040"/>
+          </a:xfrm>
+          <a:prstGeom prst="rect">
+            <a:avLst/>
+          </a:prstGeom>
+          <a:noFill/>
+          <a:ln/>
+        </p:spPr>
+        <p:txBody>
+          <a:bodyPr wrap="square" lIns="0" tIns="0" rIns="0" bIns="0" rtlCol="0" anchor="ctr"/>
+          <a:lstStyle/>
+          <a:p>
             <a:pPr indent="0" marL="0">
               <a:buNone/>
             </a:pPr>
             <a:r>
               <a:rPr lang="en-US" sz="1800" b="1" dirty="0">
                 <a:solidFill>
-                  <a:schemeClr val="accent5"/>
+                  <a:schemeClr val="accent1"/>
                 </a:solidFill>
               </a:rPr>
               <a:t>O que é</a:t>
@@ -3180,14 +3633,14 @@
       </p:sp>
       <p:sp>
         <p:nvSpPr>
-          <p:cNvPr id="4" name="texto-95"/>
+          <p:cNvPr id="6" name="texto-131"/>
           <p:cNvSpPr txBox="1"/>
           <p:nvPr/>
         </p:nvSpPr>
         <p:spPr>
           <a:xfrm>
-            <a:off x="548640" y="1783080"/>
-            <a:ext cx="4754880" cy="1188720"/>
+            <a:off x="548640" y="2240280"/>
+            <a:ext cx="4572000" cy="1371600"/>
           </a:xfrm>
           <a:prstGeom prst="rect">
             <a:avLst/>
@@ -3203,27 +3656,27 @@
               <a:buNone/>
             </a:pPr>
             <a:r>
-              <a:rPr lang="en-US" sz="1600" dirty="0">
+              <a:rPr lang="en-US" sz="1500" dirty="0">
                 <a:solidFill>
                   <a:schemeClr val="tx1"/>
                 </a:solidFill>
               </a:rPr>
-              <a:t>React monta a interface com componentes e hooks. O Vite compila e serve. O Tailwind estiliza com classes direto no JSX.</a:t>
-            </a:r>
-            <a:endParaRPr lang="en-US" sz="1600" dirty="0"/>
-          </a:p>
-        </p:txBody>
-      </p:sp>
-      <p:sp>
-        <p:nvSpPr>
-          <p:cNvPr id="5" name="texto-96"/>
+              <a:t>O bcrypt transforma a senha em um hash com salt, e só o hash é guardado. O JWT é um token assinado que o servidor entrega no login e confere em cada pedido.</a:t>
+            </a:r>
+            <a:endParaRPr lang="en-US" sz="1500" dirty="0"/>
+          </a:p>
+        </p:txBody>
+      </p:sp>
+      <p:sp>
+        <p:nvSpPr>
+          <p:cNvPr id="7" name="texto-132"/>
           <p:cNvSpPr txBox="1"/>
           <p:nvPr/>
         </p:nvSpPr>
         <p:spPr>
           <a:xfrm>
-            <a:off x="548640" y="3154680"/>
-            <a:ext cx="4754880" cy="320040"/>
+            <a:off x="548640" y="3429000"/>
+            <a:ext cx="4572000" cy="320040"/>
           </a:xfrm>
           <a:prstGeom prst="rect">
             <a:avLst/>
@@ -3241,7 +3694,7 @@
             <a:r>
               <a:rPr lang="en-US" sz="1800" b="1" dirty="0">
                 <a:solidFill>
-                  <a:schemeClr val="accent5"/>
+                  <a:schemeClr val="accent1"/>
                 </a:solidFill>
               </a:rPr>
               <a:t>Como usar</a:t>
@@ -3252,14 +3705,14 @@
       </p:sp>
       <p:sp>
         <p:nvSpPr>
-          <p:cNvPr id="6" name="texto-97"/>
+          <p:cNvPr id="8" name="texto-133"/>
           <p:cNvSpPr txBox="1"/>
           <p:nvPr/>
         </p:nvSpPr>
         <p:spPr>
           <a:xfrm>
-            <a:off x="548640" y="3566160"/>
-            <a:ext cx="4754880" cy="2194560"/>
+            <a:off x="548640" y="3794760"/>
+            <a:ext cx="4572000" cy="2468880"/>
           </a:xfrm>
           <a:prstGeom prst="rect">
             <a:avLst/>
@@ -3280,14 +3733,14 @@
               <a:buAutoNum type="arabicPeriod" startAt="1"/>
             </a:pPr>
             <a:r>
-              <a:rPr lang="en-US" sz="1600" dirty="0">
+              <a:rPr lang="en-US" sz="1500" dirty="0">
                 <a:solidFill>
                   <a:schemeClr val="tx1"/>
                 </a:solidFill>
               </a:rPr>
-              <a:t>Cada tela é um componente; a lógica fica em hooks</a:t>
-            </a:r>
-            <a:endParaRPr lang="en-US" sz="1600" dirty="0"/>
+              <a:t>Instalar: pip install bcrypt pyjwt</a:t>
+            </a:r>
+            <a:endParaRPr lang="en-US" sz="1500" dirty="0"/>
           </a:p>
           <a:p>
             <a:pPr marL="342900" indent="-342900">
@@ -3299,14 +3752,14 @@
               <a:buAutoNum type="arabicPeriod" startAt="1"/>
             </a:pPr>
             <a:r>
-              <a:rPr lang="en-US" sz="1600" dirty="0">
+              <a:rPr lang="en-US" sz="1500" dirty="0">
                 <a:solidFill>
                   <a:schemeClr val="tx1"/>
                 </a:solidFill>
               </a:rPr>
-              <a:t>npm run dev para ver, npm test para testar</a:t>
-            </a:r>
-            <a:endParaRPr lang="en-US" sz="1600" dirty="0"/>
+              <a:t>No cadastro, guardar apenas o hash da senha</a:t>
+            </a:r>
+            <a:endParaRPr lang="en-US" sz="1500" dirty="0"/>
           </a:p>
           <a:p>
             <a:pPr marL="342900" indent="-342900">
@@ -3318,14 +3771,14 @@
               <a:buAutoNum type="arabicPeriod" startAt="1"/>
             </a:pPr>
             <a:r>
-              <a:rPr lang="en-US" sz="1600" dirty="0">
+              <a:rPr lang="en-US" sz="1500" dirty="0">
                 <a:solidFill>
                   <a:schemeClr val="tx1"/>
                 </a:solidFill>
               </a:rPr>
-              <a:t>Estilizar com classes: bg-indigo-600 text-white</a:t>
-            </a:r>
-            <a:endParaRPr lang="en-US" sz="1600" dirty="0"/>
+              <a:t>No login, conferir a senha e emitir o token</a:t>
+            </a:r>
+            <a:endParaRPr lang="en-US" sz="1500" dirty="0"/>
           </a:p>
           <a:p>
             <a:pPr marL="342900" indent="-342900">
@@ -3337,31 +3790,31 @@
               <a:buAutoNum type="arabicPeriod" startAt="1"/>
             </a:pPr>
             <a:r>
-              <a:rPr lang="en-US" sz="1600" dirty="0">
+              <a:rPr lang="en-US" sz="1500" dirty="0">
                 <a:solidFill>
                   <a:schemeClr val="tx1"/>
                 </a:solidFill>
               </a:rPr>
-              <a:t>O roteador protege cada tela por perfil</a:t>
-            </a:r>
-            <a:endParaRPr lang="en-US" sz="1600" dirty="0"/>
-          </a:p>
-        </p:txBody>
-      </p:sp>
-      <p:sp>
-        <p:nvSpPr>
-          <p:cNvPr id="7" name="painel-codigo-98"/>
+              <a:t>Nas rotas protegidas, ler o cabeçalho Authorization: Bearer &lt;token&gt;</a:t>
+            </a:r>
+            <a:endParaRPr lang="en-US" sz="1500" dirty="0"/>
+          </a:p>
+        </p:txBody>
+      </p:sp>
+      <p:sp>
+        <p:nvSpPr>
+          <p:cNvPr id="9" name="painel-codigo-134"/>
           <p:cNvSpPr/>
           <p:nvPr/>
         </p:nvSpPr>
         <p:spPr>
           <a:xfrm>
-            <a:off x="5577840" y="1371600"/>
-            <a:ext cx="6080760" cy="3557016"/>
+            <a:off x="5440680" y="1325880"/>
+            <a:ext cx="6217920" cy="3648456"/>
           </a:xfrm>
           <a:prstGeom prst="roundRect">
             <a:avLst>
-              <a:gd name="adj" fmla="val 2571"/>
+              <a:gd name="adj" fmla="val 2506"/>
             </a:avLst>
           </a:prstGeom>
           <a:solidFill>
@@ -3372,41 +3825,63 @@
       </p:sp>
       <p:sp>
         <p:nvSpPr>
-          <p:cNvPr id="8" name="texto-99"/>
+          <p:cNvPr id="10" name="texto-135"/>
           <p:cNvSpPr txBox="1"/>
           <p:nvPr/>
         </p:nvSpPr>
         <p:spPr>
           <a:xfrm>
-            <a:off x="5806440" y="1554480"/>
-            <a:ext cx="5623560" cy="3191256"/>
-          </a:xfrm>
-          <a:prstGeom prst="rect">
-            <a:avLst/>
-          </a:prstGeom>
-          <a:noFill/>
-          <a:ln/>
-        </p:spPr>
-        <p:txBody>
-          <a:bodyPr wrap="square" lIns="0" tIns="0" rIns="0" bIns="0" rtlCol="0" anchor="t"/>
-          <a:lstStyle/>
-          <a:p>
-            <a:pPr indent="0" marL="0">
-              <a:buNone/>
-            </a:pPr>
-            <a:r>
-              <a:rPr lang="en-US" sz="1300" dirty="0">
-                <a:solidFill>
-                  <a:schemeClr val="bg2"/>
+            <a:off x="5669280" y="1435608"/>
+            <a:ext cx="5760720" cy="274320"/>
+          </a:xfrm>
+          <a:prstGeom prst="rect">
+            <a:avLst/>
+          </a:prstGeom>
+          <a:noFill/>
+          <a:ln/>
+        </p:spPr>
+        <p:txBody>
+          <a:bodyPr wrap="square" lIns="0" tIns="0" rIns="0" bIns="0" rtlCol="0" anchor="ctr"/>
+          <a:lstStyle/>
+          <a:p>
+            <a:pPr indent="0" marL="0">
+              <a:buNone/>
+            </a:pPr>
+            <a:r>
+              <a:rPr lang="en-US" sz="1200" b="1" dirty="0">
+                <a:solidFill>
+                  <a:schemeClr val="accent2"/>
                 </a:solidFill>
                 <a:latin typeface="Courier New" pitchFamily="34" charset="0"/>
                 <a:ea typeface="Courier New" pitchFamily="34" charset="-122"/>
                 <a:cs typeface="Courier New" pitchFamily="34" charset="-120"/>
               </a:rPr>
-              <a:t>export const RotaProtegida = (</a:t>
-            </a:r>
-            <a:endParaRPr lang="en-US" sz="1300" dirty="0"/>
-          </a:p>
+              <a:t>seguranca.py</a:t>
+            </a:r>
+            <a:endParaRPr lang="en-US" sz="1200" dirty="0"/>
+          </a:p>
+        </p:txBody>
+      </p:sp>
+      <p:sp>
+        <p:nvSpPr>
+          <p:cNvPr id="11" name="texto-136"/>
+          <p:cNvSpPr txBox="1"/>
+          <p:nvPr/>
+        </p:nvSpPr>
+        <p:spPr>
+          <a:xfrm>
+            <a:off x="5669280" y="1783080"/>
+            <a:ext cx="5760720" cy="3099816"/>
+          </a:xfrm>
+          <a:prstGeom prst="rect">
+            <a:avLst/>
+          </a:prstGeom>
+          <a:noFill/>
+          <a:ln/>
+        </p:spPr>
+        <p:txBody>
+          <a:bodyPr wrap="square" lIns="0" tIns="0" rIns="0" bIns="0" rtlCol="0" anchor="t"/>
+          <a:lstStyle/>
           <a:p>
             <a:pPr indent="0" marL="0">
               <a:buNone/>
@@ -3420,7 +3895,7 @@
                 <a:ea typeface="Courier New" pitchFamily="34" charset="-122"/>
                 <a:cs typeface="Courier New" pitchFamily="34" charset="-120"/>
               </a:rPr>
-              <a:t>  { perfis, children }: Props</a:t>
+              <a:t>import bcrypt, jwt</a:t>
             </a:r>
             <a:endParaRPr lang="en-US" sz="1300" dirty="0"/>
           </a:p>
@@ -3437,8 +3912,14 @@
                 <a:ea typeface="Courier New" pitchFamily="34" charset="-122"/>
                 <a:cs typeface="Courier New" pitchFamily="34" charset="-120"/>
               </a:rPr>
-              <a:t>) =&gt; {</a:t>
-            </a:r>
+              <a:t>from datetime import datetime, timedelta, timezone</a:t>
+            </a:r>
+            <a:endParaRPr lang="en-US" sz="1300" dirty="0"/>
+          </a:p>
+          <a:p>
+            <a:pPr indent="0" marL="0">
+              <a:buNone/>
+            </a:pPr>
             <a:endParaRPr lang="en-US" sz="1300" dirty="0"/>
           </a:p>
           <a:p>
@@ -3454,7 +3935,7 @@
                 <a:ea typeface="Courier New" pitchFamily="34" charset="-122"/>
                 <a:cs typeface="Courier New" pitchFamily="34" charset="-120"/>
               </a:rPr>
-              <a:t>  const { usuario } = useAutenticacao();</a:t>
+              <a:t># cadastro: guarda só o hash</a:t>
             </a:r>
             <a:endParaRPr lang="en-US" sz="1300" dirty="0"/>
           </a:p>
@@ -3471,8 +3952,14 @@
                 <a:ea typeface="Courier New" pitchFamily="34" charset="-122"/>
                 <a:cs typeface="Courier New" pitchFamily="34" charset="-120"/>
               </a:rPr>
-              <a:t>  if (!usuario) {</a:t>
-            </a:r>
+              <a:t>hash_ = bcrypt.hashpw(b"senha123", bcrypt.gensalt())</a:t>
+            </a:r>
+            <a:endParaRPr lang="en-US" sz="1300" dirty="0"/>
+          </a:p>
+          <a:p>
+            <a:pPr indent="0" marL="0">
+              <a:buNone/>
+            </a:pPr>
             <a:endParaRPr lang="en-US" sz="1300" dirty="0"/>
           </a:p>
           <a:p>
@@ -3488,7 +3975,7 @@
                 <a:ea typeface="Courier New" pitchFamily="34" charset="-122"/>
                 <a:cs typeface="Courier New" pitchFamily="34" charset="-120"/>
               </a:rPr>
-              <a:t>    return &lt;Navigate to="/entrar" replace /&gt;;</a:t>
+              <a:t># login: confere a senha e gera o token</a:t>
             </a:r>
             <a:endParaRPr lang="en-US" sz="1300" dirty="0"/>
           </a:p>
@@ -3505,7 +3992,7 @@
                 <a:ea typeface="Courier New" pitchFamily="34" charset="-122"/>
                 <a:cs typeface="Courier New" pitchFamily="34" charset="-120"/>
               </a:rPr>
-              <a:t>  }</a:t>
+              <a:t>if bcrypt.checkpw(b"senha123", hash_):</a:t>
             </a:r>
             <a:endParaRPr lang="en-US" sz="1300" dirty="0"/>
           </a:p>
@@ -3522,7 +4009,7 @@
                 <a:ea typeface="Courier New" pitchFamily="34" charset="-122"/>
                 <a:cs typeface="Courier New" pitchFamily="34" charset="-120"/>
               </a:rPr>
-              <a:t>  if (!perfis.includes(usuario.tipo_usuario)) {</a:t>
+              <a:t>    exp = datetime.now(timezone.utc) + timedelta(hours=2)</a:t>
             </a:r>
             <a:endParaRPr lang="en-US" sz="1300" dirty="0"/>
           </a:p>
@@ -3539,7 +4026,7 @@
                 <a:ea typeface="Courier New" pitchFamily="34" charset="-122"/>
                 <a:cs typeface="Courier New" pitchFamily="34" charset="-120"/>
               </a:rPr>
-              <a:t>    return &lt;Navigate to="/" replace /&gt;;</a:t>
+              <a:t>    token = jwt.encode({"sub": "42", "exp": exp},</a:t>
             </a:r>
             <a:endParaRPr lang="en-US" sz="1300" dirty="0"/>
           </a:p>
@@ -3556,8 +4043,14 @@
                 <a:ea typeface="Courier New" pitchFamily="34" charset="-122"/>
                 <a:cs typeface="Courier New" pitchFamily="34" charset="-120"/>
               </a:rPr>
-              <a:t>  }</a:t>
-            </a:r>
+              <a:t>                       SEGREDO, algorithm="HS256")</a:t>
+            </a:r>
+            <a:endParaRPr lang="en-US" sz="1300" dirty="0"/>
+          </a:p>
+          <a:p>
+            <a:pPr indent="0" marL="0">
+              <a:buNone/>
+            </a:pPr>
             <a:endParaRPr lang="en-US" sz="1300" dirty="0"/>
           </a:p>
           <a:p>
@@ -3573,7 +4066,7 @@
                 <a:ea typeface="Courier New" pitchFamily="34" charset="-122"/>
                 <a:cs typeface="Courier New" pitchFamily="34" charset="-120"/>
               </a:rPr>
-              <a:t>  return &lt;&gt;{children}&lt;/&gt;;</a:t>
+              <a:t># rota protegida: valida e descobre quem pediu</a:t>
             </a:r>
             <a:endParaRPr lang="en-US" sz="1300" dirty="0"/>
           </a:p>
@@ -3590,68 +4083,9 @@
                 <a:ea typeface="Courier New" pitchFamily="34" charset="-122"/>
                 <a:cs typeface="Courier New" pitchFamily="34" charset="-120"/>
               </a:rPr>
-              <a:t>};</a:t>
+              <a:t>dados = jwt.decode(token, SEGREDO, algorithms=["HS256"])</a:t>
             </a:r>
             <a:endParaRPr lang="en-US" sz="1300" dirty="0"/>
-          </a:p>
-          <a:p>
-            <a:pPr indent="0" marL="0">
-              <a:buNone/>
-            </a:pPr>
-            <a:endParaRPr lang="en-US" sz="1300" dirty="0"/>
-          </a:p>
-          <a:p>
-            <a:pPr indent="0" marL="0">
-              <a:buNone/>
-            </a:pPr>
-            <a:r>
-              <a:rPr lang="en-US" sz="1300" dirty="0">
-                <a:solidFill>
-                  <a:schemeClr val="bg2"/>
-                </a:solidFill>
-                <a:latin typeface="Courier New" pitchFamily="34" charset="0"/>
-                <a:ea typeface="Courier New" pitchFamily="34" charset="-122"/>
-                <a:cs typeface="Courier New" pitchFamily="34" charset="-120"/>
-              </a:rPr>
-              <a:t>primario: 'bg-indigo-600 text-white',</a:t>
-            </a:r>
-            <a:endParaRPr lang="en-US" sz="1300" dirty="0"/>
-          </a:p>
-        </p:txBody>
-      </p:sp>
-      <p:sp>
-        <p:nvSpPr>
-          <p:cNvPr id="9" name="texto-100"/>
-          <p:cNvSpPr txBox="1"/>
-          <p:nvPr/>
-        </p:nvSpPr>
-        <p:spPr>
-          <a:xfrm>
-            <a:off x="5577840" y="5001768"/>
-            <a:ext cx="6080760" cy="274320"/>
-          </a:xfrm>
-          <a:prstGeom prst="rect">
-            <a:avLst/>
-          </a:prstGeom>
-          <a:noFill/>
-          <a:ln/>
-        </p:spPr>
-        <p:txBody>
-          <a:bodyPr wrap="square" lIns="0" tIns="0" rIns="0" bIns="0" rtlCol="0" anchor="ctr"/>
-          <a:lstStyle/>
-          <a:p>
-            <a:pPr indent="0" marL="0">
-              <a:buNone/>
-            </a:pPr>
-            <a:r>
-              <a:rPr lang="en-US" sz="1100" i="1" dirty="0">
-                <a:solidFill>
-                  <a:schemeClr val="accent6"/>
-                </a:solidFill>
-              </a:rPr>
-              <a:t>src/front/src/componentes/acesso/RotaProtegida.tsx e utils/estilos.ts (trecho resumido)</a:t>
-            </a:r>
-            <a:endParaRPr lang="en-US" sz="1100" dirty="0"/>
           </a:p>
         </p:txBody>
       </p:sp>
@@ -3757,7 +4191,7 @@
                   <a:schemeClr val="tx1"/>
                 </a:solidFill>
               </a:rPr>
-              <a:t>Qualidade e encerramento</a:t>
+              <a:t>SQLAlchemy: classes viram tabelas</a:t>
             </a:r>
             <a:endParaRPr lang="en-US" sz="3200" dirty="0"/>
           </a:p>
@@ -3765,36 +4199,36 @@
       </p:sp>
       <p:sp>
         <p:nvSpPr>
-          <p:cNvPr id="3" name="cartao-101"/>
+          <p:cNvPr id="3" name="etiqueta-137"/>
           <p:cNvSpPr/>
           <p:nvPr/>
         </p:nvSpPr>
         <p:spPr>
           <a:xfrm>
-            <a:off x="548640" y="1371600"/>
-            <a:ext cx="3611880" cy="2194560"/>
+            <a:off x="548640" y="1325880"/>
+            <a:ext cx="2286000" cy="347472"/>
           </a:xfrm>
           <a:prstGeom prst="roundRect">
             <a:avLst>
-              <a:gd name="adj" fmla="val 5000"/>
+              <a:gd name="adj" fmla="val 50000"/>
             </a:avLst>
           </a:prstGeom>
           <a:solidFill>
-            <a:schemeClr val="bg2"/>
+            <a:schemeClr val="accent2"/>
           </a:solidFill>
           <a:ln/>
         </p:spPr>
       </p:sp>
       <p:sp>
         <p:nvSpPr>
-          <p:cNvPr id="4" name="texto-102"/>
+          <p:cNvPr id="4" name="texto-138"/>
           <p:cNvSpPr txBox="1"/>
           <p:nvPr/>
         </p:nvSpPr>
         <p:spPr>
           <a:xfrm>
-            <a:off x="548640" y="1463040"/>
-            <a:ext cx="3611880" cy="1280160"/>
+            <a:off x="548640" y="1325880"/>
+            <a:ext cx="2286000" cy="347472"/>
           </a:xfrm>
           <a:prstGeom prst="rect">
             <a:avLst/>
@@ -3810,27 +4244,27 @@
               <a:buNone/>
             </a:pPr>
             <a:r>
-              <a:rPr lang="en-US" sz="6600" b="1" dirty="0">
-                <a:solidFill>
-                  <a:schemeClr val="accent1"/>
-                </a:solidFill>
-              </a:rPr>
-              <a:t>207</a:t>
-            </a:r>
-            <a:endParaRPr lang="en-US" sz="6600" dirty="0"/>
-          </a:p>
-        </p:txBody>
-      </p:sp>
-      <p:sp>
-        <p:nvSpPr>
-          <p:cNvPr id="5" name="texto-103"/>
+              <a:rPr lang="en-US" sz="1300" b="1" dirty="0">
+                <a:solidFill>
+                  <a:schemeClr val="bg1"/>
+                </a:solidFill>
+              </a:rPr>
+              <a:t>Camada Persistência</a:t>
+            </a:r>
+            <a:endParaRPr lang="en-US" sz="1300" dirty="0"/>
+          </a:p>
+        </p:txBody>
+      </p:sp>
+      <p:sp>
+        <p:nvSpPr>
+          <p:cNvPr id="5" name="texto-139"/>
           <p:cNvSpPr txBox="1"/>
           <p:nvPr/>
         </p:nvSpPr>
         <p:spPr>
           <a:xfrm>
-            <a:off x="731520" y="2834640"/>
-            <a:ext cx="3246120" cy="457200"/>
+            <a:off x="548640" y="1874520"/>
+            <a:ext cx="4572000" cy="320040"/>
           </a:xfrm>
           <a:prstGeom prst="rect">
             <a:avLst/>
@@ -3842,16 +4276,88 @@
           <a:bodyPr wrap="square" lIns="0" tIns="0" rIns="0" bIns="0" rtlCol="0" anchor="ctr"/>
           <a:lstStyle/>
           <a:p>
-            <a:pPr algn="ctr" indent="0" marL="0">
+            <a:pPr indent="0" marL="0">
               <a:buNone/>
             </a:pPr>
             <a:r>
               <a:rPr lang="en-US" sz="1800" b="1" dirty="0">
                 <a:solidFill>
+                  <a:schemeClr val="accent2"/>
+                </a:solidFill>
+              </a:rPr>
+              <a:t>O que é</a:t>
+            </a:r>
+            <a:endParaRPr lang="en-US" sz="1800" dirty="0"/>
+          </a:p>
+        </p:txBody>
+      </p:sp>
+      <p:sp>
+        <p:nvSpPr>
+          <p:cNvPr id="6" name="texto-140"/>
+          <p:cNvSpPr txBox="1"/>
+          <p:nvPr/>
+        </p:nvSpPr>
+        <p:spPr>
+          <a:xfrm>
+            <a:off x="548640" y="2240280"/>
+            <a:ext cx="4572000" cy="1371600"/>
+          </a:xfrm>
+          <a:prstGeom prst="rect">
+            <a:avLst/>
+          </a:prstGeom>
+          <a:noFill/>
+          <a:ln/>
+        </p:spPr>
+        <p:txBody>
+          <a:bodyPr wrap="square" lIns="0" tIns="0" rIns="0" bIns="0" rtlCol="0" anchor="t"/>
+          <a:lstStyle/>
+          <a:p>
+            <a:pPr indent="0" marL="0">
+              <a:buNone/>
+            </a:pPr>
+            <a:r>
+              <a:rPr lang="en-US" sz="1500" dirty="0">
+                <a:solidFill>
                   <a:schemeClr val="tx1"/>
                 </a:solidFill>
               </a:rPr>
-              <a:t>testes do back-end</a:t>
+              <a:t>O SQLAlchemy é um ORM: cada classe vira uma tabela e cada objeto, uma linha. O repositório guarda as consultas, e a regra de negócio nem sabe que existe um banco.</a:t>
+            </a:r>
+            <a:endParaRPr lang="en-US" sz="1500" dirty="0"/>
+          </a:p>
+        </p:txBody>
+      </p:sp>
+      <p:sp>
+        <p:nvSpPr>
+          <p:cNvPr id="7" name="texto-141"/>
+          <p:cNvSpPr txBox="1"/>
+          <p:nvPr/>
+        </p:nvSpPr>
+        <p:spPr>
+          <a:xfrm>
+            <a:off x="548640" y="3429000"/>
+            <a:ext cx="4572000" cy="320040"/>
+          </a:xfrm>
+          <a:prstGeom prst="rect">
+            <a:avLst/>
+          </a:prstGeom>
+          <a:noFill/>
+          <a:ln/>
+        </p:spPr>
+        <p:txBody>
+          <a:bodyPr wrap="square" lIns="0" tIns="0" rIns="0" bIns="0" rtlCol="0" anchor="ctr"/>
+          <a:lstStyle/>
+          <a:p>
+            <a:pPr indent="0" marL="0">
+              <a:buNone/>
+            </a:pPr>
+            <a:r>
+              <a:rPr lang="en-US" sz="1800" b="1" dirty="0">
+                <a:solidFill>
+                  <a:schemeClr val="accent2"/>
+                </a:solidFill>
+              </a:rPr>
+              <a:t>Como usar</a:t>
             </a:r>
             <a:endParaRPr lang="en-US" sz="1800" dirty="0"/>
           </a:p>
@@ -3859,264 +4365,116 @@
       </p:sp>
       <p:sp>
         <p:nvSpPr>
-          <p:cNvPr id="6" name="cartao-104"/>
+          <p:cNvPr id="8" name="texto-142"/>
+          <p:cNvSpPr txBox="1"/>
+          <p:nvPr/>
+        </p:nvSpPr>
+        <p:spPr>
+          <a:xfrm>
+            <a:off x="548640" y="3794760"/>
+            <a:ext cx="4572000" cy="2468880"/>
+          </a:xfrm>
+          <a:prstGeom prst="rect">
+            <a:avLst/>
+          </a:prstGeom>
+          <a:noFill/>
+          <a:ln/>
+        </p:spPr>
+        <p:txBody>
+          <a:bodyPr wrap="square" lIns="0" tIns="0" rIns="0" bIns="0" rtlCol="0" anchor="t"/>
+          <a:lstStyle/>
+          <a:p>
+            <a:pPr marL="342900" indent="-342900">
+              <a:spcAft>
+                <a:spcPts val="600"/>
+              </a:spcAft>
+              <a:buSzPct val="100000"/>
+              <a:buFont typeface="+mj-lt"/>
+              <a:buAutoNum type="arabicPeriod" startAt="1"/>
+            </a:pPr>
+            <a:r>
+              <a:rPr lang="en-US" sz="1500" dirty="0">
+                <a:solidFill>
+                  <a:schemeClr val="tx1"/>
+                </a:solidFill>
+              </a:rPr>
+              <a:t>Instalar: pip install sqlalchemy "psycopg[binary]"</a:t>
+            </a:r>
+            <a:endParaRPr lang="en-US" sz="1500" dirty="0"/>
+          </a:p>
+          <a:p>
+            <a:pPr marL="342900" indent="-342900">
+              <a:spcAft>
+                <a:spcPts val="600"/>
+              </a:spcAft>
+              <a:buSzPct val="100000"/>
+              <a:buFont typeface="+mj-lt"/>
+              <a:buAutoNum type="arabicPeriod" startAt="1"/>
+            </a:pPr>
+            <a:r>
+              <a:rPr lang="en-US" sz="1500" dirty="0">
+                <a:solidFill>
+                  <a:schemeClr val="tx1"/>
+                </a:solidFill>
+              </a:rPr>
+              <a:t>Declarar a classe que representa a tabela</a:t>
+            </a:r>
+            <a:endParaRPr lang="en-US" sz="1500" dirty="0"/>
+          </a:p>
+          <a:p>
+            <a:pPr marL="342900" indent="-342900">
+              <a:spcAft>
+                <a:spcPts val="600"/>
+              </a:spcAft>
+              <a:buSzPct val="100000"/>
+              <a:buFont typeface="+mj-lt"/>
+              <a:buAutoNum type="arabicPeriod" startAt="1"/>
+            </a:pPr>
+            <a:r>
+              <a:rPr lang="en-US" sz="1500" dirty="0">
+                <a:solidFill>
+                  <a:schemeClr val="tx1"/>
+                </a:solidFill>
+              </a:rPr>
+              <a:t>Criar a engine apontando para o banco</a:t>
+            </a:r>
+            <a:endParaRPr lang="en-US" sz="1500" dirty="0"/>
+          </a:p>
+          <a:p>
+            <a:pPr marL="342900" indent="-342900">
+              <a:spcAft>
+                <a:spcPts val="600"/>
+              </a:spcAft>
+              <a:buSzPct val="100000"/>
+              <a:buFont typeface="+mj-lt"/>
+              <a:buAutoNum type="arabicPeriod" startAt="1"/>
+            </a:pPr>
+            <a:r>
+              <a:rPr lang="en-US" sz="1500" dirty="0">
+                <a:solidFill>
+                  <a:schemeClr val="tx1"/>
+                </a:solidFill>
+              </a:rPr>
+              <a:t>Escrever o repositório e usá-lo no serviço</a:t>
+            </a:r>
+            <a:endParaRPr lang="en-US" sz="1500" dirty="0"/>
+          </a:p>
+        </p:txBody>
+      </p:sp>
+      <p:sp>
+        <p:nvSpPr>
+          <p:cNvPr id="9" name="painel-codigo-143"/>
           <p:cNvSpPr/>
           <p:nvPr/>
         </p:nvSpPr>
         <p:spPr>
           <a:xfrm>
-            <a:off x="4297680" y="1371600"/>
-            <a:ext cx="3611880" cy="2194560"/>
+            <a:off x="5440680" y="1325880"/>
+            <a:ext cx="6217920" cy="1929384"/>
           </a:xfrm>
           <a:prstGeom prst="roundRect">
             <a:avLst>
-              <a:gd name="adj" fmla="val 5000"/>
-            </a:avLst>
-          </a:prstGeom>
-          <a:solidFill>
-            <a:schemeClr val="bg2"/>
-          </a:solidFill>
-          <a:ln/>
-        </p:spPr>
-      </p:sp>
-      <p:sp>
-        <p:nvSpPr>
-          <p:cNvPr id="7" name="texto-105"/>
-          <p:cNvSpPr txBox="1"/>
-          <p:nvPr/>
-        </p:nvSpPr>
-        <p:spPr>
-          <a:xfrm>
-            <a:off x="4297680" y="1463040"/>
-            <a:ext cx="3611880" cy="1280160"/>
-          </a:xfrm>
-          <a:prstGeom prst="rect">
-            <a:avLst/>
-          </a:prstGeom>
-          <a:noFill/>
-          <a:ln/>
-        </p:spPr>
-        <p:txBody>
-          <a:bodyPr wrap="square" lIns="0" tIns="0" rIns="0" bIns="0" rtlCol="0" anchor="ctr"/>
-          <a:lstStyle/>
-          <a:p>
-            <a:pPr algn="ctr" indent="0" marL="0">
-              <a:buNone/>
-            </a:pPr>
-            <a:r>
-              <a:rPr lang="en-US" sz="6600" b="1" dirty="0">
-                <a:solidFill>
-                  <a:schemeClr val="accent3"/>
-                </a:solidFill>
-              </a:rPr>
-              <a:t>147</a:t>
-            </a:r>
-            <a:endParaRPr lang="en-US" sz="6600" dirty="0"/>
-          </a:p>
-        </p:txBody>
-      </p:sp>
-      <p:sp>
-        <p:nvSpPr>
-          <p:cNvPr id="8" name="texto-106"/>
-          <p:cNvSpPr txBox="1"/>
-          <p:nvPr/>
-        </p:nvSpPr>
-        <p:spPr>
-          <a:xfrm>
-            <a:off x="4480560" y="2834640"/>
-            <a:ext cx="3246120" cy="457200"/>
-          </a:xfrm>
-          <a:prstGeom prst="rect">
-            <a:avLst/>
-          </a:prstGeom>
-          <a:noFill/>
-          <a:ln/>
-        </p:spPr>
-        <p:txBody>
-          <a:bodyPr wrap="square" lIns="0" tIns="0" rIns="0" bIns="0" rtlCol="0" anchor="ctr"/>
-          <a:lstStyle/>
-          <a:p>
-            <a:pPr algn="ctr" indent="0" marL="0">
-              <a:buNone/>
-            </a:pPr>
-            <a:r>
-              <a:rPr lang="en-US" sz="1800" b="1" dirty="0">
-                <a:solidFill>
-                  <a:schemeClr val="tx1"/>
-                </a:solidFill>
-              </a:rPr>
-              <a:t>testes do front-end</a:t>
-            </a:r>
-            <a:endParaRPr lang="en-US" sz="1800" dirty="0"/>
-          </a:p>
-        </p:txBody>
-      </p:sp>
-      <p:sp>
-        <p:nvSpPr>
-          <p:cNvPr id="9" name="cartao-107"/>
-          <p:cNvSpPr/>
-          <p:nvPr/>
-        </p:nvSpPr>
-        <p:spPr>
-          <a:xfrm>
-            <a:off x="8046720" y="1371600"/>
-            <a:ext cx="3611880" cy="2194560"/>
-          </a:xfrm>
-          <a:prstGeom prst="roundRect">
-            <a:avLst>
-              <a:gd name="adj" fmla="val 5000"/>
-            </a:avLst>
-          </a:prstGeom>
-          <a:solidFill>
-            <a:schemeClr val="bg2"/>
-          </a:solidFill>
-          <a:ln/>
-        </p:spPr>
-      </p:sp>
-      <p:sp>
-        <p:nvSpPr>
-          <p:cNvPr id="10" name="texto-108"/>
-          <p:cNvSpPr txBox="1"/>
-          <p:nvPr/>
-        </p:nvSpPr>
-        <p:spPr>
-          <a:xfrm>
-            <a:off x="8046720" y="1463040"/>
-            <a:ext cx="3611880" cy="1280160"/>
-          </a:xfrm>
-          <a:prstGeom prst="rect">
-            <a:avLst/>
-          </a:prstGeom>
-          <a:noFill/>
-          <a:ln/>
-        </p:spPr>
-        <p:txBody>
-          <a:bodyPr wrap="square" lIns="0" tIns="0" rIns="0" bIns="0" rtlCol="0" anchor="ctr"/>
-          <a:lstStyle/>
-          <a:p>
-            <a:pPr algn="ctr" indent="0" marL="0">
-              <a:buNone/>
-            </a:pPr>
-            <a:r>
-              <a:rPr lang="en-US" sz="6600" b="1" dirty="0">
-                <a:solidFill>
-                  <a:schemeClr val="accent5"/>
-                </a:solidFill>
-              </a:rPr>
-              <a:t>46</a:t>
-            </a:r>
-            <a:endParaRPr lang="en-US" sz="6600" dirty="0"/>
-          </a:p>
-        </p:txBody>
-      </p:sp>
-      <p:sp>
-        <p:nvSpPr>
-          <p:cNvPr id="11" name="texto-109"/>
-          <p:cNvSpPr txBox="1"/>
-          <p:nvPr/>
-        </p:nvSpPr>
-        <p:spPr>
-          <a:xfrm>
-            <a:off x="8229600" y="2834640"/>
-            <a:ext cx="3246120" cy="457200"/>
-          </a:xfrm>
-          <a:prstGeom prst="rect">
-            <a:avLst/>
-          </a:prstGeom>
-          <a:noFill/>
-          <a:ln/>
-        </p:spPr>
-        <p:txBody>
-          <a:bodyPr wrap="square" lIns="0" tIns="0" rIns="0" bIns="0" rtlCol="0" anchor="ctr"/>
-          <a:lstStyle/>
-          <a:p>
-            <a:pPr algn="ctr" indent="0" marL="0">
-              <a:buNone/>
-            </a:pPr>
-            <a:r>
-              <a:rPr lang="en-US" sz="1800" b="1" dirty="0">
-                <a:solidFill>
-                  <a:schemeClr val="tx1"/>
-                </a:solidFill>
-              </a:rPr>
-              <a:t>verificações no navegador</a:t>
-            </a:r>
-            <a:endParaRPr lang="en-US" sz="1800" dirty="0"/>
-          </a:p>
-        </p:txBody>
-      </p:sp>
-      <p:sp>
-        <p:nvSpPr>
-          <p:cNvPr id="12" name="texto-110"/>
-          <p:cNvSpPr txBox="1"/>
-          <p:nvPr/>
-        </p:nvSpPr>
-        <p:spPr>
-          <a:xfrm>
-            <a:off x="548640" y="3840480"/>
-            <a:ext cx="6675120" cy="1463040"/>
-          </a:xfrm>
-          <a:prstGeom prst="rect">
-            <a:avLst/>
-          </a:prstGeom>
-          <a:noFill/>
-          <a:ln/>
-        </p:spPr>
-        <p:txBody>
-          <a:bodyPr wrap="square" lIns="0" tIns="0" rIns="0" bIns="0" rtlCol="0" anchor="t"/>
-          <a:lstStyle/>
-          <a:p>
-            <a:pPr marL="342900" indent="-342900">
-              <a:spcAft>
-                <a:spcPts val="800"/>
-              </a:spcAft>
-              <a:buSzPct val="100000"/>
-              <a:buChar char="•"/>
-            </a:pPr>
-            <a:r>
-              <a:rPr lang="en-US" sz="1600" dirty="0">
-                <a:solidFill>
-                  <a:schemeClr val="tx1"/>
-                </a:solidFill>
-              </a:rPr>
-              <a:t>Envios e resgates simultâneos testados contra o PostgreSQL real; o saldo nunca fica negativo.</a:t>
-            </a:r>
-            <a:endParaRPr lang="en-US" sz="1600" dirty="0"/>
-          </a:p>
-          <a:p>
-            <a:pPr marL="342900" indent="-342900">
-              <a:spcAft>
-                <a:spcPts val="800"/>
-              </a:spcAft>
-              <a:buSzPct val="100000"/>
-              <a:buChar char="•"/>
-            </a:pPr>
-            <a:r>
-              <a:rPr lang="en-US" sz="1600" dirty="0">
-                <a:solidFill>
-                  <a:schemeClr val="tx1"/>
-                </a:solidFill>
-              </a:rPr>
-              <a:t>Próximos passos: agendar o crédito do semestre e validar o envio real pelo Gmail.</a:t>
-            </a:r>
-            <a:endParaRPr lang="en-US" sz="1600" dirty="0"/>
-          </a:p>
-        </p:txBody>
-      </p:sp>
-      <p:sp>
-        <p:nvSpPr>
-          <p:cNvPr id="13" name="painel-codigo-111"/>
-          <p:cNvSpPr/>
-          <p:nvPr/>
-        </p:nvSpPr>
-        <p:spPr>
-          <a:xfrm>
-            <a:off x="7498080" y="3840480"/>
-            <a:ext cx="4160520" cy="1325880"/>
-          </a:xfrm>
-          <a:prstGeom prst="roundRect">
-            <a:avLst>
-              <a:gd name="adj" fmla="val 6897"/>
+              <a:gd name="adj" fmla="val 4739"/>
             </a:avLst>
           </a:prstGeom>
           <a:solidFill>
@@ -4127,41 +4485,63 @@
       </p:sp>
       <p:sp>
         <p:nvSpPr>
-          <p:cNvPr id="14" name="texto-112"/>
+          <p:cNvPr id="10" name="texto-144"/>
           <p:cNvSpPr txBox="1"/>
           <p:nvPr/>
         </p:nvSpPr>
         <p:spPr>
           <a:xfrm>
-            <a:off x="7726680" y="4023360"/>
-            <a:ext cx="3703320" cy="960120"/>
-          </a:xfrm>
-          <a:prstGeom prst="rect">
-            <a:avLst/>
-          </a:prstGeom>
-          <a:noFill/>
-          <a:ln/>
-        </p:spPr>
-        <p:txBody>
-          <a:bodyPr wrap="square" lIns="0" tIns="0" rIns="0" bIns="0" rtlCol="0" anchor="t"/>
-          <a:lstStyle/>
-          <a:p>
-            <a:pPr indent="0" marL="0">
-              <a:buNone/>
-            </a:pPr>
-            <a:r>
-              <a:rPr lang="en-US" sz="1300" dirty="0">
-                <a:solidFill>
-                  <a:schemeClr val="bg2"/>
+            <a:off x="5669280" y="1435608"/>
+            <a:ext cx="5760720" cy="274320"/>
+          </a:xfrm>
+          <a:prstGeom prst="rect">
+            <a:avLst/>
+          </a:prstGeom>
+          <a:noFill/>
+          <a:ln/>
+        </p:spPr>
+        <p:txBody>
+          <a:bodyPr wrap="square" lIns="0" tIns="0" rIns="0" bIns="0" rtlCol="0" anchor="ctr"/>
+          <a:lstStyle/>
+          <a:p>
+            <a:pPr indent="0" marL="0">
+              <a:buNone/>
+            </a:pPr>
+            <a:r>
+              <a:rPr lang="en-US" sz="1200" b="1" dirty="0">
+                <a:solidFill>
+                  <a:schemeClr val="accent2"/>
                 </a:solidFill>
                 <a:latin typeface="Courier New" pitchFamily="34" charset="0"/>
                 <a:ea typeface="Courier New" pitchFamily="34" charset="-122"/>
                 <a:cs typeface="Courier New" pitchFamily="34" charset="-120"/>
               </a:rPr>
-              <a:t>docker compose up -d --build</a:t>
-            </a:r>
-            <a:endParaRPr lang="en-US" sz="1300" dirty="0"/>
-          </a:p>
+              <a:t>models.py</a:t>
+            </a:r>
+            <a:endParaRPr lang="en-US" sz="1200" dirty="0"/>
+          </a:p>
+        </p:txBody>
+      </p:sp>
+      <p:sp>
+        <p:nvSpPr>
+          <p:cNvPr id="11" name="texto-145"/>
+          <p:cNvSpPr txBox="1"/>
+          <p:nvPr/>
+        </p:nvSpPr>
+        <p:spPr>
+          <a:xfrm>
+            <a:off x="5669280" y="1783080"/>
+            <a:ext cx="5760720" cy="1380744"/>
+          </a:xfrm>
+          <a:prstGeom prst="rect">
+            <a:avLst/>
+          </a:prstGeom>
+          <a:noFill/>
+          <a:ln/>
+        </p:spPr>
+        <p:txBody>
+          <a:bodyPr wrap="square" lIns="0" tIns="0" rIns="0" bIns="0" rtlCol="0" anchor="t"/>
+          <a:lstStyle/>
           <a:p>
             <a:pPr indent="0" marL="0">
               <a:buNone/>
@@ -4175,7 +4555,7 @@
                 <a:ea typeface="Courier New" pitchFamily="34" charset="-122"/>
                 <a:cs typeface="Courier New" pitchFamily="34" charset="-120"/>
               </a:rPr>
-              <a:t># front: localhost:5173</a:t>
+              <a:t>class Livro(Base):</a:t>
             </a:r>
             <a:endParaRPr lang="en-US" sz="1300" dirty="0"/>
           </a:p>
@@ -4192,22 +4572,101 @@
                 <a:ea typeface="Courier New" pitchFamily="34" charset="-122"/>
                 <a:cs typeface="Courier New" pitchFamily="34" charset="-120"/>
               </a:rPr>
-              <a:t># API:   localhost:8000/docs</a:t>
+              <a:t>    __tablename__ = "livro"</a:t>
             </a:r>
             <a:endParaRPr lang="en-US" sz="1300" dirty="0"/>
           </a:p>
-        </p:txBody>
-      </p:sp>
-      <p:sp>
-        <p:nvSpPr>
-          <p:cNvPr id="15" name="texto-113"/>
+          <a:p>
+            <a:pPr indent="0" marL="0">
+              <a:buNone/>
+            </a:pPr>
+            <a:r>
+              <a:rPr lang="en-US" sz="1300" dirty="0">
+                <a:solidFill>
+                  <a:schemeClr val="bg2"/>
+                </a:solidFill>
+                <a:latin typeface="Courier New" pitchFamily="34" charset="0"/>
+                <a:ea typeface="Courier New" pitchFamily="34" charset="-122"/>
+                <a:cs typeface="Courier New" pitchFamily="34" charset="-120"/>
+              </a:rPr>
+              <a:t>    id: Mapped[int] = mapped_column(primary_key=True)</a:t>
+            </a:r>
+            <a:endParaRPr lang="en-US" sz="1300" dirty="0"/>
+          </a:p>
+          <a:p>
+            <a:pPr indent="0" marL="0">
+              <a:buNone/>
+            </a:pPr>
+            <a:r>
+              <a:rPr lang="en-US" sz="1300" dirty="0">
+                <a:solidFill>
+                  <a:schemeClr val="bg2"/>
+                </a:solidFill>
+                <a:latin typeface="Courier New" pitchFamily="34" charset="0"/>
+                <a:ea typeface="Courier New" pitchFamily="34" charset="-122"/>
+                <a:cs typeface="Courier New" pitchFamily="34" charset="-120"/>
+              </a:rPr>
+              <a:t>    titulo: Mapped[str] = mapped_column(String(100))</a:t>
+            </a:r>
+            <a:endParaRPr lang="en-US" sz="1300" dirty="0"/>
+          </a:p>
+          <a:p>
+            <a:pPr indent="0" marL="0">
+              <a:buNone/>
+            </a:pPr>
+            <a:endParaRPr lang="en-US" sz="1300" dirty="0"/>
+          </a:p>
+          <a:p>
+            <a:pPr indent="0" marL="0">
+              <a:buNone/>
+            </a:pPr>
+            <a:r>
+              <a:rPr lang="en-US" sz="1300" dirty="0">
+                <a:solidFill>
+                  <a:schemeClr val="bg2"/>
+                </a:solidFill>
+                <a:latin typeface="Courier New" pitchFamily="34" charset="0"/>
+                <a:ea typeface="Courier New" pitchFamily="34" charset="-122"/>
+                <a:cs typeface="Courier New" pitchFamily="34" charset="-120"/>
+              </a:rPr>
+              <a:t>engine = create_engine("postgresql+psycopg://app:senha@db/oficina")</a:t>
+            </a:r>
+            <a:endParaRPr lang="en-US" sz="1300" dirty="0"/>
+          </a:p>
+        </p:txBody>
+      </p:sp>
+      <p:sp>
+        <p:nvSpPr>
+          <p:cNvPr id="12" name="painel-codigo-146"/>
+          <p:cNvSpPr/>
+          <p:nvPr/>
+        </p:nvSpPr>
+        <p:spPr>
+          <a:xfrm>
+            <a:off x="5440680" y="3392424"/>
+            <a:ext cx="6217920" cy="2574036"/>
+          </a:xfrm>
+          <a:prstGeom prst="roundRect">
+            <a:avLst>
+              <a:gd name="adj" fmla="val 3552"/>
+            </a:avLst>
+          </a:prstGeom>
+          <a:solidFill>
+            <a:schemeClr val="tx1"/>
+          </a:solidFill>
+          <a:ln/>
+        </p:spPr>
+      </p:sp>
+      <p:sp>
+        <p:nvSpPr>
+          <p:cNvPr id="13" name="texto-147"/>
           <p:cNvSpPr txBox="1"/>
           <p:nvPr/>
         </p:nvSpPr>
         <p:spPr>
           <a:xfrm>
-            <a:off x="548640" y="5669280"/>
-            <a:ext cx="11064240" cy="457200"/>
+            <a:off x="5669280" y="3502152"/>
+            <a:ext cx="5760720" cy="274320"/>
           </a:xfrm>
           <a:prstGeom prst="rect">
             <a:avLst/>
@@ -4223,14 +4682,181 @@
               <a:buNone/>
             </a:pPr>
             <a:r>
-              <a:rPr lang="en-US" sz="1800" b="1" dirty="0">
-                <a:solidFill>
-                  <a:schemeClr val="accent1"/>
-                </a:solidFill>
-              </a:rPr>
-              <a:t>github.com/lucaslmchaves/sistema-moeda-estudantil</a:t>
-            </a:r>
-            <a:endParaRPr lang="en-US" sz="1800" dirty="0"/>
+              <a:rPr lang="en-US" sz="1200" b="1" dirty="0">
+                <a:solidFill>
+                  <a:schemeClr val="accent2"/>
+                </a:solidFill>
+                <a:latin typeface="Courier New" pitchFamily="34" charset="0"/>
+                <a:ea typeface="Courier New" pitchFamily="34" charset="-122"/>
+                <a:cs typeface="Courier New" pitchFamily="34" charset="-120"/>
+              </a:rPr>
+              <a:t>livro_repositorio.py</a:t>
+            </a:r>
+            <a:endParaRPr lang="en-US" sz="1200" dirty="0"/>
+          </a:p>
+        </p:txBody>
+      </p:sp>
+      <p:sp>
+        <p:nvSpPr>
+          <p:cNvPr id="14" name="texto-148"/>
+          <p:cNvSpPr txBox="1"/>
+          <p:nvPr/>
+        </p:nvSpPr>
+        <p:spPr>
+          <a:xfrm>
+            <a:off x="5669280" y="3849624"/>
+            <a:ext cx="5760720" cy="2025396"/>
+          </a:xfrm>
+          <a:prstGeom prst="rect">
+            <a:avLst/>
+          </a:prstGeom>
+          <a:noFill/>
+          <a:ln/>
+        </p:spPr>
+        <p:txBody>
+          <a:bodyPr wrap="square" lIns="0" tIns="0" rIns="0" bIns="0" rtlCol="0" anchor="t"/>
+          <a:lstStyle/>
+          <a:p>
+            <a:pPr indent="0" marL="0">
+              <a:buNone/>
+            </a:pPr>
+            <a:r>
+              <a:rPr lang="en-US" sz="1300" dirty="0">
+                <a:solidFill>
+                  <a:schemeClr val="bg2"/>
+                </a:solidFill>
+                <a:latin typeface="Courier New" pitchFamily="34" charset="0"/>
+                <a:ea typeface="Courier New" pitchFamily="34" charset="-122"/>
+                <a:cs typeface="Courier New" pitchFamily="34" charset="-120"/>
+              </a:rPr>
+              <a:t>class LivroRepositorio:</a:t>
+            </a:r>
+            <a:endParaRPr lang="en-US" sz="1300" dirty="0"/>
+          </a:p>
+          <a:p>
+            <a:pPr indent="0" marL="0">
+              <a:buNone/>
+            </a:pPr>
+            <a:r>
+              <a:rPr lang="en-US" sz="1300" dirty="0">
+                <a:solidFill>
+                  <a:schemeClr val="bg2"/>
+                </a:solidFill>
+                <a:latin typeface="Courier New" pitchFamily="34" charset="0"/>
+                <a:ea typeface="Courier New" pitchFamily="34" charset="-122"/>
+                <a:cs typeface="Courier New" pitchFamily="34" charset="-120"/>
+              </a:rPr>
+              <a:t>    def __init__(self, sessao):</a:t>
+            </a:r>
+            <a:endParaRPr lang="en-US" sz="1300" dirty="0"/>
+          </a:p>
+          <a:p>
+            <a:pPr indent="0" marL="0">
+              <a:buNone/>
+            </a:pPr>
+            <a:r>
+              <a:rPr lang="en-US" sz="1300" dirty="0">
+                <a:solidFill>
+                  <a:schemeClr val="bg2"/>
+                </a:solidFill>
+                <a:latin typeface="Courier New" pitchFamily="34" charset="0"/>
+                <a:ea typeface="Courier New" pitchFamily="34" charset="-122"/>
+                <a:cs typeface="Courier New" pitchFamily="34" charset="-120"/>
+              </a:rPr>
+              <a:t>        self.sessao = sessao</a:t>
+            </a:r>
+            <a:endParaRPr lang="en-US" sz="1300" dirty="0"/>
+          </a:p>
+          <a:p>
+            <a:pPr indent="0" marL="0">
+              <a:buNone/>
+            </a:pPr>
+            <a:endParaRPr lang="en-US" sz="1300" dirty="0"/>
+          </a:p>
+          <a:p>
+            <a:pPr indent="0" marL="0">
+              <a:buNone/>
+            </a:pPr>
+            <a:r>
+              <a:rPr lang="en-US" sz="1300" dirty="0">
+                <a:solidFill>
+                  <a:schemeClr val="bg2"/>
+                </a:solidFill>
+                <a:latin typeface="Courier New" pitchFamily="34" charset="0"/>
+                <a:ea typeface="Courier New" pitchFamily="34" charset="-122"/>
+                <a:cs typeface="Courier New" pitchFamily="34" charset="-120"/>
+              </a:rPr>
+              <a:t>    def salvar(self, titulo):</a:t>
+            </a:r>
+            <a:endParaRPr lang="en-US" sz="1300" dirty="0"/>
+          </a:p>
+          <a:p>
+            <a:pPr indent="0" marL="0">
+              <a:buNone/>
+            </a:pPr>
+            <a:r>
+              <a:rPr lang="en-US" sz="1300" dirty="0">
+                <a:solidFill>
+                  <a:schemeClr val="bg2"/>
+                </a:solidFill>
+                <a:latin typeface="Courier New" pitchFamily="34" charset="0"/>
+                <a:ea typeface="Courier New" pitchFamily="34" charset="-122"/>
+                <a:cs typeface="Courier New" pitchFamily="34" charset="-120"/>
+              </a:rPr>
+              <a:t>        livro = Livro(titulo=titulo)</a:t>
+            </a:r>
+            <a:endParaRPr lang="en-US" sz="1300" dirty="0"/>
+          </a:p>
+          <a:p>
+            <a:pPr indent="0" marL="0">
+              <a:buNone/>
+            </a:pPr>
+            <a:r>
+              <a:rPr lang="en-US" sz="1300" dirty="0">
+                <a:solidFill>
+                  <a:schemeClr val="bg2"/>
+                </a:solidFill>
+                <a:latin typeface="Courier New" pitchFamily="34" charset="0"/>
+                <a:ea typeface="Courier New" pitchFamily="34" charset="-122"/>
+                <a:cs typeface="Courier New" pitchFamily="34" charset="-120"/>
+              </a:rPr>
+              <a:t>        self.sessao.add(livro)</a:t>
+            </a:r>
+            <a:endParaRPr lang="en-US" sz="1300" dirty="0"/>
+          </a:p>
+          <a:p>
+            <a:pPr indent="0" marL="0">
+              <a:buNone/>
+            </a:pPr>
+            <a:r>
+              <a:rPr lang="en-US" sz="1300" dirty="0">
+                <a:solidFill>
+                  <a:schemeClr val="bg2"/>
+                </a:solidFill>
+                <a:latin typeface="Courier New" pitchFamily="34" charset="0"/>
+                <a:ea typeface="Courier New" pitchFamily="34" charset="-122"/>
+                <a:cs typeface="Courier New" pitchFamily="34" charset="-120"/>
+              </a:rPr>
+              <a:t>        self.sessao.commit()</a:t>
+            </a:r>
+            <a:endParaRPr lang="en-US" sz="1300" dirty="0"/>
+          </a:p>
+          <a:p>
+            <a:pPr indent="0" marL="0">
+              <a:buNone/>
+            </a:pPr>
+            <a:r>
+              <a:rPr lang="en-US" sz="1300" dirty="0">
+                <a:solidFill>
+                  <a:schemeClr val="bg2"/>
+                </a:solidFill>
+                <a:latin typeface="Courier New" pitchFamily="34" charset="0"/>
+                <a:ea typeface="Courier New" pitchFamily="34" charset="-122"/>
+                <a:cs typeface="Courier New" pitchFamily="34" charset="-120"/>
+              </a:rPr>
+              <a:t>        return livro</a:t>
+            </a:r>
+            <a:endParaRPr lang="en-US" sz="1300" dirty="0"/>
           </a:p>
         </p:txBody>
       </p:sp>
@@ -4276,6 +4902,1665 @@
               <a:t>12</a:t>
             </a:fld>
             <a:endParaRPr lang="en-US"/>
+          </a:p>
+        </p:txBody>
+      </p:sp>
+    </p:spTree>
+  </p:cSld>
+  <p:clrMapOvr>
+    <a:masterClrMapping/>
+  </p:clrMapOvr>
+</p:sld>
+</file>
+
+<file path=ppt/slides/slide13.xml><?xml version="1.0" encoding="utf-8"?>
+<p:sld xmlns:a="http://schemas.openxmlformats.org/drawingml/2006/main" xmlns:r="http://schemas.openxmlformats.org/officeDocument/2006/relationships" xmlns:p="http://schemas.openxmlformats.org/presentationml/2006/main">
+  <p:cSld name="Slide 13">
+    <p:spTree>
+      <p:nvGrpSpPr>
+        <p:cNvPr id="1" name=""/>
+        <p:cNvGrpSpPr/>
+        <p:nvPr/>
+      </p:nvGrpSpPr>
+      <p:grpSpPr>
+        <a:xfrm>
+          <a:off x="0" y="0"/>
+          <a:ext cx="0" cy="0"/>
+          <a:chOff x="0" y="0"/>
+          <a:chExt cx="0" cy="0"/>
+        </a:xfrm>
+      </p:grpSpPr>
+      <p:sp>
+        <p:nvSpPr>
+          <p:cNvPr id="2" name="Text 0"/>
+          <p:cNvSpPr/>
+          <p:nvPr>
+            <p:ph idx="100" type="title" hasCustomPrompt="1"/>
+          </p:nvPr>
+        </p:nvSpPr>
+        <p:spPr>
+          <a:xfrm>
+            <a:off x="548640" y="320040"/>
+            <a:ext cx="11064240" cy="777240"/>
+          </a:xfrm>
+          <a:prstGeom prst="rect">
+            <a:avLst/>
+          </a:prstGeom>
+          <a:noFill/>
+          <a:ln/>
+        </p:spPr>
+        <p:txBody>
+          <a:bodyPr wrap="square" lIns="0" tIns="0" rIns="0" bIns="0" rtlCol="0" anchor="ctr"/>
+          <a:lstStyle/>
+          <a:p>
+            <a:pPr algn="l" indent="0" marL="0">
+              <a:buNone/>
+            </a:pPr>
+            <a:r>
+              <a:rPr lang="en-US" sz="3200" b="1" dirty="0">
+                <a:solidFill>
+                  <a:schemeClr val="tx1"/>
+                </a:solidFill>
+              </a:rPr>
+              <a:t>PostgreSQL e Alembic: banco e migrações</a:t>
+            </a:r>
+            <a:endParaRPr lang="en-US" sz="3200" dirty="0"/>
+          </a:p>
+        </p:txBody>
+      </p:sp>
+      <p:sp>
+        <p:nvSpPr>
+          <p:cNvPr id="3" name="etiqueta-149"/>
+          <p:cNvSpPr/>
+          <p:nvPr/>
+        </p:nvSpPr>
+        <p:spPr>
+          <a:xfrm>
+            <a:off x="548640" y="1325880"/>
+            <a:ext cx="2286000" cy="347472"/>
+          </a:xfrm>
+          <a:prstGeom prst="roundRect">
+            <a:avLst>
+              <a:gd name="adj" fmla="val 50000"/>
+            </a:avLst>
+          </a:prstGeom>
+          <a:solidFill>
+            <a:schemeClr val="accent2"/>
+          </a:solidFill>
+          <a:ln/>
+        </p:spPr>
+      </p:sp>
+      <p:sp>
+        <p:nvSpPr>
+          <p:cNvPr id="4" name="texto-150"/>
+          <p:cNvSpPr txBox="1"/>
+          <p:nvPr/>
+        </p:nvSpPr>
+        <p:spPr>
+          <a:xfrm>
+            <a:off x="548640" y="1325880"/>
+            <a:ext cx="2286000" cy="347472"/>
+          </a:xfrm>
+          <a:prstGeom prst="rect">
+            <a:avLst/>
+          </a:prstGeom>
+          <a:noFill/>
+          <a:ln/>
+        </p:spPr>
+        <p:txBody>
+          <a:bodyPr wrap="square" lIns="0" tIns="0" rIns="0" bIns="0" rtlCol="0" anchor="ctr"/>
+          <a:lstStyle/>
+          <a:p>
+            <a:pPr algn="ctr" indent="0" marL="0">
+              <a:buNone/>
+            </a:pPr>
+            <a:r>
+              <a:rPr lang="en-US" sz="1300" b="1" dirty="0">
+                <a:solidFill>
+                  <a:schemeClr val="bg1"/>
+                </a:solidFill>
+              </a:rPr>
+              <a:t>Camada Persistência</a:t>
+            </a:r>
+            <a:endParaRPr lang="en-US" sz="1300" dirty="0"/>
+          </a:p>
+        </p:txBody>
+      </p:sp>
+      <p:sp>
+        <p:nvSpPr>
+          <p:cNvPr id="5" name="texto-151"/>
+          <p:cNvSpPr txBox="1"/>
+          <p:nvPr/>
+        </p:nvSpPr>
+        <p:spPr>
+          <a:xfrm>
+            <a:off x="548640" y="1874520"/>
+            <a:ext cx="4572000" cy="320040"/>
+          </a:xfrm>
+          <a:prstGeom prst="rect">
+            <a:avLst/>
+          </a:prstGeom>
+          <a:noFill/>
+          <a:ln/>
+        </p:spPr>
+        <p:txBody>
+          <a:bodyPr wrap="square" lIns="0" tIns="0" rIns="0" bIns="0" rtlCol="0" anchor="ctr"/>
+          <a:lstStyle/>
+          <a:p>
+            <a:pPr indent="0" marL="0">
+              <a:buNone/>
+            </a:pPr>
+            <a:r>
+              <a:rPr lang="en-US" sz="1800" b="1" dirty="0">
+                <a:solidFill>
+                  <a:schemeClr val="accent2"/>
+                </a:solidFill>
+              </a:rPr>
+              <a:t>O que é</a:t>
+            </a:r>
+            <a:endParaRPr lang="en-US" sz="1800" dirty="0"/>
+          </a:p>
+        </p:txBody>
+      </p:sp>
+      <p:sp>
+        <p:nvSpPr>
+          <p:cNvPr id="6" name="texto-152"/>
+          <p:cNvSpPr txBox="1"/>
+          <p:nvPr/>
+        </p:nvSpPr>
+        <p:spPr>
+          <a:xfrm>
+            <a:off x="548640" y="2240280"/>
+            <a:ext cx="4572000" cy="1371600"/>
+          </a:xfrm>
+          <a:prstGeom prst="rect">
+            <a:avLst/>
+          </a:prstGeom>
+          <a:noFill/>
+          <a:ln/>
+        </p:spPr>
+        <p:txBody>
+          <a:bodyPr wrap="square" lIns="0" tIns="0" rIns="0" bIns="0" rtlCol="0" anchor="t"/>
+          <a:lstStyle/>
+          <a:p>
+            <a:pPr indent="0" marL="0">
+              <a:buNone/>
+            </a:pPr>
+            <a:r>
+              <a:rPr lang="en-US" sz="1500" dirty="0">
+                <a:solidFill>
+                  <a:schemeClr val="tx1"/>
+                </a:solidFill>
+              </a:rPr>
+              <a:t>O PostgreSQL guarda os dados em tabelas, com chaves e restrições. O Alembic versiona o esquema: cada mudança vira um arquivo que pode ser aplicado ou desfeito.</a:t>
+            </a:r>
+            <a:endParaRPr lang="en-US" sz="1500" dirty="0"/>
+          </a:p>
+        </p:txBody>
+      </p:sp>
+      <p:sp>
+        <p:nvSpPr>
+          <p:cNvPr id="7" name="texto-153"/>
+          <p:cNvSpPr txBox="1"/>
+          <p:nvPr/>
+        </p:nvSpPr>
+        <p:spPr>
+          <a:xfrm>
+            <a:off x="548640" y="3429000"/>
+            <a:ext cx="4572000" cy="320040"/>
+          </a:xfrm>
+          <a:prstGeom prst="rect">
+            <a:avLst/>
+          </a:prstGeom>
+          <a:noFill/>
+          <a:ln/>
+        </p:spPr>
+        <p:txBody>
+          <a:bodyPr wrap="square" lIns="0" tIns="0" rIns="0" bIns="0" rtlCol="0" anchor="ctr"/>
+          <a:lstStyle/>
+          <a:p>
+            <a:pPr indent="0" marL="0">
+              <a:buNone/>
+            </a:pPr>
+            <a:r>
+              <a:rPr lang="en-US" sz="1800" b="1" dirty="0">
+                <a:solidFill>
+                  <a:schemeClr val="accent2"/>
+                </a:solidFill>
+              </a:rPr>
+              <a:t>Como usar</a:t>
+            </a:r>
+            <a:endParaRPr lang="en-US" sz="1800" dirty="0"/>
+          </a:p>
+        </p:txBody>
+      </p:sp>
+      <p:sp>
+        <p:nvSpPr>
+          <p:cNvPr id="8" name="texto-154"/>
+          <p:cNvSpPr txBox="1"/>
+          <p:nvPr/>
+        </p:nvSpPr>
+        <p:spPr>
+          <a:xfrm>
+            <a:off x="548640" y="3794760"/>
+            <a:ext cx="4572000" cy="2468880"/>
+          </a:xfrm>
+          <a:prstGeom prst="rect">
+            <a:avLst/>
+          </a:prstGeom>
+          <a:noFill/>
+          <a:ln/>
+        </p:spPr>
+        <p:txBody>
+          <a:bodyPr wrap="square" lIns="0" tIns="0" rIns="0" bIns="0" rtlCol="0" anchor="t"/>
+          <a:lstStyle/>
+          <a:p>
+            <a:pPr marL="342900" indent="-342900">
+              <a:spcAft>
+                <a:spcPts val="600"/>
+              </a:spcAft>
+              <a:buSzPct val="100000"/>
+              <a:buFont typeface="+mj-lt"/>
+              <a:buAutoNum type="arabicPeriod" startAt="1"/>
+            </a:pPr>
+            <a:r>
+              <a:rPr lang="en-US" sz="1500" dirty="0">
+                <a:solidFill>
+                  <a:schemeClr val="tx1"/>
+                </a:solidFill>
+              </a:rPr>
+              <a:t>Instalar e iniciar: pip install alembic e alembic init migracoes</a:t>
+            </a:r>
+            <a:endParaRPr lang="en-US" sz="1500" dirty="0"/>
+          </a:p>
+          <a:p>
+            <a:pPr marL="342900" indent="-342900">
+              <a:spcAft>
+                <a:spcPts val="600"/>
+              </a:spcAft>
+              <a:buSzPct val="100000"/>
+              <a:buFont typeface="+mj-lt"/>
+              <a:buAutoNum type="arabicPeriod" startAt="1"/>
+            </a:pPr>
+            <a:r>
+              <a:rPr lang="en-US" sz="1500" dirty="0">
+                <a:solidFill>
+                  <a:schemeClr val="tx1"/>
+                </a:solidFill>
+              </a:rPr>
+              <a:t>Apontar o migracoes/env.py para os modelos</a:t>
+            </a:r>
+            <a:endParaRPr lang="en-US" sz="1500" dirty="0"/>
+          </a:p>
+          <a:p>
+            <a:pPr marL="342900" indent="-342900">
+              <a:spcAft>
+                <a:spcPts val="600"/>
+              </a:spcAft>
+              <a:buSzPct val="100000"/>
+              <a:buFont typeface="+mj-lt"/>
+              <a:buAutoNum type="arabicPeriod" startAt="1"/>
+            </a:pPr>
+            <a:r>
+              <a:rPr lang="en-US" sz="1500" dirty="0">
+                <a:solidFill>
+                  <a:schemeClr val="tx1"/>
+                </a:solidFill>
+              </a:rPr>
+              <a:t>Gerar: alembic revision --autogenerate -m "cria livro"</a:t>
+            </a:r>
+            <a:endParaRPr lang="en-US" sz="1500" dirty="0"/>
+          </a:p>
+          <a:p>
+            <a:pPr marL="342900" indent="-342900">
+              <a:spcAft>
+                <a:spcPts val="600"/>
+              </a:spcAft>
+              <a:buSzPct val="100000"/>
+              <a:buFont typeface="+mj-lt"/>
+              <a:buAutoNum type="arabicPeriod" startAt="1"/>
+            </a:pPr>
+            <a:r>
+              <a:rPr lang="en-US" sz="1500" dirty="0">
+                <a:solidFill>
+                  <a:schemeClr val="tx1"/>
+                </a:solidFill>
+              </a:rPr>
+              <a:t>Aplicar: alembic upgrade head</a:t>
+            </a:r>
+            <a:endParaRPr lang="en-US" sz="1500" dirty="0"/>
+          </a:p>
+        </p:txBody>
+      </p:sp>
+      <p:sp>
+        <p:nvSpPr>
+          <p:cNvPr id="9" name="painel-codigo-155"/>
+          <p:cNvSpPr/>
+          <p:nvPr/>
+        </p:nvSpPr>
+        <p:spPr>
+          <a:xfrm>
+            <a:off x="5440680" y="1325880"/>
+            <a:ext cx="6217920" cy="2574036"/>
+          </a:xfrm>
+          <a:prstGeom prst="roundRect">
+            <a:avLst>
+              <a:gd name="adj" fmla="val 3552"/>
+            </a:avLst>
+          </a:prstGeom>
+          <a:solidFill>
+            <a:schemeClr val="tx1"/>
+          </a:solidFill>
+          <a:ln/>
+        </p:spPr>
+      </p:sp>
+      <p:sp>
+        <p:nvSpPr>
+          <p:cNvPr id="10" name="texto-156"/>
+          <p:cNvSpPr txBox="1"/>
+          <p:nvPr/>
+        </p:nvSpPr>
+        <p:spPr>
+          <a:xfrm>
+            <a:off x="5669280" y="1435608"/>
+            <a:ext cx="5760720" cy="274320"/>
+          </a:xfrm>
+          <a:prstGeom prst="rect">
+            <a:avLst/>
+          </a:prstGeom>
+          <a:noFill/>
+          <a:ln/>
+        </p:spPr>
+        <p:txBody>
+          <a:bodyPr wrap="square" lIns="0" tIns="0" rIns="0" bIns="0" rtlCol="0" anchor="ctr"/>
+          <a:lstStyle/>
+          <a:p>
+            <a:pPr indent="0" marL="0">
+              <a:buNone/>
+            </a:pPr>
+            <a:r>
+              <a:rPr lang="en-US" sz="1200" b="1" dirty="0">
+                <a:solidFill>
+                  <a:schemeClr val="accent2"/>
+                </a:solidFill>
+                <a:latin typeface="Courier New" pitchFamily="34" charset="0"/>
+                <a:ea typeface="Courier New" pitchFamily="34" charset="-122"/>
+                <a:cs typeface="Courier New" pitchFamily="34" charset="-120"/>
+              </a:rPr>
+              <a:t>migracoes/versions/001_cria_livro.py</a:t>
+            </a:r>
+            <a:endParaRPr lang="en-US" sz="1200" dirty="0"/>
+          </a:p>
+        </p:txBody>
+      </p:sp>
+      <p:sp>
+        <p:nvSpPr>
+          <p:cNvPr id="11" name="texto-157"/>
+          <p:cNvSpPr txBox="1"/>
+          <p:nvPr/>
+        </p:nvSpPr>
+        <p:spPr>
+          <a:xfrm>
+            <a:off x="5669280" y="1783080"/>
+            <a:ext cx="5760720" cy="2025396"/>
+          </a:xfrm>
+          <a:prstGeom prst="rect">
+            <a:avLst/>
+          </a:prstGeom>
+          <a:noFill/>
+          <a:ln/>
+        </p:spPr>
+        <p:txBody>
+          <a:bodyPr wrap="square" lIns="0" tIns="0" rIns="0" bIns="0" rtlCol="0" anchor="t"/>
+          <a:lstStyle/>
+          <a:p>
+            <a:pPr indent="0" marL="0">
+              <a:buNone/>
+            </a:pPr>
+            <a:r>
+              <a:rPr lang="en-US" sz="1300" dirty="0">
+                <a:solidFill>
+                  <a:schemeClr val="bg2"/>
+                </a:solidFill>
+                <a:latin typeface="Courier New" pitchFamily="34" charset="0"/>
+                <a:ea typeface="Courier New" pitchFamily="34" charset="-122"/>
+                <a:cs typeface="Courier New" pitchFamily="34" charset="-120"/>
+              </a:rPr>
+              <a:t>def upgrade():</a:t>
+            </a:r>
+            <a:endParaRPr lang="en-US" sz="1300" dirty="0"/>
+          </a:p>
+          <a:p>
+            <a:pPr indent="0" marL="0">
+              <a:buNone/>
+            </a:pPr>
+            <a:r>
+              <a:rPr lang="en-US" sz="1300" dirty="0">
+                <a:solidFill>
+                  <a:schemeClr val="bg2"/>
+                </a:solidFill>
+                <a:latin typeface="Courier New" pitchFamily="34" charset="0"/>
+                <a:ea typeface="Courier New" pitchFamily="34" charset="-122"/>
+                <a:cs typeface="Courier New" pitchFamily="34" charset="-120"/>
+              </a:rPr>
+              <a:t>    op.create_table(</a:t>
+            </a:r>
+            <a:endParaRPr lang="en-US" sz="1300" dirty="0"/>
+          </a:p>
+          <a:p>
+            <a:pPr indent="0" marL="0">
+              <a:buNone/>
+            </a:pPr>
+            <a:r>
+              <a:rPr lang="en-US" sz="1300" dirty="0">
+                <a:solidFill>
+                  <a:schemeClr val="bg2"/>
+                </a:solidFill>
+                <a:latin typeface="Courier New" pitchFamily="34" charset="0"/>
+                <a:ea typeface="Courier New" pitchFamily="34" charset="-122"/>
+                <a:cs typeface="Courier New" pitchFamily="34" charset="-120"/>
+              </a:rPr>
+              <a:t>        "livro",</a:t>
+            </a:r>
+            <a:endParaRPr lang="en-US" sz="1300" dirty="0"/>
+          </a:p>
+          <a:p>
+            <a:pPr indent="0" marL="0">
+              <a:buNone/>
+            </a:pPr>
+            <a:r>
+              <a:rPr lang="en-US" sz="1300" dirty="0">
+                <a:solidFill>
+                  <a:schemeClr val="bg2"/>
+                </a:solidFill>
+                <a:latin typeface="Courier New" pitchFamily="34" charset="0"/>
+                <a:ea typeface="Courier New" pitchFamily="34" charset="-122"/>
+                <a:cs typeface="Courier New" pitchFamily="34" charset="-120"/>
+              </a:rPr>
+              <a:t>        sa.Column("id", sa.Integer, primary_key=True),</a:t>
+            </a:r>
+            <a:endParaRPr lang="en-US" sz="1300" dirty="0"/>
+          </a:p>
+          <a:p>
+            <a:pPr indent="0" marL="0">
+              <a:buNone/>
+            </a:pPr>
+            <a:r>
+              <a:rPr lang="en-US" sz="1300" dirty="0">
+                <a:solidFill>
+                  <a:schemeClr val="bg2"/>
+                </a:solidFill>
+                <a:latin typeface="Courier New" pitchFamily="34" charset="0"/>
+                <a:ea typeface="Courier New" pitchFamily="34" charset="-122"/>
+                <a:cs typeface="Courier New" pitchFamily="34" charset="-120"/>
+              </a:rPr>
+              <a:t>        sa.Column("titulo", sa.String(100)),</a:t>
+            </a:r>
+            <a:endParaRPr lang="en-US" sz="1300" dirty="0"/>
+          </a:p>
+          <a:p>
+            <a:pPr indent="0" marL="0">
+              <a:buNone/>
+            </a:pPr>
+            <a:r>
+              <a:rPr lang="en-US" sz="1300" dirty="0">
+                <a:solidFill>
+                  <a:schemeClr val="bg2"/>
+                </a:solidFill>
+                <a:latin typeface="Courier New" pitchFamily="34" charset="0"/>
+                <a:ea typeface="Courier New" pitchFamily="34" charset="-122"/>
+                <a:cs typeface="Courier New" pitchFamily="34" charset="-120"/>
+              </a:rPr>
+              <a:t>    )</a:t>
+            </a:r>
+            <a:endParaRPr lang="en-US" sz="1300" dirty="0"/>
+          </a:p>
+          <a:p>
+            <a:pPr indent="0" marL="0">
+              <a:buNone/>
+            </a:pPr>
+            <a:endParaRPr lang="en-US" sz="1300" dirty="0"/>
+          </a:p>
+          <a:p>
+            <a:pPr indent="0" marL="0">
+              <a:buNone/>
+            </a:pPr>
+            <a:r>
+              <a:rPr lang="en-US" sz="1300" dirty="0">
+                <a:solidFill>
+                  <a:schemeClr val="bg2"/>
+                </a:solidFill>
+                <a:latin typeface="Courier New" pitchFamily="34" charset="0"/>
+                <a:ea typeface="Courier New" pitchFamily="34" charset="-122"/>
+                <a:cs typeface="Courier New" pitchFamily="34" charset="-120"/>
+              </a:rPr>
+              <a:t>def downgrade():</a:t>
+            </a:r>
+            <a:endParaRPr lang="en-US" sz="1300" dirty="0"/>
+          </a:p>
+          <a:p>
+            <a:pPr indent="0" marL="0">
+              <a:buNone/>
+            </a:pPr>
+            <a:r>
+              <a:rPr lang="en-US" sz="1300" dirty="0">
+                <a:solidFill>
+                  <a:schemeClr val="bg2"/>
+                </a:solidFill>
+                <a:latin typeface="Courier New" pitchFamily="34" charset="0"/>
+                <a:ea typeface="Courier New" pitchFamily="34" charset="-122"/>
+                <a:cs typeface="Courier New" pitchFamily="34" charset="-120"/>
+              </a:rPr>
+              <a:t>    op.drop_table("livro")</a:t>
+            </a:r>
+            <a:endParaRPr lang="en-US" sz="1300" dirty="0"/>
+          </a:p>
+        </p:txBody>
+      </p:sp>
+      <p:sp>
+        <p:nvSpPr>
+          <p:cNvPr id="12" name="painel-codigo-158"/>
+          <p:cNvSpPr/>
+          <p:nvPr/>
+        </p:nvSpPr>
+        <p:spPr>
+          <a:xfrm>
+            <a:off x="5440680" y="4037076"/>
+            <a:ext cx="6217920" cy="1499616"/>
+          </a:xfrm>
+          <a:prstGeom prst="roundRect">
+            <a:avLst>
+              <a:gd name="adj" fmla="val 6098"/>
+            </a:avLst>
+          </a:prstGeom>
+          <a:solidFill>
+            <a:schemeClr val="tx1"/>
+          </a:solidFill>
+          <a:ln/>
+        </p:spPr>
+      </p:sp>
+      <p:sp>
+        <p:nvSpPr>
+          <p:cNvPr id="13" name="texto-159"/>
+          <p:cNvSpPr txBox="1"/>
+          <p:nvPr/>
+        </p:nvSpPr>
+        <p:spPr>
+          <a:xfrm>
+            <a:off x="5669280" y="4146804"/>
+            <a:ext cx="5760720" cy="274320"/>
+          </a:xfrm>
+          <a:prstGeom prst="rect">
+            <a:avLst/>
+          </a:prstGeom>
+          <a:noFill/>
+          <a:ln/>
+        </p:spPr>
+        <p:txBody>
+          <a:bodyPr wrap="square" lIns="0" tIns="0" rIns="0" bIns="0" rtlCol="0" anchor="ctr"/>
+          <a:lstStyle/>
+          <a:p>
+            <a:pPr indent="0" marL="0">
+              <a:buNone/>
+            </a:pPr>
+            <a:r>
+              <a:rPr lang="en-US" sz="1200" b="1" dirty="0">
+                <a:solidFill>
+                  <a:schemeClr val="accent2"/>
+                </a:solidFill>
+                <a:latin typeface="Courier New" pitchFamily="34" charset="0"/>
+                <a:ea typeface="Courier New" pitchFamily="34" charset="-122"/>
+                <a:cs typeface="Courier New" pitchFamily="34" charset="-120"/>
+              </a:rPr>
+              <a:t>psql</a:t>
+            </a:r>
+            <a:endParaRPr lang="en-US" sz="1200" dirty="0"/>
+          </a:p>
+        </p:txBody>
+      </p:sp>
+      <p:sp>
+        <p:nvSpPr>
+          <p:cNvPr id="14" name="texto-160"/>
+          <p:cNvSpPr txBox="1"/>
+          <p:nvPr/>
+        </p:nvSpPr>
+        <p:spPr>
+          <a:xfrm>
+            <a:off x="5669280" y="4494276"/>
+            <a:ext cx="5760720" cy="950976"/>
+          </a:xfrm>
+          <a:prstGeom prst="rect">
+            <a:avLst/>
+          </a:prstGeom>
+          <a:noFill/>
+          <a:ln/>
+        </p:spPr>
+        <p:txBody>
+          <a:bodyPr wrap="square" lIns="0" tIns="0" rIns="0" bIns="0" rtlCol="0" anchor="t"/>
+          <a:lstStyle/>
+          <a:p>
+            <a:pPr indent="0" marL="0">
+              <a:buNone/>
+            </a:pPr>
+            <a:r>
+              <a:rPr lang="en-US" sz="1300" dirty="0">
+                <a:solidFill>
+                  <a:schemeClr val="bg2"/>
+                </a:solidFill>
+                <a:latin typeface="Courier New" pitchFamily="34" charset="0"/>
+                <a:ea typeface="Courier New" pitchFamily="34" charset="-122"/>
+                <a:cs typeface="Courier New" pitchFamily="34" charset="-120"/>
+              </a:rPr>
+              <a:t>oficina=# SELECT * FROM livro;</a:t>
+            </a:r>
+            <a:endParaRPr lang="en-US" sz="1300" dirty="0"/>
+          </a:p>
+          <a:p>
+            <a:pPr indent="0" marL="0">
+              <a:buNone/>
+            </a:pPr>
+            <a:r>
+              <a:rPr lang="en-US" sz="1300" dirty="0">
+                <a:solidFill>
+                  <a:schemeClr val="bg2"/>
+                </a:solidFill>
+                <a:latin typeface="Courier New" pitchFamily="34" charset="0"/>
+                <a:ea typeface="Courier New" pitchFamily="34" charset="-122"/>
+                <a:cs typeface="Courier New" pitchFamily="34" charset="-120"/>
+              </a:rPr>
+              <a:t> id |    titulo</a:t>
+            </a:r>
+            <a:endParaRPr lang="en-US" sz="1300" dirty="0"/>
+          </a:p>
+          <a:p>
+            <a:pPr indent="0" marL="0">
+              <a:buNone/>
+            </a:pPr>
+            <a:r>
+              <a:rPr lang="en-US" sz="1300" dirty="0">
+                <a:solidFill>
+                  <a:schemeClr val="bg2"/>
+                </a:solidFill>
+                <a:latin typeface="Courier New" pitchFamily="34" charset="0"/>
+                <a:ea typeface="Courier New" pitchFamily="34" charset="-122"/>
+                <a:cs typeface="Courier New" pitchFamily="34" charset="-120"/>
+              </a:rPr>
+              <a:t>----+--------------</a:t>
+            </a:r>
+            <a:endParaRPr lang="en-US" sz="1300" dirty="0"/>
+          </a:p>
+          <a:p>
+            <a:pPr indent="0" marL="0">
+              <a:buNone/>
+            </a:pPr>
+            <a:r>
+              <a:rPr lang="en-US" sz="1300" dirty="0">
+                <a:solidFill>
+                  <a:schemeClr val="bg2"/>
+                </a:solidFill>
+                <a:latin typeface="Courier New" pitchFamily="34" charset="0"/>
+                <a:ea typeface="Courier New" pitchFamily="34" charset="-122"/>
+                <a:cs typeface="Courier New" pitchFamily="34" charset="-120"/>
+              </a:rPr>
+              <a:t>  1 | Dom Casmurro</a:t>
+            </a:r>
+            <a:endParaRPr lang="en-US" sz="1300" dirty="0"/>
+          </a:p>
+        </p:txBody>
+      </p:sp>
+      <p:sp>
+        <p:nvSpPr>
+          <p:cNvPr id="25" name="Slide Number Placeholder 0"/>
+          <p:cNvSpPr>
+            <a:spLocks noGrp="1"/>
+          </p:cNvSpPr>
+          <p:nvPr>
+            <p:ph type="sldNum" sz="quarter" idx="4294967295"/>
+          </p:nvPr>
+        </p:nvSpPr>
+        <p:spPr>
+          <a:xfrm>
+            <a:off x="11155680" y="6400800"/>
+            <a:ext cx="548640" cy="274320"/>
+          </a:xfrm>
+          <a:prstGeom prst="rect">
+            <a:avLst/>
+          </a:prstGeom>
+          <a:extLst>
+            <a:ext uri="{C572A759-6A51-4108-AA02-DFA0A04FC94B}">
+              <ma14:wrappingTextBoxFlag xmlns:ma14="http://schemas.microsoft.com/office/mac/drawingml/2011/main" val="0"/>
+            </a:ext>
+          </a:extLst>
+        </p:spPr>
+        <p:txBody>
+          <a:bodyPr/>
+          <a:lstStyle>
+            <a:lvl1pPr>
+              <a:defRPr sz="1100">
+                <a:solidFill>
+                  <a:schemeClr val="accent6"/>
+                </a:solidFill>
+              </a:defRPr>
+            </a:lvl1pPr>
+          </a:lstStyle>
+          <a:p>
+            <a:pPr algn="r"/>
+            <a:fld id="{F7021451-1387-4CA6-816F-3879F97B5CBC}" type="slidenum">
+              <a:rPr b="0" lang="en-US"/>
+              <a:t>13</a:t>
+            </a:fld>
+            <a:endParaRPr lang="en-US"/>
+          </a:p>
+        </p:txBody>
+      </p:sp>
+    </p:spTree>
+  </p:cSld>
+  <p:clrMapOvr>
+    <a:masterClrMapping/>
+  </p:clrMapOvr>
+</p:sld>
+</file>
+
+<file path=ppt/slides/slide14.xml><?xml version="1.0" encoding="utf-8"?>
+<p:sld xmlns:a="http://schemas.openxmlformats.org/drawingml/2006/main" xmlns:r="http://schemas.openxmlformats.org/officeDocument/2006/relationships" xmlns:p="http://schemas.openxmlformats.org/presentationml/2006/main">
+  <p:cSld name="Slide 14">
+    <p:spTree>
+      <p:nvGrpSpPr>
+        <p:cNvPr id="1" name=""/>
+        <p:cNvGrpSpPr/>
+        <p:nvPr/>
+      </p:nvGrpSpPr>
+      <p:grpSpPr>
+        <a:xfrm>
+          <a:off x="0" y="0"/>
+          <a:ext cx="0" cy="0"/>
+          <a:chOff x="0" y="0"/>
+          <a:chExt cx="0" cy="0"/>
+        </a:xfrm>
+      </p:grpSpPr>
+      <p:sp>
+        <p:nvSpPr>
+          <p:cNvPr id="2" name="Text 0"/>
+          <p:cNvSpPr/>
+          <p:nvPr>
+            <p:ph idx="100" type="title" hasCustomPrompt="1"/>
+          </p:nvPr>
+        </p:nvSpPr>
+        <p:spPr>
+          <a:xfrm>
+            <a:off x="548640" y="320040"/>
+            <a:ext cx="11064240" cy="777240"/>
+          </a:xfrm>
+          <a:prstGeom prst="rect">
+            <a:avLst/>
+          </a:prstGeom>
+          <a:noFill/>
+          <a:ln/>
+        </p:spPr>
+        <p:txBody>
+          <a:bodyPr wrap="square" lIns="0" tIns="0" rIns="0" bIns="0" rtlCol="0" anchor="ctr"/>
+          <a:lstStyle/>
+          <a:p>
+            <a:pPr algn="l" indent="0" marL="0">
+              <a:buNone/>
+            </a:pPr>
+            <a:r>
+              <a:rPr lang="en-US" sz="3200" b="1" dirty="0">
+                <a:solidFill>
+                  <a:schemeClr val="tx1"/>
+                </a:solidFill>
+              </a:rPr>
+              <a:t>Docker Compose: tudo com um comando</a:t>
+            </a:r>
+            <a:endParaRPr lang="en-US" sz="3200" dirty="0"/>
+          </a:p>
+        </p:txBody>
+      </p:sp>
+      <p:sp>
+        <p:nvSpPr>
+          <p:cNvPr id="3" name="etiqueta-161"/>
+          <p:cNvSpPr/>
+          <p:nvPr/>
+        </p:nvSpPr>
+        <p:spPr>
+          <a:xfrm>
+            <a:off x="548640" y="1325880"/>
+            <a:ext cx="2286000" cy="347472"/>
+          </a:xfrm>
+          <a:prstGeom prst="roundRect">
+            <a:avLst>
+              <a:gd name="adj" fmla="val 50000"/>
+            </a:avLst>
+          </a:prstGeom>
+          <a:solidFill>
+            <a:schemeClr val="accent6"/>
+          </a:solidFill>
+          <a:ln/>
+        </p:spPr>
+      </p:sp>
+      <p:sp>
+        <p:nvSpPr>
+          <p:cNvPr id="4" name="texto-162"/>
+          <p:cNvSpPr txBox="1"/>
+          <p:nvPr/>
+        </p:nvSpPr>
+        <p:spPr>
+          <a:xfrm>
+            <a:off x="548640" y="1325880"/>
+            <a:ext cx="2286000" cy="347472"/>
+          </a:xfrm>
+          <a:prstGeom prst="rect">
+            <a:avLst/>
+          </a:prstGeom>
+          <a:noFill/>
+          <a:ln/>
+        </p:spPr>
+        <p:txBody>
+          <a:bodyPr wrap="square" lIns="0" tIns="0" rIns="0" bIns="0" rtlCol="0" anchor="ctr"/>
+          <a:lstStyle/>
+          <a:p>
+            <a:pPr algn="ctr" indent="0" marL="0">
+              <a:buNone/>
+            </a:pPr>
+            <a:r>
+              <a:rPr lang="en-US" sz="1300" b="1" dirty="0">
+                <a:solidFill>
+                  <a:schemeClr val="bg1"/>
+                </a:solidFill>
+              </a:rPr>
+              <a:t>Ambiente</a:t>
+            </a:r>
+            <a:endParaRPr lang="en-US" sz="1300" dirty="0"/>
+          </a:p>
+        </p:txBody>
+      </p:sp>
+      <p:sp>
+        <p:nvSpPr>
+          <p:cNvPr id="5" name="texto-163"/>
+          <p:cNvSpPr txBox="1"/>
+          <p:nvPr/>
+        </p:nvSpPr>
+        <p:spPr>
+          <a:xfrm>
+            <a:off x="548640" y="1874520"/>
+            <a:ext cx="4572000" cy="320040"/>
+          </a:xfrm>
+          <a:prstGeom prst="rect">
+            <a:avLst/>
+          </a:prstGeom>
+          <a:noFill/>
+          <a:ln/>
+        </p:spPr>
+        <p:txBody>
+          <a:bodyPr wrap="square" lIns="0" tIns="0" rIns="0" bIns="0" rtlCol="0" anchor="ctr"/>
+          <a:lstStyle/>
+          <a:p>
+            <a:pPr indent="0" marL="0">
+              <a:buNone/>
+            </a:pPr>
+            <a:r>
+              <a:rPr lang="en-US" sz="1800" b="1" dirty="0">
+                <a:solidFill>
+                  <a:schemeClr val="accent6"/>
+                </a:solidFill>
+              </a:rPr>
+              <a:t>O que é</a:t>
+            </a:r>
+            <a:endParaRPr lang="en-US" sz="1800" dirty="0"/>
+          </a:p>
+        </p:txBody>
+      </p:sp>
+      <p:sp>
+        <p:nvSpPr>
+          <p:cNvPr id="6" name="texto-164"/>
+          <p:cNvSpPr txBox="1"/>
+          <p:nvPr/>
+        </p:nvSpPr>
+        <p:spPr>
+          <a:xfrm>
+            <a:off x="548640" y="2240280"/>
+            <a:ext cx="4572000" cy="1371600"/>
+          </a:xfrm>
+          <a:prstGeom prst="rect">
+            <a:avLst/>
+          </a:prstGeom>
+          <a:noFill/>
+          <a:ln/>
+        </p:spPr>
+        <p:txBody>
+          <a:bodyPr wrap="square" lIns="0" tIns="0" rIns="0" bIns="0" rtlCol="0" anchor="t"/>
+          <a:lstStyle/>
+          <a:p>
+            <a:pPr indent="0" marL="0">
+              <a:buNone/>
+            </a:pPr>
+            <a:r>
+              <a:rPr lang="en-US" sz="1500" dirty="0">
+                <a:solidFill>
+                  <a:schemeClr val="tx1"/>
+                </a:solidFill>
+              </a:rPr>
+              <a:t>O Docker empacota cada serviço em um contêiner, descrito por um Dockerfile. O Compose descreve e liga vários contêineres em um único arquivo.</a:t>
+            </a:r>
+            <a:endParaRPr lang="en-US" sz="1500" dirty="0"/>
+          </a:p>
+        </p:txBody>
+      </p:sp>
+      <p:sp>
+        <p:nvSpPr>
+          <p:cNvPr id="7" name="texto-165"/>
+          <p:cNvSpPr txBox="1"/>
+          <p:nvPr/>
+        </p:nvSpPr>
+        <p:spPr>
+          <a:xfrm>
+            <a:off x="548640" y="3429000"/>
+            <a:ext cx="4572000" cy="320040"/>
+          </a:xfrm>
+          <a:prstGeom prst="rect">
+            <a:avLst/>
+          </a:prstGeom>
+          <a:noFill/>
+          <a:ln/>
+        </p:spPr>
+        <p:txBody>
+          <a:bodyPr wrap="square" lIns="0" tIns="0" rIns="0" bIns="0" rtlCol="0" anchor="ctr"/>
+          <a:lstStyle/>
+          <a:p>
+            <a:pPr indent="0" marL="0">
+              <a:buNone/>
+            </a:pPr>
+            <a:r>
+              <a:rPr lang="en-US" sz="1800" b="1" dirty="0">
+                <a:solidFill>
+                  <a:schemeClr val="accent6"/>
+                </a:solidFill>
+              </a:rPr>
+              <a:t>Como usar</a:t>
+            </a:r>
+            <a:endParaRPr lang="en-US" sz="1800" dirty="0"/>
+          </a:p>
+        </p:txBody>
+      </p:sp>
+      <p:sp>
+        <p:nvSpPr>
+          <p:cNvPr id="8" name="texto-166"/>
+          <p:cNvSpPr txBox="1"/>
+          <p:nvPr/>
+        </p:nvSpPr>
+        <p:spPr>
+          <a:xfrm>
+            <a:off x="548640" y="3794760"/>
+            <a:ext cx="4572000" cy="2468880"/>
+          </a:xfrm>
+          <a:prstGeom prst="rect">
+            <a:avLst/>
+          </a:prstGeom>
+          <a:noFill/>
+          <a:ln/>
+        </p:spPr>
+        <p:txBody>
+          <a:bodyPr wrap="square" lIns="0" tIns="0" rIns="0" bIns="0" rtlCol="0" anchor="t"/>
+          <a:lstStyle/>
+          <a:p>
+            <a:pPr marL="342900" indent="-342900">
+              <a:spcAft>
+                <a:spcPts val="600"/>
+              </a:spcAft>
+              <a:buSzPct val="100000"/>
+              <a:buFont typeface="+mj-lt"/>
+              <a:buAutoNum type="arabicPeriod" startAt="1"/>
+            </a:pPr>
+            <a:r>
+              <a:rPr lang="en-US" sz="1500" dirty="0">
+                <a:solidFill>
+                  <a:schemeClr val="tx1"/>
+                </a:solidFill>
+              </a:rPr>
+              <a:t>Escrever o Dockerfile de cada serviço</a:t>
+            </a:r>
+            <a:endParaRPr lang="en-US" sz="1500" dirty="0"/>
+          </a:p>
+          <a:p>
+            <a:pPr marL="342900" indent="-342900">
+              <a:spcAft>
+                <a:spcPts val="600"/>
+              </a:spcAft>
+              <a:buSzPct val="100000"/>
+              <a:buFont typeface="+mj-lt"/>
+              <a:buAutoNum type="arabicPeriod" startAt="1"/>
+            </a:pPr>
+            <a:r>
+              <a:rPr lang="en-US" sz="1500" dirty="0">
+                <a:solidFill>
+                  <a:schemeClr val="tx1"/>
+                </a:solidFill>
+              </a:rPr>
+              <a:t>Descrever os serviços no docker-compose.yml</a:t>
+            </a:r>
+            <a:endParaRPr lang="en-US" sz="1500" dirty="0"/>
+          </a:p>
+          <a:p>
+            <a:pPr marL="342900" indent="-342900">
+              <a:spcAft>
+                <a:spcPts val="600"/>
+              </a:spcAft>
+              <a:buSzPct val="100000"/>
+              <a:buFont typeface="+mj-lt"/>
+              <a:buAutoNum type="arabicPeriod" startAt="1"/>
+            </a:pPr>
+            <a:r>
+              <a:rPr lang="en-US" sz="1500" dirty="0">
+                <a:solidFill>
+                  <a:schemeClr val="tx1"/>
+                </a:solidFill>
+              </a:rPr>
+              <a:t>Subir tudo: docker compose up -d --build e abrir localhost:5173</a:t>
+            </a:r>
+            <a:endParaRPr lang="en-US" sz="1500" dirty="0"/>
+          </a:p>
+          <a:p>
+            <a:pPr marL="342900" indent="-342900">
+              <a:spcAft>
+                <a:spcPts val="600"/>
+              </a:spcAft>
+              <a:buSzPct val="100000"/>
+              <a:buFont typeface="+mj-lt"/>
+              <a:buAutoNum type="arabicPeriod" startAt="1"/>
+            </a:pPr>
+            <a:r>
+              <a:rPr lang="en-US" sz="1500" dirty="0">
+                <a:solidFill>
+                  <a:schemeClr val="tx1"/>
+                </a:solidFill>
+              </a:rPr>
+              <a:t>Limpar tudo: docker compose down -v</a:t>
+            </a:r>
+            <a:endParaRPr lang="en-US" sz="1500" dirty="0"/>
+          </a:p>
+        </p:txBody>
+      </p:sp>
+      <p:sp>
+        <p:nvSpPr>
+          <p:cNvPr id="9" name="painel-codigo-167"/>
+          <p:cNvSpPr/>
+          <p:nvPr/>
+        </p:nvSpPr>
+        <p:spPr>
+          <a:xfrm>
+            <a:off x="5440680" y="1325880"/>
+            <a:ext cx="6217920" cy="1499616"/>
+          </a:xfrm>
+          <a:prstGeom prst="roundRect">
+            <a:avLst>
+              <a:gd name="adj" fmla="val 6098"/>
+            </a:avLst>
+          </a:prstGeom>
+          <a:solidFill>
+            <a:schemeClr val="tx1"/>
+          </a:solidFill>
+          <a:ln/>
+        </p:spPr>
+      </p:sp>
+      <p:sp>
+        <p:nvSpPr>
+          <p:cNvPr id="10" name="texto-168"/>
+          <p:cNvSpPr txBox="1"/>
+          <p:nvPr/>
+        </p:nvSpPr>
+        <p:spPr>
+          <a:xfrm>
+            <a:off x="5669280" y="1435608"/>
+            <a:ext cx="5760720" cy="274320"/>
+          </a:xfrm>
+          <a:prstGeom prst="rect">
+            <a:avLst/>
+          </a:prstGeom>
+          <a:noFill/>
+          <a:ln/>
+        </p:spPr>
+        <p:txBody>
+          <a:bodyPr wrap="square" lIns="0" tIns="0" rIns="0" bIns="0" rtlCol="0" anchor="ctr"/>
+          <a:lstStyle/>
+          <a:p>
+            <a:pPr indent="0" marL="0">
+              <a:buNone/>
+            </a:pPr>
+            <a:r>
+              <a:rPr lang="en-US" sz="1200" b="1" dirty="0">
+                <a:solidFill>
+                  <a:schemeClr val="accent2"/>
+                </a:solidFill>
+                <a:latin typeface="Courier New" pitchFamily="34" charset="0"/>
+                <a:ea typeface="Courier New" pitchFamily="34" charset="-122"/>
+                <a:cs typeface="Courier New" pitchFamily="34" charset="-120"/>
+              </a:rPr>
+              <a:t>api/Dockerfile</a:t>
+            </a:r>
+            <a:endParaRPr lang="en-US" sz="1200" dirty="0"/>
+          </a:p>
+        </p:txBody>
+      </p:sp>
+      <p:sp>
+        <p:nvSpPr>
+          <p:cNvPr id="11" name="texto-169"/>
+          <p:cNvSpPr txBox="1"/>
+          <p:nvPr/>
+        </p:nvSpPr>
+        <p:spPr>
+          <a:xfrm>
+            <a:off x="5669280" y="1783080"/>
+            <a:ext cx="5760720" cy="950976"/>
+          </a:xfrm>
+          <a:prstGeom prst="rect">
+            <a:avLst/>
+          </a:prstGeom>
+          <a:noFill/>
+          <a:ln/>
+        </p:spPr>
+        <p:txBody>
+          <a:bodyPr wrap="square" lIns="0" tIns="0" rIns="0" bIns="0" rtlCol="0" anchor="t"/>
+          <a:lstStyle/>
+          <a:p>
+            <a:pPr indent="0" marL="0">
+              <a:buNone/>
+            </a:pPr>
+            <a:r>
+              <a:rPr lang="en-US" sz="1300" dirty="0">
+                <a:solidFill>
+                  <a:schemeClr val="bg2"/>
+                </a:solidFill>
+                <a:latin typeface="Courier New" pitchFamily="34" charset="0"/>
+                <a:ea typeface="Courier New" pitchFamily="34" charset="-122"/>
+                <a:cs typeface="Courier New" pitchFamily="34" charset="-120"/>
+              </a:rPr>
+              <a:t>FROM python:3.12-slim</a:t>
+            </a:r>
+            <a:endParaRPr lang="en-US" sz="1300" dirty="0"/>
+          </a:p>
+          <a:p>
+            <a:pPr indent="0" marL="0">
+              <a:buNone/>
+            </a:pPr>
+            <a:r>
+              <a:rPr lang="en-US" sz="1300" dirty="0">
+                <a:solidFill>
+                  <a:schemeClr val="bg2"/>
+                </a:solidFill>
+                <a:latin typeface="Courier New" pitchFamily="34" charset="0"/>
+                <a:ea typeface="Courier New" pitchFamily="34" charset="-122"/>
+                <a:cs typeface="Courier New" pitchFamily="34" charset="-120"/>
+              </a:rPr>
+              <a:t>COPY . /app</a:t>
+            </a:r>
+            <a:endParaRPr lang="en-US" sz="1300" dirty="0"/>
+          </a:p>
+          <a:p>
+            <a:pPr indent="0" marL="0">
+              <a:buNone/>
+            </a:pPr>
+            <a:r>
+              <a:rPr lang="en-US" sz="1300" dirty="0">
+                <a:solidFill>
+                  <a:schemeClr val="bg2"/>
+                </a:solidFill>
+                <a:latin typeface="Courier New" pitchFamily="34" charset="0"/>
+                <a:ea typeface="Courier New" pitchFamily="34" charset="-122"/>
+                <a:cs typeface="Courier New" pitchFamily="34" charset="-120"/>
+              </a:rPr>
+              <a:t>RUN pip install -r /app/requirements.txt</a:t>
+            </a:r>
+            <a:endParaRPr lang="en-US" sz="1300" dirty="0"/>
+          </a:p>
+          <a:p>
+            <a:pPr indent="0" marL="0">
+              <a:buNone/>
+            </a:pPr>
+            <a:r>
+              <a:rPr lang="en-US" sz="1300" dirty="0">
+                <a:solidFill>
+                  <a:schemeClr val="bg2"/>
+                </a:solidFill>
+                <a:latin typeface="Courier New" pitchFamily="34" charset="0"/>
+                <a:ea typeface="Courier New" pitchFamily="34" charset="-122"/>
+                <a:cs typeface="Courier New" pitchFamily="34" charset="-120"/>
+              </a:rPr>
+              <a:t>CMD ["uvicorn", "main:app", "--host", "0.0.0.0"]</a:t>
+            </a:r>
+            <a:endParaRPr lang="en-US" sz="1300" dirty="0"/>
+          </a:p>
+        </p:txBody>
+      </p:sp>
+      <p:sp>
+        <p:nvSpPr>
+          <p:cNvPr id="12" name="painel-codigo-170"/>
+          <p:cNvSpPr/>
+          <p:nvPr/>
+        </p:nvSpPr>
+        <p:spPr>
+          <a:xfrm>
+            <a:off x="5440680" y="2962656"/>
+            <a:ext cx="6217920" cy="3218688"/>
+          </a:xfrm>
+          <a:prstGeom prst="roundRect">
+            <a:avLst>
+              <a:gd name="adj" fmla="val 2841"/>
+            </a:avLst>
+          </a:prstGeom>
+          <a:solidFill>
+            <a:schemeClr val="tx1"/>
+          </a:solidFill>
+          <a:ln/>
+        </p:spPr>
+      </p:sp>
+      <p:sp>
+        <p:nvSpPr>
+          <p:cNvPr id="13" name="texto-171"/>
+          <p:cNvSpPr txBox="1"/>
+          <p:nvPr/>
+        </p:nvSpPr>
+        <p:spPr>
+          <a:xfrm>
+            <a:off x="5669280" y="3072384"/>
+            <a:ext cx="5760720" cy="274320"/>
+          </a:xfrm>
+          <a:prstGeom prst="rect">
+            <a:avLst/>
+          </a:prstGeom>
+          <a:noFill/>
+          <a:ln/>
+        </p:spPr>
+        <p:txBody>
+          <a:bodyPr wrap="square" lIns="0" tIns="0" rIns="0" bIns="0" rtlCol="0" anchor="ctr"/>
+          <a:lstStyle/>
+          <a:p>
+            <a:pPr indent="0" marL="0">
+              <a:buNone/>
+            </a:pPr>
+            <a:r>
+              <a:rPr lang="en-US" sz="1200" b="1" dirty="0">
+                <a:solidFill>
+                  <a:schemeClr val="accent2"/>
+                </a:solidFill>
+                <a:latin typeface="Courier New" pitchFamily="34" charset="0"/>
+                <a:ea typeface="Courier New" pitchFamily="34" charset="-122"/>
+                <a:cs typeface="Courier New" pitchFamily="34" charset="-120"/>
+              </a:rPr>
+              <a:t>docker-compose.yml</a:t>
+            </a:r>
+            <a:endParaRPr lang="en-US" sz="1200" dirty="0"/>
+          </a:p>
+        </p:txBody>
+      </p:sp>
+      <p:sp>
+        <p:nvSpPr>
+          <p:cNvPr id="14" name="texto-172"/>
+          <p:cNvSpPr txBox="1"/>
+          <p:nvPr/>
+        </p:nvSpPr>
+        <p:spPr>
+          <a:xfrm>
+            <a:off x="5669280" y="3419856"/>
+            <a:ext cx="5760720" cy="2670048"/>
+          </a:xfrm>
+          <a:prstGeom prst="rect">
+            <a:avLst/>
+          </a:prstGeom>
+          <a:noFill/>
+          <a:ln/>
+        </p:spPr>
+        <p:txBody>
+          <a:bodyPr wrap="square" lIns="0" tIns="0" rIns="0" bIns="0" rtlCol="0" anchor="t"/>
+          <a:lstStyle/>
+          <a:p>
+            <a:pPr indent="0" marL="0">
+              <a:buNone/>
+            </a:pPr>
+            <a:r>
+              <a:rPr lang="en-US" sz="1300" dirty="0">
+                <a:solidFill>
+                  <a:schemeClr val="bg2"/>
+                </a:solidFill>
+                <a:latin typeface="Courier New" pitchFamily="34" charset="0"/>
+                <a:ea typeface="Courier New" pitchFamily="34" charset="-122"/>
+                <a:cs typeface="Courier New" pitchFamily="34" charset="-120"/>
+              </a:rPr>
+              <a:t>services:</a:t>
+            </a:r>
+            <a:endParaRPr lang="en-US" sz="1300" dirty="0"/>
+          </a:p>
+          <a:p>
+            <a:pPr indent="0" marL="0">
+              <a:buNone/>
+            </a:pPr>
+            <a:r>
+              <a:rPr lang="en-US" sz="1300" dirty="0">
+                <a:solidFill>
+                  <a:schemeClr val="bg2"/>
+                </a:solidFill>
+                <a:latin typeface="Courier New" pitchFamily="34" charset="0"/>
+                <a:ea typeface="Courier New" pitchFamily="34" charset="-122"/>
+                <a:cs typeface="Courier New" pitchFamily="34" charset="-120"/>
+              </a:rPr>
+              <a:t>  db:</a:t>
+            </a:r>
+            <a:endParaRPr lang="en-US" sz="1300" dirty="0"/>
+          </a:p>
+          <a:p>
+            <a:pPr indent="0" marL="0">
+              <a:buNone/>
+            </a:pPr>
+            <a:r>
+              <a:rPr lang="en-US" sz="1300" dirty="0">
+                <a:solidFill>
+                  <a:schemeClr val="bg2"/>
+                </a:solidFill>
+                <a:latin typeface="Courier New" pitchFamily="34" charset="0"/>
+                <a:ea typeface="Courier New" pitchFamily="34" charset="-122"/>
+                <a:cs typeface="Courier New" pitchFamily="34" charset="-120"/>
+              </a:rPr>
+              <a:t>    image: postgres:16</a:t>
+            </a:r>
+            <a:endParaRPr lang="en-US" sz="1300" dirty="0"/>
+          </a:p>
+          <a:p>
+            <a:pPr indent="0" marL="0">
+              <a:buNone/>
+            </a:pPr>
+            <a:r>
+              <a:rPr lang="en-US" sz="1300" dirty="0">
+                <a:solidFill>
+                  <a:schemeClr val="bg2"/>
+                </a:solidFill>
+                <a:latin typeface="Courier New" pitchFamily="34" charset="0"/>
+                <a:ea typeface="Courier New" pitchFamily="34" charset="-122"/>
+                <a:cs typeface="Courier New" pitchFamily="34" charset="-120"/>
+              </a:rPr>
+              <a:t>    environment:</a:t>
+            </a:r>
+            <a:endParaRPr lang="en-US" sz="1300" dirty="0"/>
+          </a:p>
+          <a:p>
+            <a:pPr indent="0" marL="0">
+              <a:buNone/>
+            </a:pPr>
+            <a:r>
+              <a:rPr lang="en-US" sz="1300" dirty="0">
+                <a:solidFill>
+                  <a:schemeClr val="bg2"/>
+                </a:solidFill>
+                <a:latin typeface="Courier New" pitchFamily="34" charset="0"/>
+                <a:ea typeface="Courier New" pitchFamily="34" charset="-122"/>
+                <a:cs typeface="Courier New" pitchFamily="34" charset="-120"/>
+              </a:rPr>
+              <a:t>      POSTGRES_PASSWORD: senha</a:t>
+            </a:r>
+            <a:endParaRPr lang="en-US" sz="1300" dirty="0"/>
+          </a:p>
+          <a:p>
+            <a:pPr indent="0" marL="0">
+              <a:buNone/>
+            </a:pPr>
+            <a:r>
+              <a:rPr lang="en-US" sz="1300" dirty="0">
+                <a:solidFill>
+                  <a:schemeClr val="bg2"/>
+                </a:solidFill>
+                <a:latin typeface="Courier New" pitchFamily="34" charset="0"/>
+                <a:ea typeface="Courier New" pitchFamily="34" charset="-122"/>
+                <a:cs typeface="Courier New" pitchFamily="34" charset="-120"/>
+              </a:rPr>
+              <a:t>  api:</a:t>
+            </a:r>
+            <a:endParaRPr lang="en-US" sz="1300" dirty="0"/>
+          </a:p>
+          <a:p>
+            <a:pPr indent="0" marL="0">
+              <a:buNone/>
+            </a:pPr>
+            <a:r>
+              <a:rPr lang="en-US" sz="1300" dirty="0">
+                <a:solidFill>
+                  <a:schemeClr val="bg2"/>
+                </a:solidFill>
+                <a:latin typeface="Courier New" pitchFamily="34" charset="0"/>
+                <a:ea typeface="Courier New" pitchFamily="34" charset="-122"/>
+                <a:cs typeface="Courier New" pitchFamily="34" charset="-120"/>
+              </a:rPr>
+              <a:t>    build: ./api</a:t>
+            </a:r>
+            <a:endParaRPr lang="en-US" sz="1300" dirty="0"/>
+          </a:p>
+          <a:p>
+            <a:pPr indent="0" marL="0">
+              <a:buNone/>
+            </a:pPr>
+            <a:r>
+              <a:rPr lang="en-US" sz="1300" dirty="0">
+                <a:solidFill>
+                  <a:schemeClr val="bg2"/>
+                </a:solidFill>
+                <a:latin typeface="Courier New" pitchFamily="34" charset="0"/>
+                <a:ea typeface="Courier New" pitchFamily="34" charset="-122"/>
+                <a:cs typeface="Courier New" pitchFamily="34" charset="-120"/>
+              </a:rPr>
+              <a:t>    depends_on: [db]</a:t>
+            </a:r>
+            <a:endParaRPr lang="en-US" sz="1300" dirty="0"/>
+          </a:p>
+          <a:p>
+            <a:pPr indent="0" marL="0">
+              <a:buNone/>
+            </a:pPr>
+            <a:r>
+              <a:rPr lang="en-US" sz="1300" dirty="0">
+                <a:solidFill>
+                  <a:schemeClr val="bg2"/>
+                </a:solidFill>
+                <a:latin typeface="Courier New" pitchFamily="34" charset="0"/>
+                <a:ea typeface="Courier New" pitchFamily="34" charset="-122"/>
+                <a:cs typeface="Courier New" pitchFamily="34" charset="-120"/>
+              </a:rPr>
+              <a:t>    ports: ["8000:8000"]</a:t>
+            </a:r>
+            <a:endParaRPr lang="en-US" sz="1300" dirty="0"/>
+          </a:p>
+          <a:p>
+            <a:pPr indent="0" marL="0">
+              <a:buNone/>
+            </a:pPr>
+            <a:r>
+              <a:rPr lang="en-US" sz="1300" dirty="0">
+                <a:solidFill>
+                  <a:schemeClr val="bg2"/>
+                </a:solidFill>
+                <a:latin typeface="Courier New" pitchFamily="34" charset="0"/>
+                <a:ea typeface="Courier New" pitchFamily="34" charset="-122"/>
+                <a:cs typeface="Courier New" pitchFamily="34" charset="-120"/>
+              </a:rPr>
+              <a:t>  front:</a:t>
+            </a:r>
+            <a:endParaRPr lang="en-US" sz="1300" dirty="0"/>
+          </a:p>
+          <a:p>
+            <a:pPr indent="0" marL="0">
+              <a:buNone/>
+            </a:pPr>
+            <a:r>
+              <a:rPr lang="en-US" sz="1300" dirty="0">
+                <a:solidFill>
+                  <a:schemeClr val="bg2"/>
+                </a:solidFill>
+                <a:latin typeface="Courier New" pitchFamily="34" charset="0"/>
+                <a:ea typeface="Courier New" pitchFamily="34" charset="-122"/>
+                <a:cs typeface="Courier New" pitchFamily="34" charset="-120"/>
+              </a:rPr>
+              <a:t>    build: ./front</a:t>
+            </a:r>
+            <a:endParaRPr lang="en-US" sz="1300" dirty="0"/>
+          </a:p>
+          <a:p>
+            <a:pPr indent="0" marL="0">
+              <a:buNone/>
+            </a:pPr>
+            <a:r>
+              <a:rPr lang="en-US" sz="1300" dirty="0">
+                <a:solidFill>
+                  <a:schemeClr val="bg2"/>
+                </a:solidFill>
+                <a:latin typeface="Courier New" pitchFamily="34" charset="0"/>
+                <a:ea typeface="Courier New" pitchFamily="34" charset="-122"/>
+                <a:cs typeface="Courier New" pitchFamily="34" charset="-120"/>
+              </a:rPr>
+              <a:t>    ports: ["5173:80"]</a:t>
+            </a:r>
+            <a:endParaRPr lang="en-US" sz="1300" dirty="0"/>
+          </a:p>
+        </p:txBody>
+      </p:sp>
+      <p:sp>
+        <p:nvSpPr>
+          <p:cNvPr id="25" name="Slide Number Placeholder 0"/>
+          <p:cNvSpPr>
+            <a:spLocks noGrp="1"/>
+          </p:cNvSpPr>
+          <p:nvPr>
+            <p:ph type="sldNum" sz="quarter" idx="4294967295"/>
+          </p:nvPr>
+        </p:nvSpPr>
+        <p:spPr>
+          <a:xfrm>
+            <a:off x="11155680" y="6400800"/>
+            <a:ext cx="548640" cy="274320"/>
+          </a:xfrm>
+          <a:prstGeom prst="rect">
+            <a:avLst/>
+          </a:prstGeom>
+          <a:extLst>
+            <a:ext uri="{C572A759-6A51-4108-AA02-DFA0A04FC94B}">
+              <ma14:wrappingTextBoxFlag xmlns:ma14="http://schemas.microsoft.com/office/mac/drawingml/2011/main" val="0"/>
+            </a:ext>
+          </a:extLst>
+        </p:spPr>
+        <p:txBody>
+          <a:bodyPr/>
+          <a:lstStyle>
+            <a:lvl1pPr>
+              <a:defRPr sz="1100">
+                <a:solidFill>
+                  <a:schemeClr val="accent6"/>
+                </a:solidFill>
+              </a:defRPr>
+            </a:lvl1pPr>
+          </a:lstStyle>
+          <a:p>
+            <a:pPr algn="r"/>
+            <a:fld id="{F7021451-1387-4CA6-816F-3879F97B5CBC}" type="slidenum">
+              <a:rPr b="0" lang="en-US"/>
+              <a:t>14</a:t>
+            </a:fld>
+            <a:endParaRPr lang="en-US"/>
+          </a:p>
+        </p:txBody>
+      </p:sp>
+    </p:spTree>
+  </p:cSld>
+  <p:clrMapOvr>
+    <a:masterClrMapping/>
+  </p:clrMapOvr>
+</p:sld>
+</file>
+
+<file path=ppt/slides/slide15.xml><?xml version="1.0" encoding="utf-8"?>
+<p:sld xmlns:a="http://schemas.openxmlformats.org/drawingml/2006/main" xmlns:r="http://schemas.openxmlformats.org/officeDocument/2006/relationships" xmlns:p="http://schemas.openxmlformats.org/presentationml/2006/main">
+  <p:cSld name="Slide 15">
+    <p:spTree>
+      <p:nvGrpSpPr>
+        <p:cNvPr id="1" name=""/>
+        <p:cNvGrpSpPr/>
+        <p:nvPr/>
+      </p:nvGrpSpPr>
+      <p:grpSpPr>
+        <a:xfrm>
+          <a:off x="0" y="0"/>
+          <a:ext cx="0" cy="0"/>
+          <a:chOff x="0" y="0"/>
+          <a:chExt cx="0" cy="0"/>
+        </a:xfrm>
+      </p:grpSpPr>
+      <p:sp>
+        <p:nvSpPr>
+          <p:cNvPr id="2" name="Text 0"/>
+          <p:cNvSpPr/>
+          <p:nvPr>
+            <p:ph idx="100" type="title" hasCustomPrompt="1"/>
+          </p:nvPr>
+        </p:nvSpPr>
+        <p:spPr>
+          <a:xfrm>
+            <a:off x="822960" y="2286000"/>
+            <a:ext cx="10515600" cy="1188720"/>
+          </a:xfrm>
+          <a:prstGeom prst="rect">
+            <a:avLst/>
+          </a:prstGeom>
+          <a:noFill/>
+          <a:ln/>
+        </p:spPr>
+        <p:txBody>
+          <a:bodyPr wrap="square" lIns="0" tIns="0" rIns="0" bIns="0" rtlCol="0" anchor="b"/>
+          <a:lstStyle/>
+          <a:p>
+            <a:pPr algn="l" indent="0" marL="0">
+              <a:buNone/>
+            </a:pPr>
+            <a:r>
+              <a:rPr lang="en-US" sz="5200" b="1" dirty="0">
+                <a:solidFill>
+                  <a:schemeClr val="bg1"/>
+                </a:solidFill>
+              </a:rPr>
+              <a:t>Obrigado!</a:t>
+            </a:r>
+            <a:endParaRPr lang="en-US" sz="5200" dirty="0"/>
+          </a:p>
+        </p:txBody>
+      </p:sp>
+      <p:sp>
+        <p:nvSpPr>
+          <p:cNvPr id="3" name="Text 0"/>
+          <p:cNvSpPr/>
+          <p:nvPr>
+            <p:ph idx="101" type="body" hasCustomPrompt="1"/>
+          </p:nvPr>
+        </p:nvSpPr>
+        <p:spPr>
+          <a:xfrm>
+            <a:off x="822960" y="3657600"/>
+            <a:ext cx="10515600" cy="1097280"/>
+          </a:xfrm>
+          <a:prstGeom prst="rect">
+            <a:avLst/>
+          </a:prstGeom>
+          <a:noFill/>
+          <a:ln/>
+        </p:spPr>
+        <p:txBody>
+          <a:bodyPr wrap="square" lIns="0" tIns="0" rIns="0" bIns="0" rtlCol="0" anchor="t"/>
+          <a:lstStyle/>
+          <a:p>
+            <a:pPr algn="l" indent="0" marL="0">
+              <a:buNone/>
+            </a:pPr>
+            <a:r>
+              <a:rPr lang="en-US" sz="2200" dirty="0">
+                <a:solidFill>
+                  <a:schemeClr val="bg2"/>
+                </a:solidFill>
+              </a:rPr>
+              <a:t>Código, diagramas e instruções: github.com/lucaslmchaves/sistema-moeda-estudantil</a:t>
+            </a:r>
+            <a:endParaRPr lang="en-US" sz="2200" dirty="0"/>
           </a:p>
         </p:txBody>
       </p:sp>
@@ -4350,12 +6635,12 @@
         </p:nvSpPr>
         <p:spPr>
           <a:xfrm>
-            <a:off x="548640" y="1417320"/>
-            <a:ext cx="3154680" cy="2743200"/>
+            <a:off x="548640" y="1737360"/>
+            <a:ext cx="3154680" cy="3566160"/>
           </a:xfrm>
           <a:prstGeom prst="roundRect">
             <a:avLst>
-              <a:gd name="adj" fmla="val 4000"/>
+              <a:gd name="adj" fmla="val 3478"/>
             </a:avLst>
           </a:prstGeom>
           <a:solidFill>
@@ -4372,8 +6657,8 @@
         </p:nvSpPr>
         <p:spPr>
           <a:xfrm>
-            <a:off x="822960" y="1691640"/>
-            <a:ext cx="822960" cy="822960"/>
+            <a:off x="822960" y="2011680"/>
+            <a:ext cx="914400" cy="914400"/>
           </a:xfrm>
           <a:prstGeom prst="ellipse">
             <a:avLst/>
@@ -4392,8 +6677,8 @@
         </p:nvSpPr>
         <p:spPr>
           <a:xfrm>
-            <a:off x="822960" y="1691640"/>
-            <a:ext cx="822960" cy="822960"/>
+            <a:off x="822960" y="2011680"/>
+            <a:ext cx="914400" cy="914400"/>
           </a:xfrm>
           <a:prstGeom prst="rect">
             <a:avLst/>
@@ -4409,14 +6694,14 @@
               <a:buNone/>
             </a:pPr>
             <a:r>
-              <a:rPr lang="en-US" sz="2300" dirty="0">
+              <a:rPr lang="en-US" sz="2600" dirty="0">
                 <a:solidFill>
                   <a:schemeClr val="bg1"/>
                 </a:solidFill>
               </a:rPr>
               <a:t>🏫</a:t>
             </a:r>
-            <a:endParaRPr lang="en-US" sz="2300" dirty="0"/>
+            <a:endParaRPr lang="en-US" sz="2600" dirty="0"/>
           </a:p>
         </p:txBody>
       </p:sp>
@@ -4428,8 +6713,8 @@
         </p:nvSpPr>
         <p:spPr>
           <a:xfrm>
-            <a:off x="1828800" y="1691640"/>
-            <a:ext cx="1783080" cy="822960"/>
+            <a:off x="1920240" y="2011680"/>
+            <a:ext cx="1691640" cy="914400"/>
           </a:xfrm>
           <a:prstGeom prst="rect">
             <a:avLst/>
@@ -4464,8 +6749,8 @@
         </p:nvSpPr>
         <p:spPr>
           <a:xfrm>
-            <a:off x="822960" y="2743200"/>
-            <a:ext cx="2651760" cy="1280160"/>
+            <a:off x="822960" y="3291840"/>
+            <a:ext cx="2651760" cy="1828800"/>
           </a:xfrm>
           <a:prstGeom prst="rect">
             <a:avLst/>
@@ -4481,14 +6766,14 @@
               <a:buNone/>
             </a:pPr>
             <a:r>
-              <a:rPr lang="en-US" sz="1600" dirty="0">
+              <a:rPr lang="en-US" sz="1900" dirty="0">
                 <a:solidFill>
                   <a:schemeClr val="tx1"/>
                 </a:solidFill>
               </a:rPr>
               <a:t>Recebe 1.000 moedas por semestre e reconhece alunos com moedas e uma mensagem.</a:t>
             </a:r>
-            <a:endParaRPr lang="en-US" sz="1600" dirty="0"/>
+            <a:endParaRPr lang="en-US" sz="1900" dirty="0"/>
           </a:p>
         </p:txBody>
       </p:sp>
@@ -4500,12 +6785,12 @@
         </p:nvSpPr>
         <p:spPr>
           <a:xfrm>
-            <a:off x="4526280" y="1417320"/>
-            <a:ext cx="3154680" cy="2743200"/>
+            <a:off x="4526280" y="1737360"/>
+            <a:ext cx="3154680" cy="3566160"/>
           </a:xfrm>
           <a:prstGeom prst="roundRect">
             <a:avLst>
-              <a:gd name="adj" fmla="val 4000"/>
+              <a:gd name="adj" fmla="val 3478"/>
             </a:avLst>
           </a:prstGeom>
           <a:solidFill>
@@ -4522,8 +6807,8 @@
         </p:nvSpPr>
         <p:spPr>
           <a:xfrm>
-            <a:off x="4800600" y="1691640"/>
-            <a:ext cx="822960" cy="822960"/>
+            <a:off x="4800600" y="2011680"/>
+            <a:ext cx="914400" cy="914400"/>
           </a:xfrm>
           <a:prstGeom prst="ellipse">
             <a:avLst/>
@@ -4542,8 +6827,8 @@
         </p:nvSpPr>
         <p:spPr>
           <a:xfrm>
-            <a:off x="4800600" y="1691640"/>
-            <a:ext cx="822960" cy="822960"/>
+            <a:off x="4800600" y="2011680"/>
+            <a:ext cx="914400" cy="914400"/>
           </a:xfrm>
           <a:prstGeom prst="rect">
             <a:avLst/>
@@ -4559,14 +6844,14 @@
               <a:buNone/>
             </a:pPr>
             <a:r>
-              <a:rPr lang="en-US" sz="2300" dirty="0">
+              <a:rPr lang="en-US" sz="2600" dirty="0">
                 <a:solidFill>
                   <a:schemeClr val="bg1"/>
                 </a:solidFill>
               </a:rPr>
               <a:t>🎓</a:t>
             </a:r>
-            <a:endParaRPr lang="en-US" sz="2300" dirty="0"/>
+            <a:endParaRPr lang="en-US" sz="2600" dirty="0"/>
           </a:p>
         </p:txBody>
       </p:sp>
@@ -4578,8 +6863,8 @@
         </p:nvSpPr>
         <p:spPr>
           <a:xfrm>
-            <a:off x="5806440" y="1691640"/>
-            <a:ext cx="1783080" cy="822960"/>
+            <a:off x="5897880" y="2011680"/>
+            <a:ext cx="1691640" cy="914400"/>
           </a:xfrm>
           <a:prstGeom prst="rect">
             <a:avLst/>
@@ -4614,8 +6899,8 @@
         </p:nvSpPr>
         <p:spPr>
           <a:xfrm>
-            <a:off x="4800600" y="2743200"/>
-            <a:ext cx="2651760" cy="1280160"/>
+            <a:off x="4800600" y="3291840"/>
+            <a:ext cx="2651760" cy="1828800"/>
           </a:xfrm>
           <a:prstGeom prst="rect">
             <a:avLst/>
@@ -4631,14 +6916,14 @@
               <a:buNone/>
             </a:pPr>
             <a:r>
-              <a:rPr lang="en-US" sz="1600" dirty="0">
+              <a:rPr lang="en-US" sz="1900" dirty="0">
                 <a:solidFill>
                   <a:schemeClr val="tx1"/>
                 </a:solidFill>
               </a:rPr>
               <a:t>Acumula as moedas, consulta o extrato e troca por vantagens das empresas.</a:t>
             </a:r>
-            <a:endParaRPr lang="en-US" sz="1600" dirty="0"/>
+            <a:endParaRPr lang="en-US" sz="1900" dirty="0"/>
           </a:p>
         </p:txBody>
       </p:sp>
@@ -4650,12 +6935,12 @@
         </p:nvSpPr>
         <p:spPr>
           <a:xfrm>
-            <a:off x="8503920" y="1417320"/>
-            <a:ext cx="3154680" cy="2743200"/>
+            <a:off x="8503920" y="1737360"/>
+            <a:ext cx="3154680" cy="3566160"/>
           </a:xfrm>
           <a:prstGeom prst="roundRect">
             <a:avLst>
-              <a:gd name="adj" fmla="val 4000"/>
+              <a:gd name="adj" fmla="val 3478"/>
             </a:avLst>
           </a:prstGeom>
           <a:solidFill>
@@ -4672,8 +6957,8 @@
         </p:nvSpPr>
         <p:spPr>
           <a:xfrm>
-            <a:off x="8778240" y="1691640"/>
-            <a:ext cx="822960" cy="822960"/>
+            <a:off x="8778240" y="2011680"/>
+            <a:ext cx="914400" cy="914400"/>
           </a:xfrm>
           <a:prstGeom prst="ellipse">
             <a:avLst/>
@@ -4692,8 +6977,8 @@
         </p:nvSpPr>
         <p:spPr>
           <a:xfrm>
-            <a:off x="8778240" y="1691640"/>
-            <a:ext cx="822960" cy="822960"/>
+            <a:off x="8778240" y="2011680"/>
+            <a:ext cx="914400" cy="914400"/>
           </a:xfrm>
           <a:prstGeom prst="rect">
             <a:avLst/>
@@ -4709,14 +6994,14 @@
               <a:buNone/>
             </a:pPr>
             <a:r>
-              <a:rPr lang="en-US" sz="2300" dirty="0">
+              <a:rPr lang="en-US" sz="2600" dirty="0">
                 <a:solidFill>
                   <a:schemeClr val="bg1"/>
                 </a:solidFill>
               </a:rPr>
               <a:t>🏢</a:t>
             </a:r>
-            <a:endParaRPr lang="en-US" sz="2300" dirty="0"/>
+            <a:endParaRPr lang="en-US" sz="2600" dirty="0"/>
           </a:p>
         </p:txBody>
       </p:sp>
@@ -4728,8 +7013,8 @@
         </p:nvSpPr>
         <p:spPr>
           <a:xfrm>
-            <a:off x="9784080" y="1691640"/>
-            <a:ext cx="1783080" cy="822960"/>
+            <a:off x="9875520" y="2011680"/>
+            <a:ext cx="1691640" cy="914400"/>
           </a:xfrm>
           <a:prstGeom prst="rect">
             <a:avLst/>
@@ -4764,8 +7049,8 @@
         </p:nvSpPr>
         <p:spPr>
           <a:xfrm>
-            <a:off x="8778240" y="2743200"/>
-            <a:ext cx="2651760" cy="1280160"/>
+            <a:off x="8778240" y="3291840"/>
+            <a:ext cx="2651760" cy="1828800"/>
           </a:xfrm>
           <a:prstGeom prst="rect">
             <a:avLst/>
@@ -4781,14 +7066,14 @@
               <a:buNone/>
             </a:pPr>
             <a:r>
-              <a:rPr lang="en-US" sz="1600" dirty="0">
+              <a:rPr lang="en-US" sz="1900" dirty="0">
                 <a:solidFill>
                   <a:schemeClr val="tx1"/>
                 </a:solidFill>
               </a:rPr>
               <a:t>Cadastra vantagens com foto e custo em moedas e confere o cupom do aluno.</a:t>
             </a:r>
-            <a:endParaRPr lang="en-US" sz="1600" dirty="0"/>
+            <a:endParaRPr lang="en-US" sz="1900" dirty="0"/>
           </a:p>
         </p:txBody>
       </p:sp>
@@ -4800,7 +7085,7 @@
         </p:nvSpPr>
         <p:spPr>
           <a:xfrm>
-            <a:off x="3703320" y="2514600"/>
+            <a:off x="3703320" y="3246120"/>
             <a:ext cx="822960" cy="457200"/>
           </a:xfrm>
           <a:prstGeom prst="rightArrow">
@@ -4820,7 +7105,7 @@
         </p:nvSpPr>
         <p:spPr>
           <a:xfrm>
-            <a:off x="3703320" y="3017520"/>
+            <a:off x="3703320" y="3749040"/>
             <a:ext cx="822960" cy="548640"/>
           </a:xfrm>
           <a:prstGeom prst="rect">
@@ -4856,7 +7141,7 @@
         </p:nvSpPr>
         <p:spPr>
           <a:xfrm>
-            <a:off x="7680960" y="2514600"/>
+            <a:off x="7680960" y="3246120"/>
             <a:ext cx="822960" cy="457200"/>
           </a:xfrm>
           <a:prstGeom prst="rightArrow">
@@ -4876,7 +7161,7 @@
         </p:nvSpPr>
         <p:spPr>
           <a:xfrm>
-            <a:off x="7680960" y="3017520"/>
+            <a:off x="7680960" y="3749040"/>
             <a:ext cx="822960" cy="548640"/>
           </a:xfrm>
           <a:prstGeom prst="rect">
@@ -4901,156 +7186,6 @@
               <a:t>resgata vantagem</a:t>
             </a:r>
             <a:endParaRPr lang="en-US" sz="1300" dirty="0"/>
-          </a:p>
-        </p:txBody>
-      </p:sp>
-      <p:sp>
-        <p:nvSpPr>
-          <p:cNvPr id="22" name="cartao-22"/>
-          <p:cNvSpPr/>
-          <p:nvPr/>
-        </p:nvSpPr>
-        <p:spPr>
-          <a:xfrm>
-            <a:off x="548640" y="4526280"/>
-            <a:ext cx="11109960" cy="1325880"/>
-          </a:xfrm>
-          <a:prstGeom prst="roundRect">
-            <a:avLst>
-              <a:gd name="adj" fmla="val 8276"/>
-            </a:avLst>
-          </a:prstGeom>
-          <a:solidFill>
-            <a:schemeClr val="tx2"/>
-          </a:solidFill>
-          <a:ln/>
-        </p:spPr>
-      </p:sp>
-      <p:sp>
-        <p:nvSpPr>
-          <p:cNvPr id="23" name="circulo-23"/>
-          <p:cNvSpPr/>
-          <p:nvPr/>
-        </p:nvSpPr>
-        <p:spPr>
-          <a:xfrm>
-            <a:off x="868680" y="4754880"/>
-            <a:ext cx="868680" cy="868680"/>
-          </a:xfrm>
-          <a:prstGeom prst="ellipse">
-            <a:avLst/>
-          </a:prstGeom>
-          <a:solidFill>
-            <a:schemeClr val="accent3"/>
-          </a:solidFill>
-          <a:ln/>
-        </p:spPr>
-      </p:sp>
-      <p:sp>
-        <p:nvSpPr>
-          <p:cNvPr id="24" name="texto-24"/>
-          <p:cNvSpPr txBox="1"/>
-          <p:nvPr/>
-        </p:nvSpPr>
-        <p:spPr>
-          <a:xfrm>
-            <a:off x="868680" y="4754880"/>
-            <a:ext cx="868680" cy="868680"/>
-          </a:xfrm>
-          <a:prstGeom prst="rect">
-            <a:avLst/>
-          </a:prstGeom>
-          <a:noFill/>
-          <a:ln/>
-        </p:spPr>
-        <p:txBody>
-          <a:bodyPr wrap="square" lIns="0" tIns="0" rIns="0" bIns="0" rtlCol="0" anchor="ctr"/>
-          <a:lstStyle/>
-          <a:p>
-            <a:pPr algn="ctr" indent="0" marL="0">
-              <a:buNone/>
-            </a:pPr>
-            <a:r>
-              <a:rPr lang="en-US" sz="2500" dirty="0">
-                <a:solidFill>
-                  <a:schemeClr val="bg1"/>
-                </a:solidFill>
-              </a:rPr>
-              <a:t>✓</a:t>
-            </a:r>
-            <a:endParaRPr lang="en-US" sz="2500" dirty="0"/>
-          </a:p>
-        </p:txBody>
-      </p:sp>
-      <p:sp>
-        <p:nvSpPr>
-          <p:cNvPr id="25" name="texto-25"/>
-          <p:cNvSpPr txBox="1"/>
-          <p:nvPr/>
-        </p:nvSpPr>
-        <p:spPr>
-          <a:xfrm>
-            <a:off x="2011680" y="4709160"/>
-            <a:ext cx="9144000" cy="411480"/>
-          </a:xfrm>
-          <a:prstGeom prst="rect">
-            <a:avLst/>
-          </a:prstGeom>
-          <a:noFill/>
-          <a:ln/>
-        </p:spPr>
-        <p:txBody>
-          <a:bodyPr wrap="square" lIns="0" tIns="0" rIns="0" bIns="0" rtlCol="0" anchor="ctr"/>
-          <a:lstStyle/>
-          <a:p>
-            <a:pPr indent="0" marL="0">
-              <a:buNone/>
-            </a:pPr>
-            <a:r>
-              <a:rPr lang="en-US" sz="2000" b="1" dirty="0">
-                <a:solidFill>
-                  <a:schemeClr val="bg1"/>
-                </a:solidFill>
-              </a:rPr>
-              <a:t>Todos os requisitos do enunciado</a:t>
-            </a:r>
-            <a:endParaRPr lang="en-US" sz="2000" dirty="0"/>
-          </a:p>
-        </p:txBody>
-      </p:sp>
-      <p:sp>
-        <p:nvSpPr>
-          <p:cNvPr id="26" name="texto-26"/>
-          <p:cNvSpPr txBox="1"/>
-          <p:nvPr/>
-        </p:nvSpPr>
-        <p:spPr>
-          <a:xfrm>
-            <a:off x="2011680" y="5166360"/>
-            <a:ext cx="9326880" cy="594360"/>
-          </a:xfrm>
-          <a:prstGeom prst="rect">
-            <a:avLst/>
-          </a:prstGeom>
-          <a:noFill/>
-          <a:ln/>
-        </p:spPr>
-        <p:txBody>
-          <a:bodyPr wrap="square" lIns="0" tIns="0" rIns="0" bIns="0" rtlCol="0" anchor="t"/>
-          <a:lstStyle/>
-          <a:p>
-            <a:pPr indent="0" marL="0">
-              <a:buNone/>
-            </a:pPr>
-            <a:r>
-              <a:rPr lang="en-US" sz="1600" dirty="0">
-                <a:solidFill>
-                  <a:schemeClr val="bg2"/>
-                </a:solidFill>
-              </a:rPr>
-              <a:t>Login por perfil, envio de moedas com mensagem, extrato, vantagens com foto, resgate com código de cupom e e-mails ao aluno e à empresa.</a:t>
-            </a:r>
-            <a:endParaRPr lang="en-US" sz="1600" dirty="0"/>
           </a:p>
         </p:txBody>
       </p:sp>
@@ -5164,7 +7299,7 @@
       </p:sp>
       <p:pic>
         <p:nvPicPr>
-          <p:cNvPr id="3" name="imagem-27" descr="Diagrama de componentes com as camadas View, Controller, Model e Persistência">    </p:cNvPr>
+          <p:cNvPr id="3" name="imagem-22" descr="Diagrama de componentes com as camadas View, Controller, Model e Persistência">    </p:cNvPr>
           <p:cNvPicPr>
             <a:picLocks noChangeAspect="1"/>
           </p:cNvPicPr>
@@ -5188,7 +7323,7 @@
       </p:pic>
       <p:sp>
         <p:nvSpPr>
-          <p:cNvPr id="4" name="cartao-28"/>
+          <p:cNvPr id="4" name="cartao-23"/>
           <p:cNvSpPr/>
           <p:nvPr/>
         </p:nvSpPr>
@@ -5210,7 +7345,7 @@
       </p:sp>
       <p:sp>
         <p:nvSpPr>
-          <p:cNvPr id="5" name="marcador-29"/>
+          <p:cNvPr id="5" name="marcador-24"/>
           <p:cNvSpPr/>
           <p:nvPr/>
         </p:nvSpPr>
@@ -5230,7 +7365,7 @@
       </p:sp>
       <p:sp>
         <p:nvSpPr>
-          <p:cNvPr id="6" name="texto-30"/>
+          <p:cNvPr id="6" name="texto-25"/>
           <p:cNvSpPr txBox="1"/>
           <p:nvPr/>
         </p:nvSpPr>
@@ -5266,7 +7401,7 @@
       </p:sp>
       <p:sp>
         <p:nvSpPr>
-          <p:cNvPr id="7" name="texto-31"/>
+          <p:cNvPr id="7" name="texto-26"/>
           <p:cNvSpPr txBox="1"/>
           <p:nvPr/>
         </p:nvSpPr>
@@ -5302,7 +7437,7 @@
       </p:sp>
       <p:sp>
         <p:nvSpPr>
-          <p:cNvPr id="8" name="cartao-32"/>
+          <p:cNvPr id="8" name="cartao-27"/>
           <p:cNvSpPr/>
           <p:nvPr/>
         </p:nvSpPr>
@@ -5324,7 +7459,7 @@
       </p:sp>
       <p:sp>
         <p:nvSpPr>
-          <p:cNvPr id="9" name="marcador-33"/>
+          <p:cNvPr id="9" name="marcador-28"/>
           <p:cNvSpPr/>
           <p:nvPr/>
         </p:nvSpPr>
@@ -5344,7 +7479,7 @@
       </p:sp>
       <p:sp>
         <p:nvSpPr>
-          <p:cNvPr id="10" name="texto-34"/>
+          <p:cNvPr id="10" name="texto-29"/>
           <p:cNvSpPr txBox="1"/>
           <p:nvPr/>
         </p:nvSpPr>
@@ -5380,7 +7515,7 @@
       </p:sp>
       <p:sp>
         <p:nvSpPr>
-          <p:cNvPr id="11" name="texto-35"/>
+          <p:cNvPr id="11" name="texto-30"/>
           <p:cNvSpPr txBox="1"/>
           <p:nvPr/>
         </p:nvSpPr>
@@ -5416,7 +7551,7 @@
       </p:sp>
       <p:sp>
         <p:nvSpPr>
-          <p:cNvPr id="12" name="cartao-36"/>
+          <p:cNvPr id="12" name="cartao-31"/>
           <p:cNvSpPr/>
           <p:nvPr/>
         </p:nvSpPr>
@@ -5438,7 +7573,7 @@
       </p:sp>
       <p:sp>
         <p:nvSpPr>
-          <p:cNvPr id="13" name="marcador-37"/>
+          <p:cNvPr id="13" name="marcador-32"/>
           <p:cNvSpPr/>
           <p:nvPr/>
         </p:nvSpPr>
@@ -5458,7 +7593,7 @@
       </p:sp>
       <p:sp>
         <p:nvSpPr>
-          <p:cNvPr id="14" name="texto-38"/>
+          <p:cNvPr id="14" name="texto-33"/>
           <p:cNvSpPr txBox="1"/>
           <p:nvPr/>
         </p:nvSpPr>
@@ -5494,7 +7629,7 @@
       </p:sp>
       <p:sp>
         <p:nvSpPr>
-          <p:cNvPr id="15" name="texto-39"/>
+          <p:cNvPr id="15" name="texto-34"/>
           <p:cNvSpPr txBox="1"/>
           <p:nvPr/>
         </p:nvSpPr>
@@ -5530,7 +7665,7 @@
       </p:sp>
       <p:sp>
         <p:nvSpPr>
-          <p:cNvPr id="16" name="cartao-40"/>
+          <p:cNvPr id="16" name="cartao-35"/>
           <p:cNvSpPr/>
           <p:nvPr/>
         </p:nvSpPr>
@@ -5552,7 +7687,7 @@
       </p:sp>
       <p:sp>
         <p:nvSpPr>
-          <p:cNvPr id="17" name="marcador-41"/>
+          <p:cNvPr id="17" name="marcador-36"/>
           <p:cNvSpPr/>
           <p:nvPr/>
         </p:nvSpPr>
@@ -5572,7 +7707,7 @@
       </p:sp>
       <p:sp>
         <p:nvSpPr>
-          <p:cNvPr id="18" name="texto-42"/>
+          <p:cNvPr id="18" name="texto-37"/>
           <p:cNvSpPr txBox="1"/>
           <p:nvPr/>
         </p:nvSpPr>
@@ -5608,7 +7743,7 @@
       </p:sp>
       <p:sp>
         <p:nvSpPr>
-          <p:cNvPr id="19" name="texto-43"/>
+          <p:cNvPr id="19" name="texto-38"/>
           <p:cNvSpPr txBox="1"/>
           <p:nvPr/>
         </p:nvSpPr>
@@ -5752,7 +7887,7 @@
       </p:sp>
       <p:pic>
         <p:nvPicPr>
-          <p:cNvPr id="3" name="imagem-44" descr="Cadastro do aluno, com erros por campo">    </p:cNvPr>
+          <p:cNvPr id="3" name="imagem-39" descr="Cadastro do aluno, com erros por campo">    </p:cNvPr>
           <p:cNvPicPr>
             <a:picLocks noChangeAspect="1"/>
           </p:cNvPicPr>
@@ -5783,7 +7918,7 @@
       </p:pic>
       <p:pic>
         <p:nvPicPr>
-          <p:cNvPr id="4" name="imagem-45" descr="A empresa cadastra vantagens com foto">    </p:cNvPr>
+          <p:cNvPr id="4" name="imagem-40" descr="A empresa cadastra vantagens com foto">    </p:cNvPr>
           <p:cNvPicPr>
             <a:picLocks noChangeAspect="1"/>
           </p:cNvPicPr>
@@ -5814,7 +7949,7 @@
       </p:pic>
       <p:sp>
         <p:nvSpPr>
-          <p:cNvPr id="5" name="texto-46"/>
+          <p:cNvPr id="5" name="texto-41"/>
           <p:cNvSpPr txBox="1"/>
           <p:nvPr/>
         </p:nvSpPr>
@@ -5850,7 +7985,7 @@
       </p:sp>
       <p:sp>
         <p:nvSpPr>
-          <p:cNvPr id="6" name="texto-47"/>
+          <p:cNvPr id="6" name="texto-42"/>
           <p:cNvSpPr txBox="1"/>
           <p:nvPr/>
         </p:nvSpPr>
@@ -5886,7 +8021,7 @@
       </p:sp>
       <p:sp>
         <p:nvSpPr>
-          <p:cNvPr id="7" name="cartao-48"/>
+          <p:cNvPr id="7" name="cartao-43"/>
           <p:cNvSpPr/>
           <p:nvPr/>
         </p:nvSpPr>
@@ -5908,7 +8043,7 @@
       </p:sp>
       <p:sp>
         <p:nvSpPr>
-          <p:cNvPr id="8" name="texto-49"/>
+          <p:cNvPr id="8" name="texto-44"/>
           <p:cNvSpPr txBox="1"/>
           <p:nvPr/>
         </p:nvSpPr>
@@ -6052,7 +8187,7 @@
       </p:sp>
       <p:pic>
         <p:nvPicPr>
-          <p:cNvPr id="3" name="imagem-50" descr="Professor: aluno, valor e motivo obrigatório">    </p:cNvPr>
+          <p:cNvPr id="3" name="imagem-45" descr="Professor: aluno, valor e motivo obrigatório">    </p:cNvPr>
           <p:cNvPicPr>
             <a:picLocks noChangeAspect="1"/>
           </p:cNvPicPr>
@@ -6083,7 +8218,7 @@
       </p:pic>
       <p:pic>
         <p:nvPicPr>
-          <p:cNvPr id="4" name="imagem-51" descr="Aluno: resgate com o código do cupom">    </p:cNvPr>
+          <p:cNvPr id="4" name="imagem-46" descr="Aluno: resgate com o código do cupom">    </p:cNvPr>
           <p:cNvPicPr>
             <a:picLocks noChangeAspect="1"/>
           </p:cNvPicPr>
@@ -6114,7 +8249,7 @@
       </p:pic>
       <p:sp>
         <p:nvSpPr>
-          <p:cNvPr id="5" name="texto-52"/>
+          <p:cNvPr id="5" name="texto-47"/>
           <p:cNvSpPr txBox="1"/>
           <p:nvPr/>
         </p:nvSpPr>
@@ -6150,7 +8285,7 @@
       </p:sp>
       <p:sp>
         <p:nvSpPr>
-          <p:cNvPr id="6" name="texto-53"/>
+          <p:cNvPr id="6" name="texto-48"/>
           <p:cNvSpPr txBox="1"/>
           <p:nvPr/>
         </p:nvSpPr>
@@ -6186,7 +8321,7 @@
       </p:sp>
       <p:sp>
         <p:nvSpPr>
-          <p:cNvPr id="7" name="cartao-54"/>
+          <p:cNvPr id="7" name="cartao-49"/>
           <p:cNvSpPr/>
           <p:nvPr/>
         </p:nvSpPr>
@@ -6208,7 +8343,7 @@
       </p:sp>
       <p:sp>
         <p:nvSpPr>
-          <p:cNvPr id="8" name="texto-55"/>
+          <p:cNvPr id="8" name="texto-50"/>
           <p:cNvSpPr txBox="1"/>
           <p:nvPr/>
         </p:nvSpPr>
@@ -6352,7 +8487,7 @@
       </p:sp>
       <p:pic>
         <p:nvPicPr>
-          <p:cNvPr id="3" name="imagem-56" descr="Extrato do aluno com recebimento e resgate">    </p:cNvPr>
+          <p:cNvPr id="3" name="imagem-51" descr="Extrato do aluno com recebimento e resgate">    </p:cNvPr>
           <p:cNvPicPr>
             <a:picLocks noChangeAspect="1"/>
           </p:cNvPicPr>
@@ -6383,7 +8518,7 @@
       </p:pic>
       <p:sp>
         <p:nvSpPr>
-          <p:cNvPr id="4" name="texto-57"/>
+          <p:cNvPr id="4" name="texto-52"/>
           <p:cNvSpPr txBox="1"/>
           <p:nvPr/>
         </p:nvSpPr>
@@ -6419,18 +8554,18 @@
       </p:sp>
       <p:sp>
         <p:nvSpPr>
-          <p:cNvPr id="5" name="email-58"/>
+          <p:cNvPr id="5" name="email-53"/>
           <p:cNvSpPr/>
           <p:nvPr/>
         </p:nvSpPr>
         <p:spPr>
           <a:xfrm>
             <a:off x="6675120" y="1325880"/>
-            <a:ext cx="4965192" cy="1600200"/>
+            <a:ext cx="4965192" cy="1828800"/>
           </a:xfrm>
           <a:prstGeom prst="roundRect">
             <a:avLst>
-              <a:gd name="adj" fmla="val 4571"/>
+              <a:gd name="adj" fmla="val 4000"/>
             </a:avLst>
           </a:prstGeom>
           <a:solidFill>
@@ -6453,14 +8588,14 @@
       </p:sp>
       <p:sp>
         <p:nvSpPr>
-          <p:cNvPr id="6" name="texto-59"/>
+          <p:cNvPr id="6" name="texto-54"/>
           <p:cNvSpPr txBox="1"/>
           <p:nvPr/>
         </p:nvSpPr>
         <p:spPr>
           <a:xfrm>
-            <a:off x="6903720" y="1435608"/>
-            <a:ext cx="4572000" cy="365760"/>
+            <a:off x="6903720" y="1417320"/>
+            <a:ext cx="4572000" cy="274320"/>
           </a:xfrm>
           <a:prstGeom prst="rect">
             <a:avLst/>
@@ -6476,27 +8611,122 @@
               <a:buNone/>
             </a:pPr>
             <a:r>
-              <a:rPr lang="en-US" sz="1800" b="1" dirty="0">
+              <a:rPr lang="en-US" sz="1200" b="1" dirty="0">
                 <a:solidFill>
                   <a:schemeClr val="accent1"/>
                 </a:solidFill>
               </a:rPr>
-              <a:t>Cupom do aluno</a:t>
-            </a:r>
-            <a:endParaRPr lang="en-US" sz="1800" dirty="0"/>
-          </a:p>
-        </p:txBody>
-      </p:sp>
-      <p:sp>
-        <p:nvSpPr>
-          <p:cNvPr id="7" name="texto-60"/>
+              <a:t>E-mail para o aluno</a:t>
+            </a:r>
+            <a:endParaRPr lang="en-US" sz="1200" dirty="0"/>
+          </a:p>
+        </p:txBody>
+      </p:sp>
+      <p:sp>
+        <p:nvSpPr>
+          <p:cNvPr id="7" name="texto-55"/>
           <p:cNvSpPr txBox="1"/>
           <p:nvPr/>
         </p:nvSpPr>
         <p:spPr>
           <a:xfrm>
+            <a:off x="6903720" y="1709928"/>
+            <a:ext cx="4572000" cy="256032"/>
+          </a:xfrm>
+          <a:prstGeom prst="rect">
+            <a:avLst/>
+          </a:prstGeom>
+          <a:noFill/>
+          <a:ln/>
+        </p:spPr>
+        <p:txBody>
+          <a:bodyPr wrap="square" lIns="0" tIns="0" rIns="0" bIns="0" rtlCol="0" anchor="ctr"/>
+          <a:lstStyle/>
+          <a:p>
+            <a:pPr indent="0" marL="0">
+              <a:buNone/>
+            </a:pPr>
+            <a:r>
+              <a:rPr lang="en-US" sz="1200" dirty="0">
+                <a:solidFill>
+                  <a:schemeClr val="accent6"/>
+                </a:solidFill>
+              </a:rPr>
+              <a:t>Para: mariana@aluno.com.br</a:t>
+            </a:r>
+            <a:endParaRPr lang="en-US" sz="1200" dirty="0"/>
+          </a:p>
+        </p:txBody>
+      </p:sp>
+      <p:sp>
+        <p:nvSpPr>
+          <p:cNvPr id="8" name="texto-56"/>
+          <p:cNvSpPr txBox="1"/>
+          <p:nvPr/>
+        </p:nvSpPr>
+        <p:spPr>
+          <a:xfrm>
             <a:off x="6903720" y="1965960"/>
-            <a:ext cx="4572000" cy="731520"/>
+            <a:ext cx="4572000" cy="274320"/>
+          </a:xfrm>
+          <a:prstGeom prst="rect">
+            <a:avLst/>
+          </a:prstGeom>
+          <a:noFill/>
+          <a:ln/>
+        </p:spPr>
+        <p:txBody>
+          <a:bodyPr wrap="square" lIns="0" tIns="0" rIns="0" bIns="0" rtlCol="0" anchor="ctr"/>
+          <a:lstStyle/>
+          <a:p>
+            <a:pPr indent="0" marL="0">
+              <a:buNone/>
+            </a:pPr>
+            <a:r>
+              <a:rPr lang="en-US" sz="1300" b="1" dirty="0">
+                <a:solidFill>
+                  <a:schemeClr val="tx1"/>
+                </a:solidFill>
+              </a:rPr>
+              <a:t>Assunto: Seu cupom de resgate</a:t>
+            </a:r>
+            <a:endParaRPr lang="en-US" sz="1300" dirty="0"/>
+          </a:p>
+        </p:txBody>
+      </p:sp>
+      <p:sp>
+        <p:nvSpPr>
+          <p:cNvPr id="9" name="linha-57"/>
+          <p:cNvSpPr/>
+          <p:nvPr/>
+        </p:nvSpPr>
+        <p:spPr>
+          <a:xfrm>
+            <a:off x="6903720" y="2286000"/>
+            <a:ext cx="4507992" cy="0"/>
+          </a:xfrm>
+          <a:prstGeom prst="line">
+            <a:avLst/>
+          </a:prstGeom>
+          <a:noFill/>
+          <a:ln w="9525">
+            <a:solidFill>
+              <a:schemeClr val="accent6"/>
+            </a:solidFill>
+            <a:prstDash val="solid"/>
+          </a:ln>
+        </p:spPr>
+      </p:sp>
+      <p:sp>
+        <p:nvSpPr>
+          <p:cNvPr id="10" name="texto-58"/>
+          <p:cNvSpPr txBox="1"/>
+          <p:nvPr/>
+        </p:nvSpPr>
+        <p:spPr>
+          <a:xfrm>
+            <a:off x="6903720" y="2350008"/>
+            <a:ext cx="4507992" cy="731520"/>
           </a:xfrm>
           <a:prstGeom prst="rect">
             <a:avLst/>
@@ -6512,31 +8742,42 @@
               <a:buNone/>
             </a:pPr>
             <a:r>
-              <a:rPr lang="en-US" sz="1600" dirty="0">
+              <a:rPr lang="en-US" sz="1250" dirty="0">
                 <a:solidFill>
                   <a:schemeClr val="tx1"/>
                 </a:solidFill>
               </a:rPr>
+              <a:t>Você trocou 60 moedas pela vantagem "Almoço no restaurante universitário". </a:t>
+            </a:r>
+            <a:pPr indent="0" marL="0">
+              <a:buNone/>
+            </a:pPr>
+            <a:r>
+              <a:rPr lang="en-US" sz="1250" b="1" dirty="0">
+                <a:solidFill>
+                  <a:schemeClr val="tx1"/>
+                </a:solidFill>
+              </a:rPr>
               <a:t>Código do cupom: 3823V2QQ</a:t>
             </a:r>
-            <a:endParaRPr lang="en-US" sz="1600" dirty="0"/>
-          </a:p>
-        </p:txBody>
-      </p:sp>
-      <p:sp>
-        <p:nvSpPr>
-          <p:cNvPr id="8" name="email-61"/>
+            <a:endParaRPr lang="en-US" sz="1250" dirty="0"/>
+          </a:p>
+        </p:txBody>
+      </p:sp>
+      <p:sp>
+        <p:nvSpPr>
+          <p:cNvPr id="11" name="email-59"/>
           <p:cNvSpPr/>
           <p:nvPr/>
         </p:nvSpPr>
         <p:spPr>
           <a:xfrm>
-            <a:off x="6675120" y="3108960"/>
-            <a:ext cx="4965192" cy="1600200"/>
+            <a:off x="6675120" y="3337560"/>
+            <a:ext cx="4965192" cy="1828800"/>
           </a:xfrm>
           <a:prstGeom prst="roundRect">
             <a:avLst>
-              <a:gd name="adj" fmla="val 4571"/>
+              <a:gd name="adj" fmla="val 4000"/>
             </a:avLst>
           </a:prstGeom>
           <a:solidFill>
@@ -6559,14 +8800,14 @@
       </p:sp>
       <p:sp>
         <p:nvSpPr>
-          <p:cNvPr id="9" name="texto-62"/>
+          <p:cNvPr id="12" name="texto-60"/>
           <p:cNvSpPr txBox="1"/>
           <p:nvPr/>
         </p:nvSpPr>
         <p:spPr>
           <a:xfrm>
-            <a:off x="6903720" y="3218688"/>
-            <a:ext cx="4572000" cy="365760"/>
+            <a:off x="6903720" y="3429000"/>
+            <a:ext cx="4572000" cy="274320"/>
           </a:xfrm>
           <a:prstGeom prst="rect">
             <a:avLst/>
@@ -6582,27 +8823,122 @@
               <a:buNone/>
             </a:pPr>
             <a:r>
-              <a:rPr lang="en-US" sz="1800" b="1" dirty="0">
+              <a:rPr lang="en-US" sz="1200" b="1" dirty="0">
                 <a:solidFill>
                   <a:schemeClr val="accent1"/>
                 </a:solidFill>
               </a:rPr>
-              <a:t>Conferência da empresa</a:t>
-            </a:r>
-            <a:endParaRPr lang="en-US" sz="1800" dirty="0"/>
-          </a:p>
-        </p:txBody>
-      </p:sp>
-      <p:sp>
-        <p:nvSpPr>
-          <p:cNvPr id="10" name="texto-63"/>
+              <a:t>E-mail para a empresa</a:t>
+            </a:r>
+            <a:endParaRPr lang="en-US" sz="1200" dirty="0"/>
+          </a:p>
+        </p:txBody>
+      </p:sp>
+      <p:sp>
+        <p:nvSpPr>
+          <p:cNvPr id="13" name="texto-61"/>
           <p:cNvSpPr txBox="1"/>
           <p:nvPr/>
         </p:nvSpPr>
         <p:spPr>
           <a:xfrm>
-            <a:off x="6903720" y="3749040"/>
-            <a:ext cx="4572000" cy="731520"/>
+            <a:off x="6903720" y="3721608"/>
+            <a:ext cx="4572000" cy="256032"/>
+          </a:xfrm>
+          <a:prstGeom prst="rect">
+            <a:avLst/>
+          </a:prstGeom>
+          <a:noFill/>
+          <a:ln/>
+        </p:spPr>
+        <p:txBody>
+          <a:bodyPr wrap="square" lIns="0" tIns="0" rIns="0" bIns="0" rtlCol="0" anchor="ctr"/>
+          <a:lstStyle/>
+          <a:p>
+            <a:pPr indent="0" marL="0">
+              <a:buNone/>
+            </a:pPr>
+            <a:r>
+              <a:rPr lang="en-US" sz="1200" dirty="0">
+                <a:solidFill>
+                  <a:schemeClr val="accent6"/>
+                </a:solidFill>
+              </a:rPr>
+              <a:t>Para: contato@cantina.com.br</a:t>
+            </a:r>
+            <a:endParaRPr lang="en-US" sz="1200" dirty="0"/>
+          </a:p>
+        </p:txBody>
+      </p:sp>
+      <p:sp>
+        <p:nvSpPr>
+          <p:cNvPr id="14" name="texto-62"/>
+          <p:cNvSpPr txBox="1"/>
+          <p:nvPr/>
+        </p:nvSpPr>
+        <p:spPr>
+          <a:xfrm>
+            <a:off x="6903720" y="3977640"/>
+            <a:ext cx="4572000" cy="274320"/>
+          </a:xfrm>
+          <a:prstGeom prst="rect">
+            <a:avLst/>
+          </a:prstGeom>
+          <a:noFill/>
+          <a:ln/>
+        </p:spPr>
+        <p:txBody>
+          <a:bodyPr wrap="square" lIns="0" tIns="0" rIns="0" bIns="0" rtlCol="0" anchor="ctr"/>
+          <a:lstStyle/>
+          <a:p>
+            <a:pPr indent="0" marL="0">
+              <a:buNone/>
+            </a:pPr>
+            <a:r>
+              <a:rPr lang="en-US" sz="1300" b="1" dirty="0">
+                <a:solidFill>
+                  <a:schemeClr val="tx1"/>
+                </a:solidFill>
+              </a:rPr>
+              <a:t>Assunto: Um aluno resgatou uma vantagem</a:t>
+            </a:r>
+            <a:endParaRPr lang="en-US" sz="1300" dirty="0"/>
+          </a:p>
+        </p:txBody>
+      </p:sp>
+      <p:sp>
+        <p:nvSpPr>
+          <p:cNvPr id="15" name="linha-63"/>
+          <p:cNvSpPr/>
+          <p:nvPr/>
+        </p:nvSpPr>
+        <p:spPr>
+          <a:xfrm>
+            <a:off x="6903720" y="4297680"/>
+            <a:ext cx="4507992" cy="0"/>
+          </a:xfrm>
+          <a:prstGeom prst="line">
+            <a:avLst/>
+          </a:prstGeom>
+          <a:noFill/>
+          <a:ln w="9525">
+            <a:solidFill>
+              <a:schemeClr val="accent6"/>
+            </a:solidFill>
+            <a:prstDash val="solid"/>
+          </a:ln>
+        </p:spPr>
+      </p:sp>
+      <p:sp>
+        <p:nvSpPr>
+          <p:cNvPr id="16" name="texto-64"/>
+          <p:cNvSpPr txBox="1"/>
+          <p:nvPr/>
+        </p:nvSpPr>
+        <p:spPr>
+          <a:xfrm>
+            <a:off x="6903720" y="4361688"/>
+            <a:ext cx="4507992" cy="731520"/>
           </a:xfrm>
           <a:prstGeom prst="rect">
             <a:avLst/>
@@ -6618,31 +8954,42 @@
               <a:buNone/>
             </a:pPr>
             <a:r>
-              <a:rPr lang="en-US" sz="1600" dirty="0">
+              <a:rPr lang="en-US" sz="1250" dirty="0">
                 <a:solidFill>
                   <a:schemeClr val="tx1"/>
                 </a:solidFill>
               </a:rPr>
+              <a:t>O aluno Mariana Alves Ribeiro resgatou a vantagem "Almoço no restaurante universitário". </a:t>
+            </a:r>
+            <a:pPr indent="0" marL="0">
+              <a:buNone/>
+            </a:pPr>
+            <a:r>
+              <a:rPr lang="en-US" sz="1250" b="1" dirty="0">
+                <a:solidFill>
+                  <a:schemeClr val="tx1"/>
+                </a:solidFill>
+              </a:rPr>
               <a:t>Código para conferência: 3823V2QQ</a:t>
             </a:r>
-            <a:endParaRPr lang="en-US" sz="1600" dirty="0"/>
-          </a:p>
-        </p:txBody>
-      </p:sp>
-      <p:sp>
-        <p:nvSpPr>
-          <p:cNvPr id="11" name="cartao-64"/>
+            <a:endParaRPr lang="en-US" sz="1250" dirty="0"/>
+          </a:p>
+        </p:txBody>
+      </p:sp>
+      <p:sp>
+        <p:nvSpPr>
+          <p:cNvPr id="17" name="cartao-65"/>
           <p:cNvSpPr/>
           <p:nvPr/>
         </p:nvSpPr>
         <p:spPr>
           <a:xfrm>
-            <a:off x="548640" y="5349240"/>
-            <a:ext cx="11091672" cy="868680"/>
+            <a:off x="548640" y="5440680"/>
+            <a:ext cx="11091672" cy="822960"/>
           </a:xfrm>
           <a:prstGeom prst="roundRect">
             <a:avLst>
-              <a:gd name="adj" fmla="val 12632"/>
+              <a:gd name="adj" fmla="val 13333"/>
             </a:avLst>
           </a:prstGeom>
           <a:solidFill>
@@ -6653,13 +9000,13 @@
       </p:sp>
       <p:sp>
         <p:nvSpPr>
-          <p:cNvPr id="12" name="texto-65"/>
+          <p:cNvPr id="18" name="texto-66"/>
           <p:cNvSpPr txBox="1"/>
           <p:nvPr/>
         </p:nvSpPr>
         <p:spPr>
           <a:xfrm>
-            <a:off x="822960" y="5413248"/>
+            <a:off x="822960" y="5486400"/>
             <a:ext cx="10561320" cy="731520"/>
           </a:xfrm>
           <a:prstGeom prst="rect">
@@ -6681,7 +9028,7 @@
                   <a:schemeClr val="bg1"/>
                 </a:solidFill>
               </a:rPr>
-              <a:t>Os dois e-mails levam o mesmo código. O envio usa o SMTP do Gmail configurado no .env; sem credenciais, o texto aparece no log da API.</a:t>
+              <a:t>O código é o mesmo nos dois e-mails de propósito: o aluno apresenta o cupom e a empresa confere com o código que recebeu.</a:t>
             </a:r>
             <a:endParaRPr lang="en-US" sz="1600" dirty="0"/>
           </a:p>
@@ -6789,7 +9136,7 @@
                   <a:schemeClr val="tx1"/>
                 </a:solidFill>
               </a:rPr>
-              <a:t>Oficina 1: Docker Compose</a:t>
+              <a:t>Oficina: as tecnologias por camada</a:t>
             </a:r>
             <a:endParaRPr lang="en-US" sz="3200" dirty="0"/>
           </a:p>
@@ -6797,519 +9144,92 @@
       </p:sp>
       <p:sp>
         <p:nvSpPr>
-          <p:cNvPr id="3" name="texto-66"/>
-          <p:cNvSpPr txBox="1"/>
+          <p:cNvPr id="3" name="cartao-67"/>
+          <p:cNvSpPr/>
           <p:nvPr/>
         </p:nvSpPr>
         <p:spPr>
           <a:xfrm>
             <a:off x="548640" y="1371600"/>
-            <a:ext cx="4754880" cy="320040"/>
-          </a:xfrm>
-          <a:prstGeom prst="rect">
-            <a:avLst/>
-          </a:prstGeom>
-          <a:noFill/>
-          <a:ln/>
-        </p:spPr>
-        <p:txBody>
-          <a:bodyPr wrap="square" lIns="0" tIns="0" rIns="0" bIns="0" rtlCol="0" anchor="ctr"/>
-          <a:lstStyle/>
-          <a:p>
-            <a:pPr indent="0" marL="0">
-              <a:buNone/>
-            </a:pPr>
-            <a:r>
-              <a:rPr lang="en-US" sz="1800" b="1" dirty="0">
-                <a:solidFill>
-                  <a:schemeClr val="accent5"/>
-                </a:solidFill>
-              </a:rPr>
-              <a:t>O que é</a:t>
-            </a:r>
-            <a:endParaRPr lang="en-US" sz="1800" dirty="0"/>
-          </a:p>
-        </p:txBody>
-      </p:sp>
-      <p:sp>
-        <p:nvSpPr>
-          <p:cNvPr id="4" name="texto-67"/>
-          <p:cNvSpPr txBox="1"/>
-          <p:nvPr/>
-        </p:nvSpPr>
-        <p:spPr>
-          <a:xfrm>
-            <a:off x="548640" y="1783080"/>
-            <a:ext cx="4754880" cy="1188720"/>
-          </a:xfrm>
-          <a:prstGeom prst="rect">
-            <a:avLst/>
-          </a:prstGeom>
-          <a:noFill/>
-          <a:ln/>
-        </p:spPr>
-        <p:txBody>
-          <a:bodyPr wrap="square" lIns="0" tIns="0" rIns="0" bIns="0" rtlCol="0" anchor="t"/>
-          <a:lstStyle/>
-          <a:p>
-            <a:pPr indent="0" marL="0">
-              <a:buNone/>
-            </a:pPr>
-            <a:r>
-              <a:rPr lang="en-US" sz="1600" dirty="0">
-                <a:solidFill>
-                  <a:schemeClr val="tx1"/>
-                </a:solidFill>
-              </a:rPr>
-              <a:t>Docker empacota cada serviço em um contêiner. O Compose descreve e liga vários contêineres em um arquivo.</a:t>
-            </a:r>
-            <a:endParaRPr lang="en-US" sz="1600" dirty="0"/>
-          </a:p>
-        </p:txBody>
-      </p:sp>
-      <p:sp>
-        <p:nvSpPr>
-          <p:cNvPr id="5" name="texto-68"/>
-          <p:cNvSpPr txBox="1"/>
-          <p:nvPr/>
-        </p:nvSpPr>
-        <p:spPr>
-          <a:xfrm>
-            <a:off x="548640" y="3154680"/>
-            <a:ext cx="4754880" cy="320040"/>
-          </a:xfrm>
-          <a:prstGeom prst="rect">
-            <a:avLst/>
-          </a:prstGeom>
-          <a:noFill/>
-          <a:ln/>
-        </p:spPr>
-        <p:txBody>
-          <a:bodyPr wrap="square" lIns="0" tIns="0" rIns="0" bIns="0" rtlCol="0" anchor="ctr"/>
-          <a:lstStyle/>
-          <a:p>
-            <a:pPr indent="0" marL="0">
-              <a:buNone/>
-            </a:pPr>
-            <a:r>
-              <a:rPr lang="en-US" sz="1800" b="1" dirty="0">
-                <a:solidFill>
-                  <a:schemeClr val="accent5"/>
-                </a:solidFill>
-              </a:rPr>
-              <a:t>Como usar</a:t>
-            </a:r>
-            <a:endParaRPr lang="en-US" sz="1800" dirty="0"/>
-          </a:p>
-        </p:txBody>
-      </p:sp>
-      <p:sp>
-        <p:nvSpPr>
-          <p:cNvPr id="6" name="texto-69"/>
-          <p:cNvSpPr txBox="1"/>
-          <p:nvPr/>
-        </p:nvSpPr>
-        <p:spPr>
-          <a:xfrm>
-            <a:off x="548640" y="3566160"/>
-            <a:ext cx="4754880" cy="2194560"/>
-          </a:xfrm>
-          <a:prstGeom prst="rect">
-            <a:avLst/>
-          </a:prstGeom>
-          <a:noFill/>
-          <a:ln/>
-        </p:spPr>
-        <p:txBody>
-          <a:bodyPr wrap="square" lIns="0" tIns="0" rIns="0" bIns="0" rtlCol="0" anchor="t"/>
-          <a:lstStyle/>
-          <a:p>
-            <a:pPr marL="342900" indent="-342900">
-              <a:spcAft>
-                <a:spcPts val="600"/>
-              </a:spcAft>
-              <a:buSzPct val="100000"/>
-              <a:buFont typeface="+mj-lt"/>
-              <a:buAutoNum type="arabicPeriod" startAt="1"/>
-            </a:pPr>
-            <a:r>
-              <a:rPr lang="en-US" sz="1600" dirty="0">
-                <a:solidFill>
-                  <a:schemeClr val="tx1"/>
-                </a:solidFill>
-              </a:rPr>
-              <a:t>Descrever banco, API e front no docker-compose.yml</a:t>
-            </a:r>
-            <a:endParaRPr lang="en-US" sz="1600" dirty="0"/>
-          </a:p>
-          <a:p>
-            <a:pPr marL="342900" indent="-342900">
-              <a:spcAft>
-                <a:spcPts val="600"/>
-              </a:spcAft>
-              <a:buSzPct val="100000"/>
-              <a:buFont typeface="+mj-lt"/>
-              <a:buAutoNum type="arabicPeriod" startAt="1"/>
-            </a:pPr>
-            <a:r>
-              <a:rPr lang="en-US" sz="1600" dirty="0">
-                <a:solidFill>
-                  <a:schemeClr val="tx1"/>
-                </a:solidFill>
-              </a:rPr>
-              <a:t>Subir tudo: docker compose up -d --build</a:t>
-            </a:r>
-            <a:endParaRPr lang="en-US" sz="1600" dirty="0"/>
-          </a:p>
-          <a:p>
-            <a:pPr marL="342900" indent="-342900">
-              <a:spcAft>
-                <a:spcPts val="600"/>
-              </a:spcAft>
-              <a:buSzPct val="100000"/>
-              <a:buFont typeface="+mj-lt"/>
-              <a:buAutoNum type="arabicPeriod" startAt="1"/>
-            </a:pPr>
-            <a:r>
-              <a:rPr lang="en-US" sz="1600" dirty="0">
-                <a:solidFill>
-                  <a:schemeClr val="tx1"/>
-                </a:solidFill>
-              </a:rPr>
-              <a:t>Ver os registros: docker compose logs api</a:t>
-            </a:r>
-            <a:endParaRPr lang="en-US" sz="1600" dirty="0"/>
-          </a:p>
-          <a:p>
-            <a:pPr marL="342900" indent="-342900">
-              <a:spcAft>
-                <a:spcPts val="600"/>
-              </a:spcAft>
-              <a:buSzPct val="100000"/>
-              <a:buFont typeface="+mj-lt"/>
-              <a:buAutoNum type="arabicPeriod" startAt="1"/>
-            </a:pPr>
-            <a:r>
-              <a:rPr lang="en-US" sz="1600" dirty="0">
-                <a:solidFill>
-                  <a:schemeClr val="tx1"/>
-                </a:solidFill>
-              </a:rPr>
-              <a:t>Limpar tudo: docker compose down -v</a:t>
-            </a:r>
-            <a:endParaRPr lang="en-US" sz="1600" dirty="0"/>
-          </a:p>
-        </p:txBody>
-      </p:sp>
-      <p:sp>
-        <p:nvSpPr>
-          <p:cNvPr id="7" name="painel-codigo-70"/>
-          <p:cNvSpPr/>
-          <p:nvPr/>
-        </p:nvSpPr>
-        <p:spPr>
-          <a:xfrm>
-            <a:off x="5577840" y="1371600"/>
-            <a:ext cx="6080760" cy="3771900"/>
+            <a:ext cx="11091672" cy="868680"/>
           </a:xfrm>
           <a:prstGeom prst="roundRect">
             <a:avLst>
-              <a:gd name="adj" fmla="val 2424"/>
+              <a:gd name="adj" fmla="val 12632"/>
             </a:avLst>
           </a:prstGeom>
           <a:solidFill>
-            <a:schemeClr val="tx1"/>
+            <a:schemeClr val="bg2"/>
           </a:solidFill>
           <a:ln/>
         </p:spPr>
       </p:sp>
       <p:sp>
         <p:nvSpPr>
-          <p:cNvPr id="8" name="texto-71"/>
+          <p:cNvPr id="4" name="marcador-68"/>
+          <p:cNvSpPr/>
+          <p:nvPr/>
+        </p:nvSpPr>
+        <p:spPr>
+          <a:xfrm>
+            <a:off x="822960" y="1627632"/>
+            <a:ext cx="365760" cy="365760"/>
+          </a:xfrm>
+          <a:prstGeom prst="ellipse">
+            <a:avLst/>
+          </a:prstGeom>
+          <a:solidFill>
+            <a:schemeClr val="accent5"/>
+          </a:solidFill>
+          <a:ln/>
+        </p:spPr>
+      </p:sp>
+      <p:sp>
+        <p:nvSpPr>
+          <p:cNvPr id="5" name="texto-69"/>
           <p:cNvSpPr txBox="1"/>
           <p:nvPr/>
         </p:nvSpPr>
         <p:spPr>
           <a:xfrm>
-            <a:off x="5806440" y="1554480"/>
-            <a:ext cx="5623560" cy="3406140"/>
-          </a:xfrm>
-          <a:prstGeom prst="rect">
-            <a:avLst/>
-          </a:prstGeom>
-          <a:noFill/>
-          <a:ln/>
-        </p:spPr>
-        <p:txBody>
-          <a:bodyPr wrap="square" lIns="0" tIns="0" rIns="0" bIns="0" rtlCol="0" anchor="t"/>
-          <a:lstStyle/>
-          <a:p>
-            <a:pPr indent="0" marL="0">
-              <a:buNone/>
-            </a:pPr>
-            <a:r>
-              <a:rPr lang="en-US" sz="1300" dirty="0">
-                <a:solidFill>
-                  <a:schemeClr val="bg2"/>
-                </a:solidFill>
-                <a:latin typeface="Courier New" pitchFamily="34" charset="0"/>
-                <a:ea typeface="Courier New" pitchFamily="34" charset="-122"/>
-                <a:cs typeface="Courier New" pitchFamily="34" charset="-120"/>
-              </a:rPr>
-              <a:t>services:</a:t>
-            </a:r>
-            <a:endParaRPr lang="en-US" sz="1300" dirty="0"/>
-          </a:p>
-          <a:p>
-            <a:pPr indent="0" marL="0">
-              <a:buNone/>
-            </a:pPr>
-            <a:r>
-              <a:rPr lang="en-US" sz="1300" dirty="0">
-                <a:solidFill>
-                  <a:schemeClr val="bg2"/>
-                </a:solidFill>
-                <a:latin typeface="Courier New" pitchFamily="34" charset="0"/>
-                <a:ea typeface="Courier New" pitchFamily="34" charset="-122"/>
-                <a:cs typeface="Courier New" pitchFamily="34" charset="-120"/>
-              </a:rPr>
-              <a:t>  db:</a:t>
-            </a:r>
-            <a:endParaRPr lang="en-US" sz="1300" dirty="0"/>
-          </a:p>
-          <a:p>
-            <a:pPr indent="0" marL="0">
-              <a:buNone/>
-            </a:pPr>
-            <a:r>
-              <a:rPr lang="en-US" sz="1300" dirty="0">
-                <a:solidFill>
-                  <a:schemeClr val="bg2"/>
-                </a:solidFill>
-                <a:latin typeface="Courier New" pitchFamily="34" charset="0"/>
-                <a:ea typeface="Courier New" pitchFamily="34" charset="-122"/>
-                <a:cs typeface="Courier New" pitchFamily="34" charset="-120"/>
-              </a:rPr>
-              <a:t>    image: postgres:16-alpine</a:t>
-            </a:r>
-            <a:endParaRPr lang="en-US" sz="1300" dirty="0"/>
-          </a:p>
-          <a:p>
-            <a:pPr indent="0" marL="0">
-              <a:buNone/>
-            </a:pPr>
-            <a:r>
-              <a:rPr lang="en-US" sz="1300" dirty="0">
-                <a:solidFill>
-                  <a:schemeClr val="bg2"/>
-                </a:solidFill>
-                <a:latin typeface="Courier New" pitchFamily="34" charset="0"/>
-                <a:ea typeface="Courier New" pitchFamily="34" charset="-122"/>
-                <a:cs typeface="Courier New" pitchFamily="34" charset="-120"/>
-              </a:rPr>
-              <a:t>  api:</a:t>
-            </a:r>
-            <a:endParaRPr lang="en-US" sz="1300" dirty="0"/>
-          </a:p>
-          <a:p>
-            <a:pPr indent="0" marL="0">
-              <a:buNone/>
-            </a:pPr>
-            <a:r>
-              <a:rPr lang="en-US" sz="1300" dirty="0">
-                <a:solidFill>
-                  <a:schemeClr val="bg2"/>
-                </a:solidFill>
-                <a:latin typeface="Courier New" pitchFamily="34" charset="0"/>
-                <a:ea typeface="Courier New" pitchFamily="34" charset="-122"/>
-                <a:cs typeface="Courier New" pitchFamily="34" charset="-120"/>
-              </a:rPr>
-              <a:t>    build: ./src/back</a:t>
-            </a:r>
-            <a:endParaRPr lang="en-US" sz="1300" dirty="0"/>
-          </a:p>
-          <a:p>
-            <a:pPr indent="0" marL="0">
-              <a:buNone/>
-            </a:pPr>
-            <a:r>
-              <a:rPr lang="en-US" sz="1300" dirty="0">
-                <a:solidFill>
-                  <a:schemeClr val="bg2"/>
-                </a:solidFill>
-                <a:latin typeface="Courier New" pitchFamily="34" charset="0"/>
-                <a:ea typeface="Courier New" pitchFamily="34" charset="-122"/>
-                <a:cs typeface="Courier New" pitchFamily="34" charset="-120"/>
-              </a:rPr>
-              <a:t>    depends_on:</a:t>
-            </a:r>
-            <a:endParaRPr lang="en-US" sz="1300" dirty="0"/>
-          </a:p>
-          <a:p>
-            <a:pPr indent="0" marL="0">
-              <a:buNone/>
-            </a:pPr>
-            <a:r>
-              <a:rPr lang="en-US" sz="1300" dirty="0">
-                <a:solidFill>
-                  <a:schemeClr val="bg2"/>
-                </a:solidFill>
-                <a:latin typeface="Courier New" pitchFamily="34" charset="0"/>
-                <a:ea typeface="Courier New" pitchFamily="34" charset="-122"/>
-                <a:cs typeface="Courier New" pitchFamily="34" charset="-120"/>
-              </a:rPr>
-              <a:t>      db:</a:t>
-            </a:r>
-            <a:endParaRPr lang="en-US" sz="1300" dirty="0"/>
-          </a:p>
-          <a:p>
-            <a:pPr indent="0" marL="0">
-              <a:buNone/>
-            </a:pPr>
-            <a:r>
-              <a:rPr lang="en-US" sz="1300" dirty="0">
-                <a:solidFill>
-                  <a:schemeClr val="bg2"/>
-                </a:solidFill>
-                <a:latin typeface="Courier New" pitchFamily="34" charset="0"/>
-                <a:ea typeface="Courier New" pitchFamily="34" charset="-122"/>
-                <a:cs typeface="Courier New" pitchFamily="34" charset="-120"/>
-              </a:rPr>
-              <a:t>        condition: service_healthy</a:t>
-            </a:r>
-            <a:endParaRPr lang="en-US" sz="1300" dirty="0"/>
-          </a:p>
-          <a:p>
-            <a:pPr indent="0" marL="0">
-              <a:buNone/>
-            </a:pPr>
-            <a:r>
-              <a:rPr lang="en-US" sz="1300" dirty="0">
-                <a:solidFill>
-                  <a:schemeClr val="bg2"/>
-                </a:solidFill>
-                <a:latin typeface="Courier New" pitchFamily="34" charset="0"/>
-                <a:ea typeface="Courier New" pitchFamily="34" charset="-122"/>
-                <a:cs typeface="Courier New" pitchFamily="34" charset="-120"/>
-              </a:rPr>
-              <a:t>    command: &gt;</a:t>
-            </a:r>
-            <a:endParaRPr lang="en-US" sz="1300" dirty="0"/>
-          </a:p>
-          <a:p>
-            <a:pPr indent="0" marL="0">
-              <a:buNone/>
-            </a:pPr>
-            <a:r>
-              <a:rPr lang="en-US" sz="1300" dirty="0">
-                <a:solidFill>
-                  <a:schemeClr val="bg2"/>
-                </a:solidFill>
-                <a:latin typeface="Courier New" pitchFamily="34" charset="0"/>
-                <a:ea typeface="Courier New" pitchFamily="34" charset="-122"/>
-                <a:cs typeface="Courier New" pitchFamily="34" charset="-120"/>
-              </a:rPr>
-              <a:t>      sh -c "alembic upgrade head</a:t>
-            </a:r>
-            <a:endParaRPr lang="en-US" sz="1300" dirty="0"/>
-          </a:p>
-          <a:p>
-            <a:pPr indent="0" marL="0">
-              <a:buNone/>
-            </a:pPr>
-            <a:r>
-              <a:rPr lang="en-US" sz="1300" dirty="0">
-                <a:solidFill>
-                  <a:schemeClr val="bg2"/>
-                </a:solidFill>
-                <a:latin typeface="Courier New" pitchFamily="34" charset="0"/>
-                <a:ea typeface="Courier New" pitchFamily="34" charset="-122"/>
-                <a:cs typeface="Courier New" pitchFamily="34" charset="-120"/>
-              </a:rPr>
-              <a:t>      &amp;&amp; python -m app.tarefas.seed</a:t>
-            </a:r>
-            <a:endParaRPr lang="en-US" sz="1300" dirty="0"/>
-          </a:p>
-          <a:p>
-            <a:pPr indent="0" marL="0">
-              <a:buNone/>
-            </a:pPr>
-            <a:r>
-              <a:rPr lang="en-US" sz="1300" dirty="0">
-                <a:solidFill>
-                  <a:schemeClr val="bg2"/>
-                </a:solidFill>
-                <a:latin typeface="Courier New" pitchFamily="34" charset="0"/>
-                <a:ea typeface="Courier New" pitchFamily="34" charset="-122"/>
-                <a:cs typeface="Courier New" pitchFamily="34" charset="-120"/>
-              </a:rPr>
-              <a:t>      &amp;&amp; uvicorn app.main:app --port 8000"</a:t>
-            </a:r>
-            <a:endParaRPr lang="en-US" sz="1300" dirty="0"/>
-          </a:p>
-          <a:p>
-            <a:pPr indent="0" marL="0">
-              <a:buNone/>
-            </a:pPr>
-            <a:r>
-              <a:rPr lang="en-US" sz="1300" dirty="0">
-                <a:solidFill>
-                  <a:schemeClr val="bg2"/>
-                </a:solidFill>
-                <a:latin typeface="Courier New" pitchFamily="34" charset="0"/>
-                <a:ea typeface="Courier New" pitchFamily="34" charset="-122"/>
-                <a:cs typeface="Courier New" pitchFamily="34" charset="-120"/>
-              </a:rPr>
-              <a:t>  front:</a:t>
-            </a:r>
-            <a:endParaRPr lang="en-US" sz="1300" dirty="0"/>
-          </a:p>
-          <a:p>
-            <a:pPr indent="0" marL="0">
-              <a:buNone/>
-            </a:pPr>
-            <a:r>
-              <a:rPr lang="en-US" sz="1300" dirty="0">
-                <a:solidFill>
-                  <a:schemeClr val="bg2"/>
-                </a:solidFill>
-                <a:latin typeface="Courier New" pitchFamily="34" charset="0"/>
-                <a:ea typeface="Courier New" pitchFamily="34" charset="-122"/>
-                <a:cs typeface="Courier New" pitchFamily="34" charset="-120"/>
-              </a:rPr>
-              <a:t>    build: ./src/front</a:t>
-            </a:r>
-            <a:endParaRPr lang="en-US" sz="1300" dirty="0"/>
-          </a:p>
-          <a:p>
-            <a:pPr indent="0" marL="0">
-              <a:buNone/>
-            </a:pPr>
-            <a:r>
-              <a:rPr lang="en-US" sz="1300" dirty="0">
-                <a:solidFill>
-                  <a:schemeClr val="bg2"/>
-                </a:solidFill>
-                <a:latin typeface="Courier New" pitchFamily="34" charset="0"/>
-                <a:ea typeface="Courier New" pitchFamily="34" charset="-122"/>
-                <a:cs typeface="Courier New" pitchFamily="34" charset="-120"/>
-              </a:rPr>
-              <a:t>    ports: ["5173:80"]</a:t>
-            </a:r>
-            <a:endParaRPr lang="en-US" sz="1300" dirty="0"/>
-          </a:p>
-        </p:txBody>
-      </p:sp>
-      <p:sp>
-        <p:nvSpPr>
-          <p:cNvPr id="9" name="texto-72"/>
+            <a:off x="1417320" y="1371600"/>
+            <a:ext cx="2103120" cy="868680"/>
+          </a:xfrm>
+          <a:prstGeom prst="rect">
+            <a:avLst/>
+          </a:prstGeom>
+          <a:noFill/>
+          <a:ln/>
+        </p:spPr>
+        <p:txBody>
+          <a:bodyPr wrap="square" lIns="0" tIns="0" rIns="0" bIns="0" rtlCol="0" anchor="ctr"/>
+          <a:lstStyle/>
+          <a:p>
+            <a:pPr indent="0" marL="0">
+              <a:buNone/>
+            </a:pPr>
+            <a:r>
+              <a:rPr lang="en-US" sz="2000" b="1" dirty="0">
+                <a:solidFill>
+                  <a:schemeClr val="tx1"/>
+                </a:solidFill>
+              </a:rPr>
+              <a:t>View</a:t>
+            </a:r>
+            <a:endParaRPr lang="en-US" sz="2000" dirty="0"/>
+          </a:p>
+        </p:txBody>
+      </p:sp>
+      <p:sp>
+        <p:nvSpPr>
+          <p:cNvPr id="6" name="texto-70"/>
           <p:cNvSpPr txBox="1"/>
           <p:nvPr/>
         </p:nvSpPr>
         <p:spPr>
           <a:xfrm>
-            <a:off x="5577840" y="5216652"/>
-            <a:ext cx="6080760" cy="274320"/>
+            <a:off x="3566160" y="1371600"/>
+            <a:ext cx="3840480" cy="868680"/>
           </a:xfrm>
           <a:prstGeom prst="rect">
             <a:avLst/>
@@ -7325,14 +9245,650 @@
               <a:buNone/>
             </a:pPr>
             <a:r>
-              <a:rPr lang="en-US" sz="1100" i="1" dirty="0">
-                <a:solidFill>
-                  <a:schemeClr val="accent6"/>
-                </a:solidFill>
-              </a:rPr>
-              <a:t>docker-compose.yml (trecho resumido e reformatado)</a:t>
-            </a:r>
-            <a:endParaRPr lang="en-US" sz="1100" dirty="0"/>
+              <a:rPr lang="en-US" sz="1600" b="1" dirty="0">
+                <a:solidFill>
+                  <a:schemeClr val="accent5"/>
+                </a:solidFill>
+              </a:rPr>
+              <a:t>React · TypeScript · Tailwind</a:t>
+            </a:r>
+            <a:endParaRPr lang="en-US" sz="1600" dirty="0"/>
+          </a:p>
+        </p:txBody>
+      </p:sp>
+      <p:sp>
+        <p:nvSpPr>
+          <p:cNvPr id="7" name="texto-71"/>
+          <p:cNvSpPr txBox="1"/>
+          <p:nvPr/>
+        </p:nvSpPr>
+        <p:spPr>
+          <a:xfrm>
+            <a:off x="7498080" y="1371600"/>
+            <a:ext cx="3977640" cy="868680"/>
+          </a:xfrm>
+          <a:prstGeom prst="rect">
+            <a:avLst/>
+          </a:prstGeom>
+          <a:noFill/>
+          <a:ln/>
+        </p:spPr>
+        <p:txBody>
+          <a:bodyPr wrap="square" lIns="0" tIns="0" rIns="0" bIns="0" rtlCol="0" anchor="ctr"/>
+          <a:lstStyle/>
+          <a:p>
+            <a:pPr indent="0" marL="0">
+              <a:buNone/>
+            </a:pPr>
+            <a:r>
+              <a:rPr lang="en-US" sz="1400" dirty="0">
+                <a:solidFill>
+                  <a:schemeClr val="tx1"/>
+                </a:solidFill>
+              </a:rPr>
+              <a:t>A tela no navegador: componentes, tipos e estilo.</a:t>
+            </a:r>
+            <a:endParaRPr lang="en-US" sz="1400" dirty="0"/>
+          </a:p>
+        </p:txBody>
+      </p:sp>
+      <p:sp>
+        <p:nvSpPr>
+          <p:cNvPr id="8" name="cartao-72"/>
+          <p:cNvSpPr/>
+          <p:nvPr/>
+        </p:nvSpPr>
+        <p:spPr>
+          <a:xfrm>
+            <a:off x="548640" y="2377440"/>
+            <a:ext cx="11091672" cy="868680"/>
+          </a:xfrm>
+          <a:prstGeom prst="roundRect">
+            <a:avLst>
+              <a:gd name="adj" fmla="val 12632"/>
+            </a:avLst>
+          </a:prstGeom>
+          <a:solidFill>
+            <a:schemeClr val="bg2"/>
+          </a:solidFill>
+          <a:ln/>
+        </p:spPr>
+      </p:sp>
+      <p:sp>
+        <p:nvSpPr>
+          <p:cNvPr id="9" name="marcador-73"/>
+          <p:cNvSpPr/>
+          <p:nvPr/>
+        </p:nvSpPr>
+        <p:spPr>
+          <a:xfrm>
+            <a:off x="822960" y="2633472"/>
+            <a:ext cx="365760" cy="365760"/>
+          </a:xfrm>
+          <a:prstGeom prst="ellipse">
+            <a:avLst/>
+          </a:prstGeom>
+          <a:solidFill>
+            <a:schemeClr val="accent1"/>
+          </a:solidFill>
+          <a:ln/>
+        </p:spPr>
+      </p:sp>
+      <p:sp>
+        <p:nvSpPr>
+          <p:cNvPr id="10" name="texto-74"/>
+          <p:cNvSpPr txBox="1"/>
+          <p:nvPr/>
+        </p:nvSpPr>
+        <p:spPr>
+          <a:xfrm>
+            <a:off x="1417320" y="2377440"/>
+            <a:ext cx="2103120" cy="868680"/>
+          </a:xfrm>
+          <a:prstGeom prst="rect">
+            <a:avLst/>
+          </a:prstGeom>
+          <a:noFill/>
+          <a:ln/>
+        </p:spPr>
+        <p:txBody>
+          <a:bodyPr wrap="square" lIns="0" tIns="0" rIns="0" bIns="0" rtlCol="0" anchor="ctr"/>
+          <a:lstStyle/>
+          <a:p>
+            <a:pPr indent="0" marL="0">
+              <a:buNone/>
+            </a:pPr>
+            <a:r>
+              <a:rPr lang="en-US" sz="2000" b="1" dirty="0">
+                <a:solidFill>
+                  <a:schemeClr val="tx1"/>
+                </a:solidFill>
+              </a:rPr>
+              <a:t>Controller</a:t>
+            </a:r>
+            <a:endParaRPr lang="en-US" sz="2000" dirty="0"/>
+          </a:p>
+        </p:txBody>
+      </p:sp>
+      <p:sp>
+        <p:nvSpPr>
+          <p:cNvPr id="11" name="texto-75"/>
+          <p:cNvSpPr txBox="1"/>
+          <p:nvPr/>
+        </p:nvSpPr>
+        <p:spPr>
+          <a:xfrm>
+            <a:off x="3566160" y="2377440"/>
+            <a:ext cx="3840480" cy="868680"/>
+          </a:xfrm>
+          <a:prstGeom prst="rect">
+            <a:avLst/>
+          </a:prstGeom>
+          <a:noFill/>
+          <a:ln/>
+        </p:spPr>
+        <p:txBody>
+          <a:bodyPr wrap="square" lIns="0" tIns="0" rIns="0" bIns="0" rtlCol="0" anchor="ctr"/>
+          <a:lstStyle/>
+          <a:p>
+            <a:pPr indent="0" marL="0">
+              <a:buNone/>
+            </a:pPr>
+            <a:r>
+              <a:rPr lang="en-US" sz="1600" b="1" dirty="0">
+                <a:solidFill>
+                  <a:schemeClr val="accent1"/>
+                </a:solidFill>
+              </a:rPr>
+              <a:t>FastAPI · Pydantic · JWT · bcrypt</a:t>
+            </a:r>
+            <a:endParaRPr lang="en-US" sz="1600" dirty="0"/>
+          </a:p>
+        </p:txBody>
+      </p:sp>
+      <p:sp>
+        <p:nvSpPr>
+          <p:cNvPr id="12" name="texto-76"/>
+          <p:cNvSpPr txBox="1"/>
+          <p:nvPr/>
+        </p:nvSpPr>
+        <p:spPr>
+          <a:xfrm>
+            <a:off x="7498080" y="2377440"/>
+            <a:ext cx="3977640" cy="868680"/>
+          </a:xfrm>
+          <a:prstGeom prst="rect">
+            <a:avLst/>
+          </a:prstGeom>
+          <a:noFill/>
+          <a:ln/>
+        </p:spPr>
+        <p:txBody>
+          <a:bodyPr wrap="square" lIns="0" tIns="0" rIns="0" bIns="0" rtlCol="0" anchor="ctr"/>
+          <a:lstStyle/>
+          <a:p>
+            <a:pPr indent="0" marL="0">
+              <a:buNone/>
+            </a:pPr>
+            <a:r>
+              <a:rPr lang="en-US" sz="1400" dirty="0">
+                <a:solidFill>
+                  <a:schemeClr val="tx1"/>
+                </a:solidFill>
+              </a:rPr>
+              <a:t>Recebe o pedido, valida os dados e protege o acesso.</a:t>
+            </a:r>
+            <a:endParaRPr lang="en-US" sz="1400" dirty="0"/>
+          </a:p>
+        </p:txBody>
+      </p:sp>
+      <p:sp>
+        <p:nvSpPr>
+          <p:cNvPr id="13" name="cartao-77"/>
+          <p:cNvSpPr/>
+          <p:nvPr/>
+        </p:nvSpPr>
+        <p:spPr>
+          <a:xfrm>
+            <a:off x="548640" y="3383280"/>
+            <a:ext cx="11091672" cy="868680"/>
+          </a:xfrm>
+          <a:prstGeom prst="roundRect">
+            <a:avLst>
+              <a:gd name="adj" fmla="val 12632"/>
+            </a:avLst>
+          </a:prstGeom>
+          <a:solidFill>
+            <a:schemeClr val="bg2"/>
+          </a:solidFill>
+          <a:ln/>
+        </p:spPr>
+      </p:sp>
+      <p:sp>
+        <p:nvSpPr>
+          <p:cNvPr id="14" name="marcador-78"/>
+          <p:cNvSpPr/>
+          <p:nvPr/>
+        </p:nvSpPr>
+        <p:spPr>
+          <a:xfrm>
+            <a:off x="822960" y="3639312"/>
+            <a:ext cx="365760" cy="365760"/>
+          </a:xfrm>
+          <a:prstGeom prst="ellipse">
+            <a:avLst/>
+          </a:prstGeom>
+          <a:solidFill>
+            <a:schemeClr val="accent3"/>
+          </a:solidFill>
+          <a:ln/>
+        </p:spPr>
+      </p:sp>
+      <p:sp>
+        <p:nvSpPr>
+          <p:cNvPr id="15" name="texto-79"/>
+          <p:cNvSpPr txBox="1"/>
+          <p:nvPr/>
+        </p:nvSpPr>
+        <p:spPr>
+          <a:xfrm>
+            <a:off x="1417320" y="3383280"/>
+            <a:ext cx="2103120" cy="868680"/>
+          </a:xfrm>
+          <a:prstGeom prst="rect">
+            <a:avLst/>
+          </a:prstGeom>
+          <a:noFill/>
+          <a:ln/>
+        </p:spPr>
+        <p:txBody>
+          <a:bodyPr wrap="square" lIns="0" tIns="0" rIns="0" bIns="0" rtlCol="0" anchor="ctr"/>
+          <a:lstStyle/>
+          <a:p>
+            <a:pPr indent="0" marL="0">
+              <a:buNone/>
+            </a:pPr>
+            <a:r>
+              <a:rPr lang="en-US" sz="2000" b="1" dirty="0">
+                <a:solidFill>
+                  <a:schemeClr val="tx1"/>
+                </a:solidFill>
+              </a:rPr>
+              <a:t>Model</a:t>
+            </a:r>
+            <a:endParaRPr lang="en-US" sz="2000" dirty="0"/>
+          </a:p>
+        </p:txBody>
+      </p:sp>
+      <p:sp>
+        <p:nvSpPr>
+          <p:cNvPr id="16" name="texto-80"/>
+          <p:cNvSpPr txBox="1"/>
+          <p:nvPr/>
+        </p:nvSpPr>
+        <p:spPr>
+          <a:xfrm>
+            <a:off x="3566160" y="3383280"/>
+            <a:ext cx="3840480" cy="868680"/>
+          </a:xfrm>
+          <a:prstGeom prst="rect">
+            <a:avLst/>
+          </a:prstGeom>
+          <a:noFill/>
+          <a:ln/>
+        </p:spPr>
+        <p:txBody>
+          <a:bodyPr wrap="square" lIns="0" tIns="0" rIns="0" bIns="0" rtlCol="0" anchor="ctr"/>
+          <a:lstStyle/>
+          <a:p>
+            <a:pPr indent="0" marL="0">
+              <a:buNone/>
+            </a:pPr>
+            <a:r>
+              <a:rPr lang="en-US" sz="1600" b="1" dirty="0">
+                <a:solidFill>
+                  <a:schemeClr val="accent3"/>
+                </a:solidFill>
+              </a:rPr>
+              <a:t>Python (serviços e entidades)</a:t>
+            </a:r>
+            <a:endParaRPr lang="en-US" sz="1600" dirty="0"/>
+          </a:p>
+        </p:txBody>
+      </p:sp>
+      <p:sp>
+        <p:nvSpPr>
+          <p:cNvPr id="17" name="texto-81"/>
+          <p:cNvSpPr txBox="1"/>
+          <p:nvPr/>
+        </p:nvSpPr>
+        <p:spPr>
+          <a:xfrm>
+            <a:off x="7498080" y="3383280"/>
+            <a:ext cx="3977640" cy="868680"/>
+          </a:xfrm>
+          <a:prstGeom prst="rect">
+            <a:avLst/>
+          </a:prstGeom>
+          <a:noFill/>
+          <a:ln/>
+        </p:spPr>
+        <p:txBody>
+          <a:bodyPr wrap="square" lIns="0" tIns="0" rIns="0" bIns="0" rtlCol="0" anchor="ctr"/>
+          <a:lstStyle/>
+          <a:p>
+            <a:pPr indent="0" marL="0">
+              <a:buNone/>
+            </a:pPr>
+            <a:r>
+              <a:rPr lang="en-US" sz="1400" dirty="0">
+                <a:solidFill>
+                  <a:schemeClr val="tx1"/>
+                </a:solidFill>
+              </a:rPr>
+              <a:t>As regras do negócio: saldo, envio, resgate e cupom.</a:t>
+            </a:r>
+            <a:endParaRPr lang="en-US" sz="1400" dirty="0"/>
+          </a:p>
+        </p:txBody>
+      </p:sp>
+      <p:sp>
+        <p:nvSpPr>
+          <p:cNvPr id="18" name="cartao-82"/>
+          <p:cNvSpPr/>
+          <p:nvPr/>
+        </p:nvSpPr>
+        <p:spPr>
+          <a:xfrm>
+            <a:off x="548640" y="4389120"/>
+            <a:ext cx="11091672" cy="868680"/>
+          </a:xfrm>
+          <a:prstGeom prst="roundRect">
+            <a:avLst>
+              <a:gd name="adj" fmla="val 12632"/>
+            </a:avLst>
+          </a:prstGeom>
+          <a:solidFill>
+            <a:schemeClr val="bg2"/>
+          </a:solidFill>
+          <a:ln/>
+        </p:spPr>
+      </p:sp>
+      <p:sp>
+        <p:nvSpPr>
+          <p:cNvPr id="19" name="marcador-83"/>
+          <p:cNvSpPr/>
+          <p:nvPr/>
+        </p:nvSpPr>
+        <p:spPr>
+          <a:xfrm>
+            <a:off x="822960" y="4645152"/>
+            <a:ext cx="365760" cy="365760"/>
+          </a:xfrm>
+          <a:prstGeom prst="ellipse">
+            <a:avLst/>
+          </a:prstGeom>
+          <a:solidFill>
+            <a:schemeClr val="accent2"/>
+          </a:solidFill>
+          <a:ln/>
+        </p:spPr>
+      </p:sp>
+      <p:sp>
+        <p:nvSpPr>
+          <p:cNvPr id="20" name="texto-84"/>
+          <p:cNvSpPr txBox="1"/>
+          <p:nvPr/>
+        </p:nvSpPr>
+        <p:spPr>
+          <a:xfrm>
+            <a:off x="1417320" y="4389120"/>
+            <a:ext cx="2103120" cy="868680"/>
+          </a:xfrm>
+          <a:prstGeom prst="rect">
+            <a:avLst/>
+          </a:prstGeom>
+          <a:noFill/>
+          <a:ln/>
+        </p:spPr>
+        <p:txBody>
+          <a:bodyPr wrap="square" lIns="0" tIns="0" rIns="0" bIns="0" rtlCol="0" anchor="ctr"/>
+          <a:lstStyle/>
+          <a:p>
+            <a:pPr indent="0" marL="0">
+              <a:buNone/>
+            </a:pPr>
+            <a:r>
+              <a:rPr lang="en-US" sz="2000" b="1" dirty="0">
+                <a:solidFill>
+                  <a:schemeClr val="tx1"/>
+                </a:solidFill>
+              </a:rPr>
+              <a:t>Persistência</a:t>
+            </a:r>
+            <a:endParaRPr lang="en-US" sz="2000" dirty="0"/>
+          </a:p>
+        </p:txBody>
+      </p:sp>
+      <p:sp>
+        <p:nvSpPr>
+          <p:cNvPr id="21" name="texto-85"/>
+          <p:cNvSpPr txBox="1"/>
+          <p:nvPr/>
+        </p:nvSpPr>
+        <p:spPr>
+          <a:xfrm>
+            <a:off x="3566160" y="4389120"/>
+            <a:ext cx="3840480" cy="868680"/>
+          </a:xfrm>
+          <a:prstGeom prst="rect">
+            <a:avLst/>
+          </a:prstGeom>
+          <a:noFill/>
+          <a:ln/>
+        </p:spPr>
+        <p:txBody>
+          <a:bodyPr wrap="square" lIns="0" tIns="0" rIns="0" bIns="0" rtlCol="0" anchor="ctr"/>
+          <a:lstStyle/>
+          <a:p>
+            <a:pPr indent="0" marL="0">
+              <a:buNone/>
+            </a:pPr>
+            <a:r>
+              <a:rPr lang="en-US" sz="1600" b="1" dirty="0">
+                <a:solidFill>
+                  <a:schemeClr val="tx1"/>
+                </a:solidFill>
+              </a:rPr>
+              <a:t>SQLAlchemy · PostgreSQL · Alembic</a:t>
+            </a:r>
+            <a:endParaRPr lang="en-US" sz="1600" dirty="0"/>
+          </a:p>
+        </p:txBody>
+      </p:sp>
+      <p:sp>
+        <p:nvSpPr>
+          <p:cNvPr id="22" name="texto-86"/>
+          <p:cNvSpPr txBox="1"/>
+          <p:nvPr/>
+        </p:nvSpPr>
+        <p:spPr>
+          <a:xfrm>
+            <a:off x="7498080" y="4389120"/>
+            <a:ext cx="3977640" cy="868680"/>
+          </a:xfrm>
+          <a:prstGeom prst="rect">
+            <a:avLst/>
+          </a:prstGeom>
+          <a:noFill/>
+          <a:ln/>
+        </p:spPr>
+        <p:txBody>
+          <a:bodyPr wrap="square" lIns="0" tIns="0" rIns="0" bIns="0" rtlCol="0" anchor="ctr"/>
+          <a:lstStyle/>
+          <a:p>
+            <a:pPr indent="0" marL="0">
+              <a:buNone/>
+            </a:pPr>
+            <a:r>
+              <a:rPr lang="en-US" sz="1400" dirty="0">
+                <a:solidFill>
+                  <a:schemeClr val="tx1"/>
+                </a:solidFill>
+              </a:rPr>
+              <a:t>Repositórios gravam e leem do banco; o esquema é versionado.</a:t>
+            </a:r>
+            <a:endParaRPr lang="en-US" sz="1400" dirty="0"/>
+          </a:p>
+        </p:txBody>
+      </p:sp>
+      <p:sp>
+        <p:nvSpPr>
+          <p:cNvPr id="23" name="cartao-87"/>
+          <p:cNvSpPr/>
+          <p:nvPr/>
+        </p:nvSpPr>
+        <p:spPr>
+          <a:xfrm>
+            <a:off x="548640" y="5394960"/>
+            <a:ext cx="11091672" cy="868680"/>
+          </a:xfrm>
+          <a:prstGeom prst="roundRect">
+            <a:avLst>
+              <a:gd name="adj" fmla="val 12632"/>
+            </a:avLst>
+          </a:prstGeom>
+          <a:solidFill>
+            <a:schemeClr val="bg2"/>
+          </a:solidFill>
+          <a:ln/>
+        </p:spPr>
+      </p:sp>
+      <p:sp>
+        <p:nvSpPr>
+          <p:cNvPr id="24" name="marcador-88"/>
+          <p:cNvSpPr/>
+          <p:nvPr/>
+        </p:nvSpPr>
+        <p:spPr>
+          <a:xfrm>
+            <a:off x="822960" y="5650992"/>
+            <a:ext cx="365760" cy="365760"/>
+          </a:xfrm>
+          <a:prstGeom prst="ellipse">
+            <a:avLst/>
+          </a:prstGeom>
+          <a:solidFill>
+            <a:schemeClr val="accent6"/>
+          </a:solidFill>
+          <a:ln/>
+        </p:spPr>
+      </p:sp>
+      <p:sp>
+        <p:nvSpPr>
+          <p:cNvPr id="25" name="texto-89"/>
+          <p:cNvSpPr txBox="1"/>
+          <p:nvPr/>
+        </p:nvSpPr>
+        <p:spPr>
+          <a:xfrm>
+            <a:off x="1417320" y="5394960"/>
+            <a:ext cx="2103120" cy="868680"/>
+          </a:xfrm>
+          <a:prstGeom prst="rect">
+            <a:avLst/>
+          </a:prstGeom>
+          <a:noFill/>
+          <a:ln/>
+        </p:spPr>
+        <p:txBody>
+          <a:bodyPr wrap="square" lIns="0" tIns="0" rIns="0" bIns="0" rtlCol="0" anchor="ctr"/>
+          <a:lstStyle/>
+          <a:p>
+            <a:pPr indent="0" marL="0">
+              <a:buNone/>
+            </a:pPr>
+            <a:r>
+              <a:rPr lang="en-US" sz="2000" b="1" dirty="0">
+                <a:solidFill>
+                  <a:schemeClr val="tx1"/>
+                </a:solidFill>
+              </a:rPr>
+              <a:t>Ambiente</a:t>
+            </a:r>
+            <a:endParaRPr lang="en-US" sz="2000" dirty="0"/>
+          </a:p>
+        </p:txBody>
+      </p:sp>
+      <p:sp>
+        <p:nvSpPr>
+          <p:cNvPr id="26" name="texto-90"/>
+          <p:cNvSpPr txBox="1"/>
+          <p:nvPr/>
+        </p:nvSpPr>
+        <p:spPr>
+          <a:xfrm>
+            <a:off x="3566160" y="5394960"/>
+            <a:ext cx="3840480" cy="868680"/>
+          </a:xfrm>
+          <a:prstGeom prst="rect">
+            <a:avLst/>
+          </a:prstGeom>
+          <a:noFill/>
+          <a:ln/>
+        </p:spPr>
+        <p:txBody>
+          <a:bodyPr wrap="square" lIns="0" tIns="0" rIns="0" bIns="0" rtlCol="0" anchor="ctr"/>
+          <a:lstStyle/>
+          <a:p>
+            <a:pPr indent="0" marL="0">
+              <a:buNone/>
+            </a:pPr>
+            <a:r>
+              <a:rPr lang="en-US" sz="1600" b="1" dirty="0">
+                <a:solidFill>
+                  <a:schemeClr val="tx1"/>
+                </a:solidFill>
+              </a:rPr>
+              <a:t>Docker Compose</a:t>
+            </a:r>
+            <a:endParaRPr lang="en-US" sz="1600" dirty="0"/>
+          </a:p>
+        </p:txBody>
+      </p:sp>
+      <p:sp>
+        <p:nvSpPr>
+          <p:cNvPr id="27" name="texto-91"/>
+          <p:cNvSpPr txBox="1"/>
+          <p:nvPr/>
+        </p:nvSpPr>
+        <p:spPr>
+          <a:xfrm>
+            <a:off x="7498080" y="5394960"/>
+            <a:ext cx="3977640" cy="868680"/>
+          </a:xfrm>
+          <a:prstGeom prst="rect">
+            <a:avLst/>
+          </a:prstGeom>
+          <a:noFill/>
+          <a:ln/>
+        </p:spPr>
+        <p:txBody>
+          <a:bodyPr wrap="square" lIns="0" tIns="0" rIns="0" bIns="0" rtlCol="0" anchor="ctr"/>
+          <a:lstStyle/>
+          <a:p>
+            <a:pPr indent="0" marL="0">
+              <a:buNone/>
+            </a:pPr>
+            <a:r>
+              <a:rPr lang="en-US" sz="1400" dirty="0">
+                <a:solidFill>
+                  <a:schemeClr val="tx1"/>
+                </a:solidFill>
+              </a:rPr>
+              <a:t>Sobe banco, API e tela juntos, com um comando.</a:t>
+            </a:r>
+            <a:endParaRPr lang="en-US" sz="1400" dirty="0"/>
           </a:p>
         </p:txBody>
       </p:sp>
@@ -7438,7 +9994,7 @@
                   <a:schemeClr val="tx1"/>
                 </a:solidFill>
               </a:rPr>
-              <a:t>Oficina 2: FastAPI e Pydantic</a:t>
+              <a:t>React e TypeScript: a tela como componente</a:t>
             </a:r>
             <a:endParaRPr lang="en-US" sz="3200" dirty="0"/>
           </a:p>
@@ -7446,14 +10002,36 @@
       </p:sp>
       <p:sp>
         <p:nvSpPr>
-          <p:cNvPr id="3" name="texto-73"/>
+          <p:cNvPr id="3" name="etiqueta-92"/>
+          <p:cNvSpPr/>
+          <p:nvPr/>
+        </p:nvSpPr>
+        <p:spPr>
+          <a:xfrm>
+            <a:off x="548640" y="1325880"/>
+            <a:ext cx="2286000" cy="347472"/>
+          </a:xfrm>
+          <a:prstGeom prst="roundRect">
+            <a:avLst>
+              <a:gd name="adj" fmla="val 50000"/>
+            </a:avLst>
+          </a:prstGeom>
+          <a:solidFill>
+            <a:schemeClr val="accent5"/>
+          </a:solidFill>
+          <a:ln/>
+        </p:spPr>
+      </p:sp>
+      <p:sp>
+        <p:nvSpPr>
+          <p:cNvPr id="4" name="texto-93"/>
           <p:cNvSpPr txBox="1"/>
           <p:nvPr/>
         </p:nvSpPr>
         <p:spPr>
           <a:xfrm>
-            <a:off x="548640" y="1371600"/>
-            <a:ext cx="4754880" cy="320040"/>
+            <a:off x="548640" y="1325880"/>
+            <a:ext cx="2286000" cy="347472"/>
           </a:xfrm>
           <a:prstGeom prst="rect">
             <a:avLst/>
@@ -7465,13 +10043,49 @@
           <a:bodyPr wrap="square" lIns="0" tIns="0" rIns="0" bIns="0" rtlCol="0" anchor="ctr"/>
           <a:lstStyle/>
           <a:p>
+            <a:pPr algn="ctr" indent="0" marL="0">
+              <a:buNone/>
+            </a:pPr>
+            <a:r>
+              <a:rPr lang="en-US" sz="1300" b="1" dirty="0">
+                <a:solidFill>
+                  <a:schemeClr val="bg1"/>
+                </a:solidFill>
+              </a:rPr>
+              <a:t>Camada View</a:t>
+            </a:r>
+            <a:endParaRPr lang="en-US" sz="1300" dirty="0"/>
+          </a:p>
+        </p:txBody>
+      </p:sp>
+      <p:sp>
+        <p:nvSpPr>
+          <p:cNvPr id="5" name="texto-94"/>
+          <p:cNvSpPr txBox="1"/>
+          <p:nvPr/>
+        </p:nvSpPr>
+        <p:spPr>
+          <a:xfrm>
+            <a:off x="548640" y="1874520"/>
+            <a:ext cx="4572000" cy="320040"/>
+          </a:xfrm>
+          <a:prstGeom prst="rect">
+            <a:avLst/>
+          </a:prstGeom>
+          <a:noFill/>
+          <a:ln/>
+        </p:spPr>
+        <p:txBody>
+          <a:bodyPr wrap="square" lIns="0" tIns="0" rIns="0" bIns="0" rtlCol="0" anchor="ctr"/>
+          <a:lstStyle/>
+          <a:p>
             <a:pPr indent="0" marL="0">
               <a:buNone/>
             </a:pPr>
             <a:r>
               <a:rPr lang="en-US" sz="1800" b="1" dirty="0">
                 <a:solidFill>
-                  <a:schemeClr val="accent3"/>
+                  <a:schemeClr val="accent5"/>
                 </a:solidFill>
               </a:rPr>
               <a:t>O que é</a:t>
@@ -7482,14 +10096,14 @@
       </p:sp>
       <p:sp>
         <p:nvSpPr>
-          <p:cNvPr id="4" name="texto-74"/>
+          <p:cNvPr id="6" name="texto-95"/>
           <p:cNvSpPr txBox="1"/>
           <p:nvPr/>
         </p:nvSpPr>
         <p:spPr>
           <a:xfrm>
-            <a:off x="548640" y="1783080"/>
-            <a:ext cx="4754880" cy="1188720"/>
+            <a:off x="548640" y="2240280"/>
+            <a:ext cx="4572000" cy="1371600"/>
           </a:xfrm>
           <a:prstGeom prst="rect">
             <a:avLst/>
@@ -7505,27 +10119,27 @@
               <a:buNone/>
             </a:pPr>
             <a:r>
-              <a:rPr lang="en-US" sz="1600" dirty="0">
+              <a:rPr lang="en-US" sz="1500" dirty="0">
                 <a:solidFill>
                   <a:schemeClr val="tx1"/>
                 </a:solidFill>
               </a:rPr>
-              <a:t>FastAPI cria APIs REST em Python. Pydantic valida e converte os dados que entram e saem.</a:t>
-            </a:r>
-            <a:endParaRPr lang="en-US" sz="1600" dirty="0"/>
-          </a:p>
-        </p:txBody>
-      </p:sp>
-      <p:sp>
-        <p:nvSpPr>
-          <p:cNvPr id="5" name="texto-75"/>
+              <a:t>O React monta a interface com componentes: funções que devolvem um pedaço de tela. O TypeScript acrescenta tipos ao JavaScript e avisa dos erros antes de rodar.</a:t>
+            </a:r>
+            <a:endParaRPr lang="en-US" sz="1500" dirty="0"/>
+          </a:p>
+        </p:txBody>
+      </p:sp>
+      <p:sp>
+        <p:nvSpPr>
+          <p:cNvPr id="7" name="texto-96"/>
           <p:cNvSpPr txBox="1"/>
           <p:nvPr/>
         </p:nvSpPr>
         <p:spPr>
           <a:xfrm>
-            <a:off x="548640" y="3154680"/>
-            <a:ext cx="4754880" cy="320040"/>
+            <a:off x="548640" y="3429000"/>
+            <a:ext cx="4572000" cy="320040"/>
           </a:xfrm>
           <a:prstGeom prst="rect">
             <a:avLst/>
@@ -7543,7 +10157,7 @@
             <a:r>
               <a:rPr lang="en-US" sz="1800" b="1" dirty="0">
                 <a:solidFill>
-                  <a:schemeClr val="accent3"/>
+                  <a:schemeClr val="accent5"/>
                 </a:solidFill>
               </a:rPr>
               <a:t>Como usar</a:t>
@@ -7554,14 +10168,14 @@
       </p:sp>
       <p:sp>
         <p:nvSpPr>
-          <p:cNvPr id="6" name="texto-76"/>
+          <p:cNvPr id="8" name="texto-97"/>
           <p:cNvSpPr txBox="1"/>
           <p:nvPr/>
         </p:nvSpPr>
         <p:spPr>
           <a:xfrm>
-            <a:off x="548640" y="3566160"/>
-            <a:ext cx="4754880" cy="2194560"/>
+            <a:off x="548640" y="3794760"/>
+            <a:ext cx="4572000" cy="2468880"/>
           </a:xfrm>
           <a:prstGeom prst="rect">
             <a:avLst/>
@@ -7582,14 +10196,14 @@
               <a:buAutoNum type="arabicPeriod" startAt="1"/>
             </a:pPr>
             <a:r>
-              <a:rPr lang="en-US" sz="1600" dirty="0">
+              <a:rPr lang="en-US" sz="1500" dirty="0">
                 <a:solidFill>
                   <a:schemeClr val="tx1"/>
                 </a:solidFill>
               </a:rPr>
-              <a:t>Declarar a rota com o decorador</a:t>
-            </a:r>
-            <a:endParaRPr lang="en-US" sz="1600" dirty="0"/>
+              <a:t>Criar o projeto: npm create vite@latest oficina -- --template react-ts</a:t>
+            </a:r>
+            <a:endParaRPr lang="en-US" sz="1500" dirty="0"/>
           </a:p>
           <a:p>
             <a:pPr marL="342900" indent="-342900">
@@ -7601,14 +10215,14 @@
               <a:buAutoNum type="arabicPeriod" startAt="1"/>
             </a:pPr>
             <a:r>
-              <a:rPr lang="en-US" sz="1600" dirty="0">
+              <a:rPr lang="en-US" sz="1500" dirty="0">
                 <a:solidFill>
                   <a:schemeClr val="tx1"/>
                 </a:solidFill>
               </a:rPr>
-              <a:t>Receber um schema Pydantic no corpo</a:t>
-            </a:r>
-            <a:endParaRPr lang="en-US" sz="1600" dirty="0"/>
+              <a:t>Instalar: cd oficina &amp;&amp; npm install</a:t>
+            </a:r>
+            <a:endParaRPr lang="en-US" sz="1500" dirty="0"/>
           </a:p>
           <a:p>
             <a:pPr marL="342900" indent="-342900">
@@ -7620,14 +10234,14 @@
               <a:buAutoNum type="arabicPeriod" startAt="1"/>
             </a:pPr>
             <a:r>
-              <a:rPr lang="en-US" sz="1600" dirty="0">
+              <a:rPr lang="en-US" sz="1500" dirty="0">
                 <a:solidFill>
                   <a:schemeClr val="tx1"/>
                 </a:solidFill>
               </a:rPr>
-              <a:t>Injetar serviço e perfil com Depends</a:t>
-            </a:r>
-            <a:endParaRPr lang="en-US" sz="1600" dirty="0"/>
+              <a:t>Escrever o componente em src/Livros.tsx</a:t>
+            </a:r>
+            <a:endParaRPr lang="en-US" sz="1500" dirty="0"/>
           </a:p>
           <a:p>
             <a:pPr marL="342900" indent="-342900">
@@ -7639,31 +10253,31 @@
               <a:buAutoNum type="arabicPeriod" startAt="1"/>
             </a:pPr>
             <a:r>
-              <a:rPr lang="en-US" sz="1600" dirty="0">
+              <a:rPr lang="en-US" sz="1500" dirty="0">
                 <a:solidFill>
                   <a:schemeClr val="tx1"/>
                 </a:solidFill>
               </a:rPr>
-              <a:t>Abrir http://localhost:8000/docs</a:t>
-            </a:r>
-            <a:endParaRPr lang="en-US" sz="1600" dirty="0"/>
-          </a:p>
-        </p:txBody>
-      </p:sp>
-      <p:sp>
-        <p:nvSpPr>
-          <p:cNvPr id="7" name="painel-codigo-77"/>
+              <a:t>Rodar: npm run dev e abrir localhost:5173</a:t>
+            </a:r>
+            <a:endParaRPr lang="en-US" sz="1500" dirty="0"/>
+          </a:p>
+        </p:txBody>
+      </p:sp>
+      <p:sp>
+        <p:nvSpPr>
+          <p:cNvPr id="9" name="painel-codigo-98"/>
           <p:cNvSpPr/>
           <p:nvPr/>
         </p:nvSpPr>
         <p:spPr>
           <a:xfrm>
-            <a:off x="5577840" y="1371600"/>
-            <a:ext cx="6080760" cy="3127248"/>
+            <a:off x="5440680" y="1325880"/>
+            <a:ext cx="6217920" cy="4293108"/>
           </a:xfrm>
           <a:prstGeom prst="roundRect">
             <a:avLst>
-              <a:gd name="adj" fmla="val 2924"/>
+              <a:gd name="adj" fmla="val 2130"/>
             </a:avLst>
           </a:prstGeom>
           <a:solidFill>
@@ -7674,41 +10288,63 @@
       </p:sp>
       <p:sp>
         <p:nvSpPr>
-          <p:cNvPr id="8" name="texto-78"/>
+          <p:cNvPr id="10" name="texto-99"/>
           <p:cNvSpPr txBox="1"/>
           <p:nvPr/>
         </p:nvSpPr>
         <p:spPr>
           <a:xfrm>
-            <a:off x="5806440" y="1554480"/>
-            <a:ext cx="5623560" cy="2761488"/>
-          </a:xfrm>
-          <a:prstGeom prst="rect">
-            <a:avLst/>
-          </a:prstGeom>
-          <a:noFill/>
-          <a:ln/>
-        </p:spPr>
-        <p:txBody>
-          <a:bodyPr wrap="square" lIns="0" tIns="0" rIns="0" bIns="0" rtlCol="0" anchor="t"/>
-          <a:lstStyle/>
-          <a:p>
-            <a:pPr indent="0" marL="0">
-              <a:buNone/>
-            </a:pPr>
-            <a:r>
-              <a:rPr lang="en-US" sz="1300" dirty="0">
-                <a:solidFill>
-                  <a:schemeClr val="bg2"/>
+            <a:off x="5669280" y="1435608"/>
+            <a:ext cx="5760720" cy="274320"/>
+          </a:xfrm>
+          <a:prstGeom prst="rect">
+            <a:avLst/>
+          </a:prstGeom>
+          <a:noFill/>
+          <a:ln/>
+        </p:spPr>
+        <p:txBody>
+          <a:bodyPr wrap="square" lIns="0" tIns="0" rIns="0" bIns="0" rtlCol="0" anchor="ctr"/>
+          <a:lstStyle/>
+          <a:p>
+            <a:pPr indent="0" marL="0">
+              <a:buNone/>
+            </a:pPr>
+            <a:r>
+              <a:rPr lang="en-US" sz="1200" b="1" dirty="0">
+                <a:solidFill>
+                  <a:schemeClr val="accent2"/>
                 </a:solidFill>
                 <a:latin typeface="Courier New" pitchFamily="34" charset="0"/>
                 <a:ea typeface="Courier New" pitchFamily="34" charset="-122"/>
                 <a:cs typeface="Courier New" pitchFamily="34" charset="-120"/>
               </a:rPr>
-              <a:t>@router.post("/enviar", status_code=201,</a:t>
-            </a:r>
-            <a:endParaRPr lang="en-US" sz="1300" dirty="0"/>
-          </a:p>
+              <a:t>src/Livros.tsx</a:t>
+            </a:r>
+            <a:endParaRPr lang="en-US" sz="1200" dirty="0"/>
+          </a:p>
+        </p:txBody>
+      </p:sp>
+      <p:sp>
+        <p:nvSpPr>
+          <p:cNvPr id="11" name="texto-100"/>
+          <p:cNvSpPr txBox="1"/>
+          <p:nvPr/>
+        </p:nvSpPr>
+        <p:spPr>
+          <a:xfrm>
+            <a:off x="5669280" y="1783080"/>
+            <a:ext cx="5760720" cy="3744468"/>
+          </a:xfrm>
+          <a:prstGeom prst="rect">
+            <a:avLst/>
+          </a:prstGeom>
+          <a:noFill/>
+          <a:ln/>
+        </p:spPr>
+        <p:txBody>
+          <a:bodyPr wrap="square" lIns="0" tIns="0" rIns="0" bIns="0" rtlCol="0" anchor="t"/>
+          <a:lstStyle/>
           <a:p>
             <a:pPr indent="0" marL="0">
               <a:buNone/>
@@ -7722,8 +10358,14 @@
                 <a:ea typeface="Courier New" pitchFamily="34" charset="-122"/>
                 <a:cs typeface="Courier New" pitchFamily="34" charset="-120"/>
               </a:rPr>
-              <a:t>             response_model=EnvioMoedasRespostaSchema)</a:t>
-            </a:r>
+              <a:t>type Livro = { id: number; titulo: string };</a:t>
+            </a:r>
+            <a:endParaRPr lang="en-US" sz="1300" dirty="0"/>
+          </a:p>
+          <a:p>
+            <a:pPr indent="0" marL="0">
+              <a:buNone/>
+            </a:pPr>
             <a:endParaRPr lang="en-US" sz="1300" dirty="0"/>
           </a:p>
           <a:p>
@@ -7739,7 +10381,7 @@
                 <a:ea typeface="Courier New" pitchFamily="34" charset="-122"/>
                 <a:cs typeface="Courier New" pitchFamily="34" charset="-120"/>
               </a:rPr>
-              <a:t>def enviar_moedas(</a:t>
+              <a:t>export function Livros() {</a:t>
             </a:r>
             <a:endParaRPr lang="en-US" sz="1300" dirty="0"/>
           </a:p>
@@ -7756,8 +10398,14 @@
                 <a:ea typeface="Courier New" pitchFamily="34" charset="-122"/>
                 <a:cs typeface="Courier New" pitchFamily="34" charset="-120"/>
               </a:rPr>
-              <a:t>    dados: EnvioMoedasCriarSchema,</a:t>
-            </a:r>
+              <a:t>  const [livros, setLivros] = useState&lt;Livro[]&gt;([]);</a:t>
+            </a:r>
+            <a:endParaRPr lang="en-US" sz="1300" dirty="0"/>
+          </a:p>
+          <a:p>
+            <a:pPr indent="0" marL="0">
+              <a:buNone/>
+            </a:pPr>
             <a:endParaRPr lang="en-US" sz="1300" dirty="0"/>
           </a:p>
           <a:p>
@@ -7773,7 +10421,7 @@
                 <a:ea typeface="Courier New" pitchFamily="34" charset="-122"/>
                 <a:cs typeface="Courier New" pitchFamily="34" charset="-120"/>
               </a:rPr>
-              <a:t>    professor: Usuario = Depends(</a:t>
+              <a:t>  useEffect(() =&gt; {</a:t>
             </a:r>
             <a:endParaRPr lang="en-US" sz="1300" dirty="0"/>
           </a:p>
@@ -7790,7 +10438,7 @@
                 <a:ea typeface="Courier New" pitchFamily="34" charset="-122"/>
                 <a:cs typeface="Courier New" pitchFamily="34" charset="-120"/>
               </a:rPr>
-              <a:t>        exigir_perfil(TipoUsuario.PROFESSOR)),</a:t>
+              <a:t>    fetch("/api/livros")</a:t>
             </a:r>
             <a:endParaRPr lang="en-US" sz="1300" dirty="0"/>
           </a:p>
@@ -7807,7 +10455,7 @@
                 <a:ea typeface="Courier New" pitchFamily="34" charset="-122"/>
                 <a:cs typeface="Courier New" pitchFamily="34" charset="-120"/>
               </a:rPr>
-              <a:t>    servico: ServicoMoedas = Depends(</a:t>
+              <a:t>      .then((r) =&gt; r.json())</a:t>
             </a:r>
             <a:endParaRPr lang="en-US" sz="1300" dirty="0"/>
           </a:p>
@@ -7824,7 +10472,7 @@
                 <a:ea typeface="Courier New" pitchFamily="34" charset="-122"/>
                 <a:cs typeface="Courier New" pitchFamily="34" charset="-120"/>
               </a:rPr>
-              <a:t>        obter_servico_moedas),</a:t>
+              <a:t>      .then(setLivros);</a:t>
             </a:r>
             <a:endParaRPr lang="en-US" sz="1300" dirty="0"/>
           </a:p>
@@ -7841,8 +10489,14 @@
                 <a:ea typeface="Courier New" pitchFamily="34" charset="-122"/>
                 <a:cs typeface="Courier New" pitchFamily="34" charset="-120"/>
               </a:rPr>
-              <a:t>):</a:t>
-            </a:r>
+              <a:t>  }, []);</a:t>
+            </a:r>
+            <a:endParaRPr lang="en-US" sz="1300" dirty="0"/>
+          </a:p>
+          <a:p>
+            <a:pPr indent="0" marL="0">
+              <a:buNone/>
+            </a:pPr>
             <a:endParaRPr lang="en-US" sz="1300" dirty="0"/>
           </a:p>
           <a:p>
@@ -7858,7 +10512,7 @@
                 <a:ea typeface="Courier New" pitchFamily="34" charset="-122"/>
                 <a:cs typeface="Courier New" pitchFamily="34" charset="-120"/>
               </a:rPr>
-              <a:t>    envio = servico.enviar_moedas(</a:t>
+              <a:t>  return (</a:t>
             </a:r>
             <a:endParaRPr lang="en-US" sz="1300" dirty="0"/>
           </a:p>
@@ -7875,7 +10529,7 @@
                 <a:ea typeface="Courier New" pitchFamily="34" charset="-122"/>
                 <a:cs typeface="Courier New" pitchFamily="34" charset="-120"/>
               </a:rPr>
-              <a:t>        professor.id_usuario, dados.model_dump())</a:t>
+              <a:t>    &lt;ul&gt;</a:t>
             </a:r>
             <a:endParaRPr lang="en-US" sz="1300" dirty="0"/>
           </a:p>
@@ -7892,45 +10546,60 @@
                 <a:ea typeface="Courier New" pitchFamily="34" charset="-122"/>
                 <a:cs typeface="Courier New" pitchFamily="34" charset="-120"/>
               </a:rPr>
-              <a:t>    return EnvioMoedasRespostaSchema(...)</a:t>
+              <a:t>      {livros.map((l) =&gt; &lt;li key={l.id}&gt;{l.titulo}&lt;/li&gt;)}</a:t>
             </a:r>
             <a:endParaRPr lang="en-US" sz="1300" dirty="0"/>
           </a:p>
-        </p:txBody>
-      </p:sp>
-      <p:sp>
-        <p:nvSpPr>
-          <p:cNvPr id="9" name="texto-79"/>
-          <p:cNvSpPr txBox="1"/>
-          <p:nvPr/>
-        </p:nvSpPr>
-        <p:spPr>
-          <a:xfrm>
-            <a:off x="5577840" y="4572000"/>
-            <a:ext cx="6080760" cy="274320"/>
-          </a:xfrm>
-          <a:prstGeom prst="rect">
-            <a:avLst/>
-          </a:prstGeom>
-          <a:noFill/>
-          <a:ln/>
-        </p:spPr>
-        <p:txBody>
-          <a:bodyPr wrap="square" lIns="0" tIns="0" rIns="0" bIns="0" rtlCol="0" anchor="ctr"/>
-          <a:lstStyle/>
-          <a:p>
-            <a:pPr indent="0" marL="0">
-              <a:buNone/>
-            </a:pPr>
-            <a:r>
-              <a:rPr lang="en-US" sz="1100" i="1" dirty="0">
-                <a:solidFill>
-                  <a:schemeClr val="accent6"/>
-                </a:solidFill>
-              </a:rPr>
-              <a:t>src/back/app/controller/rotas/moedas.py (trecho resumido e reformatado)</a:t>
-            </a:r>
-            <a:endParaRPr lang="en-US" sz="1100" dirty="0"/>
+          <a:p>
+            <a:pPr indent="0" marL="0">
+              <a:buNone/>
+            </a:pPr>
+            <a:r>
+              <a:rPr lang="en-US" sz="1300" dirty="0">
+                <a:solidFill>
+                  <a:schemeClr val="bg2"/>
+                </a:solidFill>
+                <a:latin typeface="Courier New" pitchFamily="34" charset="0"/>
+                <a:ea typeface="Courier New" pitchFamily="34" charset="-122"/>
+                <a:cs typeface="Courier New" pitchFamily="34" charset="-120"/>
+              </a:rPr>
+              <a:t>    &lt;/ul&gt;</a:t>
+            </a:r>
+            <a:endParaRPr lang="en-US" sz="1300" dirty="0"/>
+          </a:p>
+          <a:p>
+            <a:pPr indent="0" marL="0">
+              <a:buNone/>
+            </a:pPr>
+            <a:r>
+              <a:rPr lang="en-US" sz="1300" dirty="0">
+                <a:solidFill>
+                  <a:schemeClr val="bg2"/>
+                </a:solidFill>
+                <a:latin typeface="Courier New" pitchFamily="34" charset="0"/>
+                <a:ea typeface="Courier New" pitchFamily="34" charset="-122"/>
+                <a:cs typeface="Courier New" pitchFamily="34" charset="-120"/>
+              </a:rPr>
+              <a:t>  );</a:t>
+            </a:r>
+            <a:endParaRPr lang="en-US" sz="1300" dirty="0"/>
+          </a:p>
+          <a:p>
+            <a:pPr indent="0" marL="0">
+              <a:buNone/>
+            </a:pPr>
+            <a:r>
+              <a:rPr lang="en-US" sz="1300" dirty="0">
+                <a:solidFill>
+                  <a:schemeClr val="bg2"/>
+                </a:solidFill>
+                <a:latin typeface="Courier New" pitchFamily="34" charset="0"/>
+                <a:ea typeface="Courier New" pitchFamily="34" charset="-122"/>
+                <a:cs typeface="Courier New" pitchFamily="34" charset="-120"/>
+              </a:rPr>
+              <a:t>}</a:t>
+            </a:r>
+            <a:endParaRPr lang="en-US" sz="1300" dirty="0"/>
           </a:p>
         </p:txBody>
       </p:sp>
@@ -8036,7 +10705,7 @@
                   <a:schemeClr val="tx1"/>
                 </a:solidFill>
               </a:rPr>
-              <a:t>Oficina 3: SQLAlchemy, PostgreSQL e Alembic</a:t>
+              <a:t>Tailwind CSS: estilo por classes</a:t>
             </a:r>
             <a:endParaRPr lang="en-US" sz="3200" dirty="0"/>
           </a:p>
@@ -8044,14 +10713,36 @@
       </p:sp>
       <p:sp>
         <p:nvSpPr>
-          <p:cNvPr id="3" name="texto-80"/>
+          <p:cNvPr id="3" name="etiqueta-101"/>
+          <p:cNvSpPr/>
+          <p:nvPr/>
+        </p:nvSpPr>
+        <p:spPr>
+          <a:xfrm>
+            <a:off x="548640" y="1325880"/>
+            <a:ext cx="2286000" cy="347472"/>
+          </a:xfrm>
+          <a:prstGeom prst="roundRect">
+            <a:avLst>
+              <a:gd name="adj" fmla="val 50000"/>
+            </a:avLst>
+          </a:prstGeom>
+          <a:solidFill>
+            <a:schemeClr val="accent5"/>
+          </a:solidFill>
+          <a:ln/>
+        </p:spPr>
+      </p:sp>
+      <p:sp>
+        <p:nvSpPr>
+          <p:cNvPr id="4" name="texto-102"/>
           <p:cNvSpPr txBox="1"/>
           <p:nvPr/>
         </p:nvSpPr>
         <p:spPr>
           <a:xfrm>
-            <a:off x="548640" y="1371600"/>
-            <a:ext cx="4754880" cy="320040"/>
+            <a:off x="548640" y="1325880"/>
+            <a:ext cx="2286000" cy="347472"/>
           </a:xfrm>
           <a:prstGeom prst="rect">
             <a:avLst/>
@@ -8063,13 +10754,49 @@
           <a:bodyPr wrap="square" lIns="0" tIns="0" rIns="0" bIns="0" rtlCol="0" anchor="ctr"/>
           <a:lstStyle/>
           <a:p>
+            <a:pPr algn="ctr" indent="0" marL="0">
+              <a:buNone/>
+            </a:pPr>
+            <a:r>
+              <a:rPr lang="en-US" sz="1300" b="1" dirty="0">
+                <a:solidFill>
+                  <a:schemeClr val="bg1"/>
+                </a:solidFill>
+              </a:rPr>
+              <a:t>Camada View</a:t>
+            </a:r>
+            <a:endParaRPr lang="en-US" sz="1300" dirty="0"/>
+          </a:p>
+        </p:txBody>
+      </p:sp>
+      <p:sp>
+        <p:nvSpPr>
+          <p:cNvPr id="5" name="texto-103"/>
+          <p:cNvSpPr txBox="1"/>
+          <p:nvPr/>
+        </p:nvSpPr>
+        <p:spPr>
+          <a:xfrm>
+            <a:off x="548640" y="1874520"/>
+            <a:ext cx="4572000" cy="320040"/>
+          </a:xfrm>
+          <a:prstGeom prst="rect">
+            <a:avLst/>
+          </a:prstGeom>
+          <a:noFill/>
+          <a:ln/>
+        </p:spPr>
+        <p:txBody>
+          <a:bodyPr wrap="square" lIns="0" tIns="0" rIns="0" bIns="0" rtlCol="0" anchor="ctr"/>
+          <a:lstStyle/>
+          <a:p>
             <a:pPr indent="0" marL="0">
               <a:buNone/>
             </a:pPr>
             <a:r>
               <a:rPr lang="en-US" sz="1800" b="1" dirty="0">
                 <a:solidFill>
-                  <a:schemeClr val="accent1"/>
+                  <a:schemeClr val="accent5"/>
                 </a:solidFill>
               </a:rPr>
               <a:t>O que é</a:t>
@@ -8080,14 +10807,14 @@
       </p:sp>
       <p:sp>
         <p:nvSpPr>
-          <p:cNvPr id="4" name="texto-81"/>
+          <p:cNvPr id="6" name="texto-104"/>
           <p:cNvSpPr txBox="1"/>
           <p:nvPr/>
         </p:nvSpPr>
         <p:spPr>
           <a:xfrm>
-            <a:off x="548640" y="1783080"/>
-            <a:ext cx="4754880" cy="1188720"/>
+            <a:off x="548640" y="2240280"/>
+            <a:ext cx="4572000" cy="1371600"/>
           </a:xfrm>
           <a:prstGeom prst="rect">
             <a:avLst/>
@@ -8103,27 +10830,27 @@
               <a:buNone/>
             </a:pPr>
             <a:r>
-              <a:rPr lang="en-US" sz="1600" dirty="0">
+              <a:rPr lang="en-US" sz="1500" dirty="0">
                 <a:solidFill>
                   <a:schemeClr val="tx1"/>
                 </a:solidFill>
               </a:rPr>
-              <a:t>O ORM SQLAlchemy mapeia classes em tabelas do PostgreSQL. O Alembic versiona o esquema em migrações.</a:t>
-            </a:r>
-            <a:endParaRPr lang="en-US" sz="1600" dirty="0"/>
-          </a:p>
-        </p:txBody>
-      </p:sp>
-      <p:sp>
-        <p:nvSpPr>
-          <p:cNvPr id="5" name="texto-82"/>
+              <a:t>O Tailwind é um CSS por utilitários: cada classe faz uma coisa pequena e você combina várias direto no elemento, sem escrever um arquivo de CSS à parte.</a:t>
+            </a:r>
+            <a:endParaRPr lang="en-US" sz="1500" dirty="0"/>
+          </a:p>
+        </p:txBody>
+      </p:sp>
+      <p:sp>
+        <p:nvSpPr>
+          <p:cNvPr id="7" name="texto-105"/>
           <p:cNvSpPr txBox="1"/>
           <p:nvPr/>
         </p:nvSpPr>
         <p:spPr>
           <a:xfrm>
-            <a:off x="548640" y="3154680"/>
-            <a:ext cx="4754880" cy="320040"/>
+            <a:off x="548640" y="3429000"/>
+            <a:ext cx="4572000" cy="320040"/>
           </a:xfrm>
           <a:prstGeom prst="rect">
             <a:avLst/>
@@ -8141,7 +10868,7 @@
             <a:r>
               <a:rPr lang="en-US" sz="1800" b="1" dirty="0">
                 <a:solidFill>
-                  <a:schemeClr val="accent1"/>
+                  <a:schemeClr val="accent5"/>
                 </a:solidFill>
               </a:rPr>
               <a:t>Como usar</a:t>
@@ -8152,14 +10879,14 @@
       </p:sp>
       <p:sp>
         <p:nvSpPr>
-          <p:cNvPr id="6" name="texto-83"/>
+          <p:cNvPr id="8" name="texto-106"/>
           <p:cNvSpPr txBox="1"/>
           <p:nvPr/>
         </p:nvSpPr>
         <p:spPr>
           <a:xfrm>
-            <a:off x="548640" y="3566160"/>
-            <a:ext cx="4754880" cy="2194560"/>
+            <a:off x="548640" y="3794760"/>
+            <a:ext cx="4572000" cy="2468880"/>
           </a:xfrm>
           <a:prstGeom prst="rect">
             <a:avLst/>
@@ -8180,14 +10907,14 @@
               <a:buAutoNum type="arabicPeriod" startAt="1"/>
             </a:pPr>
             <a:r>
-              <a:rPr lang="en-US" sz="1600" dirty="0">
+              <a:rPr lang="en-US" sz="1500" dirty="0">
                 <a:solidFill>
                   <a:schemeClr val="tx1"/>
                 </a:solidFill>
               </a:rPr>
-              <a:t>Declarar a entidade com mapped_column</a:t>
-            </a:r>
-            <a:endParaRPr lang="en-US" sz="1600" dirty="0"/>
+              <a:t>Instalar: npm install tailwindcss @tailwindcss/vite</a:t>
+            </a:r>
+            <a:endParaRPr lang="en-US" sz="1500" dirty="0"/>
           </a:p>
           <a:p>
             <a:pPr marL="342900" indent="-342900">
@@ -8199,14 +10926,14 @@
               <a:buAutoNum type="arabicPeriod" startAt="1"/>
             </a:pPr>
             <a:r>
-              <a:rPr lang="en-US" sz="1600" dirty="0">
+              <a:rPr lang="en-US" sz="1500" dirty="0">
                 <a:solidFill>
                   <a:schemeClr val="tx1"/>
                 </a:solidFill>
               </a:rPr>
-              <a:t>Esconder o banco atrás de uma interface (Repository)</a:t>
-            </a:r>
-            <a:endParaRPr lang="en-US" sz="1600" dirty="0"/>
+              <a:t>Registrar o plugin no vite.config.ts</a:t>
+            </a:r>
+            <a:endParaRPr lang="en-US" sz="1500" dirty="0"/>
           </a:p>
           <a:p>
             <a:pPr marL="342900" indent="-342900">
@@ -8218,14 +10945,14 @@
               <a:buAutoNum type="arabicPeriod" startAt="1"/>
             </a:pPr>
             <a:r>
-              <a:rPr lang="en-US" sz="1600" dirty="0">
+              <a:rPr lang="en-US" sz="1500" dirty="0">
                 <a:solidFill>
                   <a:schemeClr val="tx1"/>
                 </a:solidFill>
               </a:rPr>
-              <a:t>Criar as tabelas: alembic upgrade head</a:t>
-            </a:r>
-            <a:endParaRPr lang="en-US" sz="1600" dirty="0"/>
+              <a:t>Importar no CSS principal: @import "tailwindcss";</a:t>
+            </a:r>
+            <a:endParaRPr lang="en-US" sz="1500" dirty="0"/>
           </a:p>
           <a:p>
             <a:pPr marL="342900" indent="-342900">
@@ -8237,31 +10964,31 @@
               <a:buAutoNum type="arabicPeriod" startAt="1"/>
             </a:pPr>
             <a:r>
-              <a:rPr lang="en-US" sz="1600" dirty="0">
+              <a:rPr lang="en-US" sz="1500" dirty="0">
                 <a:solidFill>
                   <a:schemeClr val="tx1"/>
                 </a:solidFill>
               </a:rPr>
-              <a:t>Travar o saldo: with_for_update()</a:t>
-            </a:r>
-            <a:endParaRPr lang="en-US" sz="1600" dirty="0"/>
-          </a:p>
-        </p:txBody>
-      </p:sp>
-      <p:sp>
-        <p:nvSpPr>
-          <p:cNvPr id="7" name="painel-codigo-84"/>
+              <a:t>Combinar classes no className: px-4 (espaço lateral), bg-indigo-600 (fundo), hover: (ao passar o mouse)</a:t>
+            </a:r>
+            <a:endParaRPr lang="en-US" sz="1500" dirty="0"/>
+          </a:p>
+        </p:txBody>
+      </p:sp>
+      <p:sp>
+        <p:nvSpPr>
+          <p:cNvPr id="9" name="painel-codigo-107"/>
           <p:cNvSpPr/>
           <p:nvPr/>
         </p:nvSpPr>
         <p:spPr>
           <a:xfrm>
-            <a:off x="5577840" y="1371600"/>
-            <a:ext cx="6080760" cy="3986784"/>
+            <a:off x="5440680" y="1325880"/>
+            <a:ext cx="6217920" cy="1714500"/>
           </a:xfrm>
           <a:prstGeom prst="roundRect">
             <a:avLst>
-              <a:gd name="adj" fmla="val 2294"/>
+              <a:gd name="adj" fmla="val 5333"/>
             </a:avLst>
           </a:prstGeom>
           <a:solidFill>
@@ -8272,41 +10999,63 @@
       </p:sp>
       <p:sp>
         <p:nvSpPr>
-          <p:cNvPr id="8" name="texto-85"/>
+          <p:cNvPr id="10" name="texto-108"/>
           <p:cNvSpPr txBox="1"/>
           <p:nvPr/>
         </p:nvSpPr>
         <p:spPr>
           <a:xfrm>
-            <a:off x="5806440" y="1554480"/>
-            <a:ext cx="5623560" cy="3621024"/>
-          </a:xfrm>
-          <a:prstGeom prst="rect">
-            <a:avLst/>
-          </a:prstGeom>
-          <a:noFill/>
-          <a:ln/>
-        </p:spPr>
-        <p:txBody>
-          <a:bodyPr wrap="square" lIns="0" tIns="0" rIns="0" bIns="0" rtlCol="0" anchor="t"/>
-          <a:lstStyle/>
-          <a:p>
-            <a:pPr indent="0" marL="0">
-              <a:buNone/>
-            </a:pPr>
-            <a:r>
-              <a:rPr lang="en-US" sz="1300" dirty="0">
-                <a:solidFill>
-                  <a:schemeClr val="bg2"/>
+            <a:off x="5669280" y="1435608"/>
+            <a:ext cx="5760720" cy="274320"/>
+          </a:xfrm>
+          <a:prstGeom prst="rect">
+            <a:avLst/>
+          </a:prstGeom>
+          <a:noFill/>
+          <a:ln/>
+        </p:spPr>
+        <p:txBody>
+          <a:bodyPr wrap="square" lIns="0" tIns="0" rIns="0" bIns="0" rtlCol="0" anchor="ctr"/>
+          <a:lstStyle/>
+          <a:p>
+            <a:pPr indent="0" marL="0">
+              <a:buNone/>
+            </a:pPr>
+            <a:r>
+              <a:rPr lang="en-US" sz="1200" b="1" dirty="0">
+                <a:solidFill>
+                  <a:schemeClr val="accent2"/>
                 </a:solidFill>
                 <a:latin typeface="Courier New" pitchFamily="34" charset="0"/>
                 <a:ea typeface="Courier New" pitchFamily="34" charset="-122"/>
                 <a:cs typeface="Courier New" pitchFamily="34" charset="-120"/>
               </a:rPr>
-              <a:t>class IRepositorioConta(ABC):</a:t>
-            </a:r>
-            <a:endParaRPr lang="en-US" sz="1300" dirty="0"/>
-          </a:p>
+              <a:t>vite.config.ts</a:t>
+            </a:r>
+            <a:endParaRPr lang="en-US" sz="1200" dirty="0"/>
+          </a:p>
+        </p:txBody>
+      </p:sp>
+      <p:sp>
+        <p:nvSpPr>
+          <p:cNvPr id="11" name="texto-109"/>
+          <p:cNvSpPr txBox="1"/>
+          <p:nvPr/>
+        </p:nvSpPr>
+        <p:spPr>
+          <a:xfrm>
+            <a:off x="5669280" y="1783080"/>
+            <a:ext cx="5760720" cy="1165860"/>
+          </a:xfrm>
+          <a:prstGeom prst="rect">
+            <a:avLst/>
+          </a:prstGeom>
+          <a:noFill/>
+          <a:ln/>
+        </p:spPr>
+        <p:txBody>
+          <a:bodyPr wrap="square" lIns="0" tIns="0" rIns="0" bIns="0" rtlCol="0" anchor="t"/>
+          <a:lstStyle/>
           <a:p>
             <a:pPr indent="0" marL="0">
               <a:buNone/>
@@ -8320,8 +11069,14 @@
                 <a:ea typeface="Courier New" pitchFamily="34" charset="-122"/>
                 <a:cs typeface="Courier New" pitchFamily="34" charset="-120"/>
               </a:rPr>
-              <a:t>    @abstractmethod</a:t>
-            </a:r>
+              <a:t>import tailwindcss from "@tailwindcss/vite";</a:t>
+            </a:r>
+            <a:endParaRPr lang="en-US" sz="1300" dirty="0"/>
+          </a:p>
+          <a:p>
+            <a:pPr indent="0" marL="0">
+              <a:buNone/>
+            </a:pPr>
             <a:endParaRPr lang="en-US" sz="1300" dirty="0"/>
           </a:p>
           <a:p>
@@ -8337,7 +11092,7 @@
                 <a:ea typeface="Courier New" pitchFamily="34" charset="-122"/>
                 <a:cs typeface="Courier New" pitchFamily="34" charset="-120"/>
               </a:rPr>
-              <a:t>    def buscar_por_usuario(</a:t>
+              <a:t>export default defineConfig({</a:t>
             </a:r>
             <a:endParaRPr lang="en-US" sz="1300" dirty="0"/>
           </a:p>
@@ -8354,7 +11109,7 @@
                 <a:ea typeface="Courier New" pitchFamily="34" charset="-122"/>
                 <a:cs typeface="Courier New" pitchFamily="34" charset="-120"/>
               </a:rPr>
-              <a:t>        self, id_usuario: int,</a:t>
+              <a:t>  plugins: [react(), tailwindcss()],</a:t>
             </a:r>
             <a:endParaRPr lang="en-US" sz="1300" dirty="0"/>
           </a:p>
@@ -8371,33 +11126,93 @@
                 <a:ea typeface="Courier New" pitchFamily="34" charset="-122"/>
                 <a:cs typeface="Courier New" pitchFamily="34" charset="-120"/>
               </a:rPr>
-              <a:t>        para_atualizar: bool = False,</a:t>
+              <a:t>});</a:t>
             </a:r>
             <a:endParaRPr lang="en-US" sz="1300" dirty="0"/>
           </a:p>
-          <a:p>
-            <a:pPr indent="0" marL="0">
-              <a:buNone/>
-            </a:pPr>
-            <a:r>
-              <a:rPr lang="en-US" sz="1300" dirty="0">
-                <a:solidFill>
-                  <a:schemeClr val="bg2"/>
+        </p:txBody>
+      </p:sp>
+      <p:sp>
+        <p:nvSpPr>
+          <p:cNvPr id="12" name="painel-codigo-110"/>
+          <p:cNvSpPr/>
+          <p:nvPr/>
+        </p:nvSpPr>
+        <p:spPr>
+          <a:xfrm>
+            <a:off x="5440680" y="3177540"/>
+            <a:ext cx="6217920" cy="854964"/>
+          </a:xfrm>
+          <a:prstGeom prst="roundRect">
+            <a:avLst>
+              <a:gd name="adj" fmla="val 10695"/>
+            </a:avLst>
+          </a:prstGeom>
+          <a:solidFill>
+            <a:schemeClr val="tx1"/>
+          </a:solidFill>
+          <a:ln/>
+        </p:spPr>
+      </p:sp>
+      <p:sp>
+        <p:nvSpPr>
+          <p:cNvPr id="13" name="texto-111"/>
+          <p:cNvSpPr txBox="1"/>
+          <p:nvPr/>
+        </p:nvSpPr>
+        <p:spPr>
+          <a:xfrm>
+            <a:off x="5669280" y="3287268"/>
+            <a:ext cx="5760720" cy="274320"/>
+          </a:xfrm>
+          <a:prstGeom prst="rect">
+            <a:avLst/>
+          </a:prstGeom>
+          <a:noFill/>
+          <a:ln/>
+        </p:spPr>
+        <p:txBody>
+          <a:bodyPr wrap="square" lIns="0" tIns="0" rIns="0" bIns="0" rtlCol="0" anchor="ctr"/>
+          <a:lstStyle/>
+          <a:p>
+            <a:pPr indent="0" marL="0">
+              <a:buNone/>
+            </a:pPr>
+            <a:r>
+              <a:rPr lang="en-US" sz="1200" b="1" dirty="0">
+                <a:solidFill>
+                  <a:schemeClr val="accent2"/>
                 </a:solidFill>
                 <a:latin typeface="Courier New" pitchFamily="34" charset="0"/>
                 <a:ea typeface="Courier New" pitchFamily="34" charset="-122"/>
                 <a:cs typeface="Courier New" pitchFamily="34" charset="-120"/>
               </a:rPr>
-              <a:t>    ) -&gt; Conta | None: ...</a:t>
-            </a:r>
-            <a:endParaRPr lang="en-US" sz="1300" dirty="0"/>
-          </a:p>
-          <a:p>
-            <a:pPr indent="0" marL="0">
-              <a:buNone/>
-            </a:pPr>
-            <a:endParaRPr lang="en-US" sz="1300" dirty="0"/>
-          </a:p>
+              <a:t>src/index.css</a:t>
+            </a:r>
+            <a:endParaRPr lang="en-US" sz="1200" dirty="0"/>
+          </a:p>
+        </p:txBody>
+      </p:sp>
+      <p:sp>
+        <p:nvSpPr>
+          <p:cNvPr id="14" name="texto-112"/>
+          <p:cNvSpPr txBox="1"/>
+          <p:nvPr/>
+        </p:nvSpPr>
+        <p:spPr>
+          <a:xfrm>
+            <a:off x="5669280" y="3634740"/>
+            <a:ext cx="5760720" cy="306324"/>
+          </a:xfrm>
+          <a:prstGeom prst="rect">
+            <a:avLst/>
+          </a:prstGeom>
+          <a:noFill/>
+          <a:ln/>
+        </p:spPr>
+        <p:txBody>
+          <a:bodyPr wrap="square" lIns="0" tIns="0" rIns="0" bIns="0" rtlCol="0" anchor="t"/>
+          <a:lstStyle/>
           <a:p>
             <a:pPr indent="0" marL="0">
               <a:buNone/>
@@ -8411,27 +11226,93 @@
                 <a:ea typeface="Courier New" pitchFamily="34" charset="-122"/>
                 <a:cs typeface="Courier New" pitchFamily="34" charset="-120"/>
               </a:rPr>
-              <a:t>class RepositorioConta(IRepositorioConta):</a:t>
+              <a:t>@import "tailwindcss";</a:t>
             </a:r>
             <a:endParaRPr lang="en-US" sz="1300" dirty="0"/>
           </a:p>
-          <a:p>
-            <a:pPr indent="0" marL="0">
-              <a:buNone/>
-            </a:pPr>
-            <a:r>
-              <a:rPr lang="en-US" sz="1300" dirty="0">
-                <a:solidFill>
-                  <a:schemeClr val="bg2"/>
+        </p:txBody>
+      </p:sp>
+      <p:sp>
+        <p:nvSpPr>
+          <p:cNvPr id="15" name="painel-codigo-113"/>
+          <p:cNvSpPr/>
+          <p:nvPr/>
+        </p:nvSpPr>
+        <p:spPr>
+          <a:xfrm>
+            <a:off x="5440680" y="4169664"/>
+            <a:ext cx="6217920" cy="1929384"/>
+          </a:xfrm>
+          <a:prstGeom prst="roundRect">
+            <a:avLst>
+              <a:gd name="adj" fmla="val 4739"/>
+            </a:avLst>
+          </a:prstGeom>
+          <a:solidFill>
+            <a:schemeClr val="tx1"/>
+          </a:solidFill>
+          <a:ln/>
+        </p:spPr>
+      </p:sp>
+      <p:sp>
+        <p:nvSpPr>
+          <p:cNvPr id="16" name="texto-114"/>
+          <p:cNvSpPr txBox="1"/>
+          <p:nvPr/>
+        </p:nvSpPr>
+        <p:spPr>
+          <a:xfrm>
+            <a:off x="5669280" y="4279392"/>
+            <a:ext cx="5760720" cy="274320"/>
+          </a:xfrm>
+          <a:prstGeom prst="rect">
+            <a:avLst/>
+          </a:prstGeom>
+          <a:noFill/>
+          <a:ln/>
+        </p:spPr>
+        <p:txBody>
+          <a:bodyPr wrap="square" lIns="0" tIns="0" rIns="0" bIns="0" rtlCol="0" anchor="ctr"/>
+          <a:lstStyle/>
+          <a:p>
+            <a:pPr indent="0" marL="0">
+              <a:buNone/>
+            </a:pPr>
+            <a:r>
+              <a:rPr lang="en-US" sz="1200" b="1" dirty="0">
+                <a:solidFill>
+                  <a:schemeClr val="accent2"/>
                 </a:solidFill>
                 <a:latin typeface="Courier New" pitchFamily="34" charset="0"/>
                 <a:ea typeface="Courier New" pitchFamily="34" charset="-122"/>
                 <a:cs typeface="Courier New" pitchFamily="34" charset="-120"/>
               </a:rPr>
-              <a:t>    def buscar_por_usuario(</a:t>
-            </a:r>
-            <a:endParaRPr lang="en-US" sz="1300" dirty="0"/>
-          </a:p>
+              <a:t>src/Botao.tsx</a:t>
+            </a:r>
+            <a:endParaRPr lang="en-US" sz="1200" dirty="0"/>
+          </a:p>
+        </p:txBody>
+      </p:sp>
+      <p:sp>
+        <p:nvSpPr>
+          <p:cNvPr id="17" name="texto-115"/>
+          <p:cNvSpPr txBox="1"/>
+          <p:nvPr/>
+        </p:nvSpPr>
+        <p:spPr>
+          <a:xfrm>
+            <a:off x="5669280" y="4626864"/>
+            <a:ext cx="5760720" cy="1380744"/>
+          </a:xfrm>
+          <a:prstGeom prst="rect">
+            <a:avLst/>
+          </a:prstGeom>
+          <a:noFill/>
+          <a:ln/>
+        </p:spPr>
+        <p:txBody>
+          <a:bodyPr wrap="square" lIns="0" tIns="0" rIns="0" bIns="0" rtlCol="0" anchor="t"/>
+          <a:lstStyle/>
           <a:p>
             <a:pPr indent="0" marL="0">
               <a:buNone/>
@@ -8445,7 +11326,7 @@
                 <a:ea typeface="Courier New" pitchFamily="34" charset="-122"/>
                 <a:cs typeface="Courier New" pitchFamily="34" charset="-120"/>
               </a:rPr>
-              <a:t>        self, id_usuario, para_atualizar=False):</a:t>
+              <a:t>&lt;button</a:t>
             </a:r>
             <a:endParaRPr lang="en-US" sz="1300" dirty="0"/>
           </a:p>
@@ -8462,7 +11343,7 @@
                 <a:ea typeface="Courier New" pitchFamily="34" charset="-122"/>
                 <a:cs typeface="Courier New" pitchFamily="34" charset="-120"/>
               </a:rPr>
-              <a:t>        consulta = select(Conta).where(</a:t>
+              <a:t>  className="rounded-lg bg-indigo-600 px-4 py-2</a:t>
             </a:r>
             <a:endParaRPr lang="en-US" sz="1300" dirty="0"/>
           </a:p>
@@ -8479,7 +11360,7 @@
                 <a:ea typeface="Courier New" pitchFamily="34" charset="-122"/>
                 <a:cs typeface="Courier New" pitchFamily="34" charset="-120"/>
               </a:rPr>
-              <a:t>            Conta.id_usuario == id_usuario)</a:t>
+              <a:t>             text-white hover:bg-indigo-700"</a:t>
             </a:r>
             <a:endParaRPr lang="en-US" sz="1300" dirty="0"/>
           </a:p>
@@ -8496,7 +11377,7 @@
                 <a:ea typeface="Courier New" pitchFamily="34" charset="-122"/>
                 <a:cs typeface="Courier New" pitchFamily="34" charset="-120"/>
               </a:rPr>
-              <a:t>        if para_atualizar:</a:t>
+              <a:t>&gt;</a:t>
             </a:r>
             <a:endParaRPr lang="en-US" sz="1300" dirty="0"/>
           </a:p>
@@ -8513,7 +11394,7 @@
                 <a:ea typeface="Courier New" pitchFamily="34" charset="-122"/>
                 <a:cs typeface="Courier New" pitchFamily="34" charset="-120"/>
               </a:rPr>
-              <a:t>            consulta = consulta.with_for_update()</a:t>
+              <a:t>  Salvar</a:t>
             </a:r>
             <a:endParaRPr lang="en-US" sz="1300" dirty="0"/>
           </a:p>
@@ -8530,62 +11411,9 @@
                 <a:ea typeface="Courier New" pitchFamily="34" charset="-122"/>
                 <a:cs typeface="Courier New" pitchFamily="34" charset="-120"/>
               </a:rPr>
-              <a:t>        return self.sessao.execute(</a:t>
+              <a:t>&lt;/button&gt;</a:t>
             </a:r>
             <a:endParaRPr lang="en-US" sz="1300" dirty="0"/>
-          </a:p>
-          <a:p>
-            <a:pPr indent="0" marL="0">
-              <a:buNone/>
-            </a:pPr>
-            <a:r>
-              <a:rPr lang="en-US" sz="1300" dirty="0">
-                <a:solidFill>
-                  <a:schemeClr val="bg2"/>
-                </a:solidFill>
-                <a:latin typeface="Courier New" pitchFamily="34" charset="0"/>
-                <a:ea typeface="Courier New" pitchFamily="34" charset="-122"/>
-                <a:cs typeface="Courier New" pitchFamily="34" charset="-120"/>
-              </a:rPr>
-              <a:t>            consulta).scalar_one_or_none()</a:t>
-            </a:r>
-            <a:endParaRPr lang="en-US" sz="1300" dirty="0"/>
-          </a:p>
-        </p:txBody>
-      </p:sp>
-      <p:sp>
-        <p:nvSpPr>
-          <p:cNvPr id="9" name="texto-86"/>
-          <p:cNvSpPr txBox="1"/>
-          <p:nvPr/>
-        </p:nvSpPr>
-        <p:spPr>
-          <a:xfrm>
-            <a:off x="5577840" y="5431536"/>
-            <a:ext cx="6080760" cy="274320"/>
-          </a:xfrm>
-          <a:prstGeom prst="rect">
-            <a:avLst/>
-          </a:prstGeom>
-          <a:noFill/>
-          <a:ln/>
-        </p:spPr>
-        <p:txBody>
-          <a:bodyPr wrap="square" lIns="0" tIns="0" rIns="0" bIns="0" rtlCol="0" anchor="ctr"/>
-          <a:lstStyle/>
-          <a:p>
-            <a:pPr indent="0" marL="0">
-              <a:buNone/>
-            </a:pPr>
-            <a:r>
-              <a:rPr lang="en-US" sz="1100" i="1" dirty="0">
-                <a:solidFill>
-                  <a:schemeClr val="accent6"/>
-                </a:solidFill>
-              </a:rPr>
-              <a:t>src/back/app/repository (trecho resumido e reformatado)</a:t>
-            </a:r>
-            <a:endParaRPr lang="en-US" sz="1100" dirty="0"/>
           </a:p>
         </p:txBody>
       </p:sp>

--- a/docs/apresentacao/Lab03S03-Apresentacao.pptx
+++ b/docs/apresentacao/Lab03S03-Apresentacao.pptx
@@ -121,7 +121,7 @@
   <p:extLst>
     <p:ext uri="{521415D9-36F7-43E2-AB2F-B90AF26B5E84}">
       <p14:sectionLst xmlns:p14="http://schemas.microsoft.com/office/powerpoint/2010/main">
-        <p14:section name="O trabalho" id="{f151c33d-9b6f-d4e3-d97b-2c448b5e0bba}">
+        <p14:section name="O trabalho" id="{3fbd5702-358c-880e-b7bf-5f896aec71fa}">
           <p14:sldIdLst>
             <p14:sldId id="256"/>
             <p14:sldId id="257"/>
@@ -131,7 +131,7 @@
             <p14:sldId id="261"/>
           </p14:sldIdLst>
         </p14:section>
-        <p14:section name="Oficina" id="{df22f3b3-0236-d9eb-0fd5-727beb7dcc73}">
+        <p14:section name="Oficina" id="{dcf36a21-c242-f4da-8319-2a4c7ef0a022}">
           <p14:sldIdLst>
             <p14:sldId id="262"/>
             <p14:sldId id="263"/>
@@ -1528,7 +1528,7 @@
             <a:r>
               <a:rPr lang="en-US" dirty="0"/>
               <a:t>O extrato do aluno mostra o saldo e cada movimentação: o que entrou, em verde, e o que saiu, em vermelho. No resgate saem dois e-mails. O primeiro vai para o aluno, com o cupom. O segundo vai para a empresa, avisando que aquele aluno resgatou a vantagem. O código é o mesmo nos dois de propósito: o aluno apresenta o cupom na empresa e ela confere se bate com o código que recebeu. O envio usa o SMTP do Gmail configurado no arquivo .env; sem credenciais, o texto aparece no log da API e nada é enviado.
-[Tempo: 0:35 | Dica: Se perguntarem por que o código se repete: é a forma de a empresa conferir o cupom do aluno. Seja transparente: o envio real pelo Gmail depende da senha de aplicativo; nos testes foi usado um SMTP simulado.]</a:t>
+[Tempo: 0:35 | Dica: Se perguntarem por que o código se repete: é a forma de a empresa conferir o cupom do aluno. O envio real pelo Gmail foi testado e os e-mails chegaram; se o computador da apresentação não tiver o .env, o texto aparece só no log.]</a:t>
             </a:r>
             <a:endParaRPr lang="en-US" dirty="0"/>
           </a:p>

--- a/docs/apresentacao/Lab03S03-Apresentacao.pptx
+++ b/docs/apresentacao/Lab03S03-Apresentacao.pptx
@@ -121,7 +121,7 @@
   <p:extLst>
     <p:ext uri="{521415D9-36F7-43E2-AB2F-B90AF26B5E84}">
       <p14:sectionLst xmlns:p14="http://schemas.microsoft.com/office/powerpoint/2010/main">
-        <p14:section name="O trabalho" id="{3fbd5702-358c-880e-b7bf-5f896aec71fa}">
+        <p14:section name="O trabalho" id="{e16d8be7-bba4-0436-f4c8-8f2e9b5cc70f}">
           <p14:sldIdLst>
             <p14:sldId id="256"/>
             <p14:sldId id="257"/>
@@ -131,7 +131,7 @@
             <p14:sldId id="261"/>
           </p14:sldIdLst>
         </p14:section>
-        <p14:section name="Oficina" id="{dcf36a21-c242-f4da-8319-2a4c7ef0a022}">
+        <p14:section name="Oficina" id="{b7b67ae8-13de-f094-69b0-ce76f8582603}">
           <p14:sldIdLst>
             <p14:sldId id="262"/>
             <p14:sldId id="263"/>
@@ -1527,8 +1527,8 @@
           <a:p>
             <a:r>
               <a:rPr lang="en-US" dirty="0"/>
-              <a:t>O extrato do aluno mostra o saldo e cada movimentação: o que entrou, em verde, e o que saiu, em vermelho. No resgate saem dois e-mails. O primeiro vai para o aluno, com o cupom. O segundo vai para a empresa, avisando que aquele aluno resgatou a vantagem. O código é o mesmo nos dois de propósito: o aluno apresenta o cupom na empresa e ela confere se bate com o código que recebeu. O envio usa o SMTP do Gmail configurado no arquivo .env; sem credenciais, o texto aparece no log da API e nada é enviado.
-[Tempo: 0:35 | Dica: Se perguntarem por que o código se repete: é a forma de a empresa conferir o cupom do aluno. O envio real pelo Gmail foi testado e os e-mails chegaram; se o computador da apresentação não tiver o .env, o texto aparece só no log.]</a:t>
+              <a:t>O extrato do aluno mostra o saldo e cada movimentação: o que entrou, em verde, e o que saiu, em vermelho. No resgate saem dois e-mails. O primeiro vai para o aluno, com o cupom. O segundo vai para a empresa, avisando que aquele aluno resgatou a vantagem. O código é o mesmo nos dois de propósito: o aluno apresenta o cupom na empresa e ela confere se bate com o código que recebeu. À direita, o print dos e-mails que chegaram de verdade na minha caixa do Gmail durante o teste, incluindo o aviso de moedas recebidas. O envio usa o SMTP do Gmail configurado no arquivo .env; sem credenciais, o texto aparece no log da API e nada é enviado.
+[Tempo: 0:35 | Dica: Aponte para o print à direita: são e-mails reais, recebidos no celular. Se perguntarem por que o código se repete: é a forma de a empresa conferir o cupom do aluno. Se o computador da apresentação não tiver o .env, o texto aparece só no log.]</a:t>
             </a:r>
             <a:endParaRPr lang="en-US" dirty="0"/>
           </a:p>
@@ -2796,7 +2796,7 @@
       </p:sp>
       <p:sp>
         <p:nvSpPr>
-          <p:cNvPr id="3" name="etiqueta-116"/>
+          <p:cNvPr id="3" name="etiqueta-105"/>
           <p:cNvSpPr/>
           <p:nvPr/>
         </p:nvSpPr>
@@ -2818,7 +2818,7 @@
       </p:sp>
       <p:sp>
         <p:nvSpPr>
-          <p:cNvPr id="4" name="texto-117"/>
+          <p:cNvPr id="4" name="texto-106"/>
           <p:cNvSpPr txBox="1"/>
           <p:nvPr/>
         </p:nvSpPr>
@@ -2854,7 +2854,7 @@
       </p:sp>
       <p:sp>
         <p:nvSpPr>
-          <p:cNvPr id="5" name="texto-118"/>
+          <p:cNvPr id="5" name="texto-107"/>
           <p:cNvSpPr txBox="1"/>
           <p:nvPr/>
         </p:nvSpPr>
@@ -2890,7 +2890,7 @@
       </p:sp>
       <p:sp>
         <p:nvSpPr>
-          <p:cNvPr id="6" name="texto-119"/>
+          <p:cNvPr id="6" name="texto-108"/>
           <p:cNvSpPr txBox="1"/>
           <p:nvPr/>
         </p:nvSpPr>
@@ -2926,7 +2926,7 @@
       </p:sp>
       <p:sp>
         <p:nvSpPr>
-          <p:cNvPr id="7" name="texto-120"/>
+          <p:cNvPr id="7" name="texto-109"/>
           <p:cNvSpPr txBox="1"/>
           <p:nvPr/>
         </p:nvSpPr>
@@ -2962,7 +2962,7 @@
       </p:sp>
       <p:sp>
         <p:nvSpPr>
-          <p:cNvPr id="8" name="texto-121"/>
+          <p:cNvPr id="8" name="texto-110"/>
           <p:cNvSpPr txBox="1"/>
           <p:nvPr/>
         </p:nvSpPr>
@@ -3060,7 +3060,7 @@
       </p:sp>
       <p:sp>
         <p:nvSpPr>
-          <p:cNvPr id="9" name="painel-codigo-122"/>
+          <p:cNvPr id="9" name="painel-codigo-111"/>
           <p:cNvSpPr/>
           <p:nvPr/>
         </p:nvSpPr>
@@ -3082,7 +3082,7 @@
       </p:sp>
       <p:sp>
         <p:nvSpPr>
-          <p:cNvPr id="10" name="texto-123"/>
+          <p:cNvPr id="10" name="texto-112"/>
           <p:cNvSpPr txBox="1"/>
           <p:nvPr/>
         </p:nvSpPr>
@@ -3121,7 +3121,7 @@
       </p:sp>
       <p:sp>
         <p:nvSpPr>
-          <p:cNvPr id="11" name="texto-124"/>
+          <p:cNvPr id="11" name="texto-113"/>
           <p:cNvSpPr txBox="1"/>
           <p:nvPr/>
         </p:nvSpPr>
@@ -3314,7 +3314,7 @@
       </p:sp>
       <p:sp>
         <p:nvSpPr>
-          <p:cNvPr id="12" name="painel-codigo-125"/>
+          <p:cNvPr id="12" name="painel-codigo-114"/>
           <p:cNvSpPr/>
           <p:nvPr/>
         </p:nvSpPr>
@@ -3336,7 +3336,7 @@
       </p:sp>
       <p:sp>
         <p:nvSpPr>
-          <p:cNvPr id="13" name="texto-126"/>
+          <p:cNvPr id="13" name="texto-115"/>
           <p:cNvSpPr txBox="1"/>
           <p:nvPr/>
         </p:nvSpPr>
@@ -3375,7 +3375,7 @@
       </p:sp>
       <p:sp>
         <p:nvSpPr>
-          <p:cNvPr id="14" name="texto-127"/>
+          <p:cNvPr id="14" name="texto-116"/>
           <p:cNvSpPr txBox="1"/>
           <p:nvPr/>
         </p:nvSpPr>
@@ -3539,7 +3539,7 @@
       </p:sp>
       <p:sp>
         <p:nvSpPr>
-          <p:cNvPr id="3" name="etiqueta-128"/>
+          <p:cNvPr id="3" name="etiqueta-117"/>
           <p:cNvSpPr/>
           <p:nvPr/>
         </p:nvSpPr>
@@ -3561,7 +3561,7 @@
       </p:sp>
       <p:sp>
         <p:nvSpPr>
-          <p:cNvPr id="4" name="texto-129"/>
+          <p:cNvPr id="4" name="texto-118"/>
           <p:cNvSpPr txBox="1"/>
           <p:nvPr/>
         </p:nvSpPr>
@@ -3597,7 +3597,7 @@
       </p:sp>
       <p:sp>
         <p:nvSpPr>
-          <p:cNvPr id="5" name="texto-130"/>
+          <p:cNvPr id="5" name="texto-119"/>
           <p:cNvSpPr txBox="1"/>
           <p:nvPr/>
         </p:nvSpPr>
@@ -3633,7 +3633,7 @@
       </p:sp>
       <p:sp>
         <p:nvSpPr>
-          <p:cNvPr id="6" name="texto-131"/>
+          <p:cNvPr id="6" name="texto-120"/>
           <p:cNvSpPr txBox="1"/>
           <p:nvPr/>
         </p:nvSpPr>
@@ -3669,7 +3669,7 @@
       </p:sp>
       <p:sp>
         <p:nvSpPr>
-          <p:cNvPr id="7" name="texto-132"/>
+          <p:cNvPr id="7" name="texto-121"/>
           <p:cNvSpPr txBox="1"/>
           <p:nvPr/>
         </p:nvSpPr>
@@ -3705,7 +3705,7 @@
       </p:sp>
       <p:sp>
         <p:nvSpPr>
-          <p:cNvPr id="8" name="texto-133"/>
+          <p:cNvPr id="8" name="texto-122"/>
           <p:cNvSpPr txBox="1"/>
           <p:nvPr/>
         </p:nvSpPr>
@@ -3803,7 +3803,7 @@
       </p:sp>
       <p:sp>
         <p:nvSpPr>
-          <p:cNvPr id="9" name="painel-codigo-134"/>
+          <p:cNvPr id="9" name="painel-codigo-123"/>
           <p:cNvSpPr/>
           <p:nvPr/>
         </p:nvSpPr>
@@ -3825,7 +3825,7 @@
       </p:sp>
       <p:sp>
         <p:nvSpPr>
-          <p:cNvPr id="10" name="texto-135"/>
+          <p:cNvPr id="10" name="texto-124"/>
           <p:cNvSpPr txBox="1"/>
           <p:nvPr/>
         </p:nvSpPr>
@@ -3864,7 +3864,7 @@
       </p:sp>
       <p:sp>
         <p:nvSpPr>
-          <p:cNvPr id="11" name="texto-136"/>
+          <p:cNvPr id="11" name="texto-125"/>
           <p:cNvSpPr txBox="1"/>
           <p:nvPr/>
         </p:nvSpPr>
@@ -4199,7 +4199,7 @@
       </p:sp>
       <p:sp>
         <p:nvSpPr>
-          <p:cNvPr id="3" name="etiqueta-137"/>
+          <p:cNvPr id="3" name="etiqueta-126"/>
           <p:cNvSpPr/>
           <p:nvPr/>
         </p:nvSpPr>
@@ -4221,7 +4221,7 @@
       </p:sp>
       <p:sp>
         <p:nvSpPr>
-          <p:cNvPr id="4" name="texto-138"/>
+          <p:cNvPr id="4" name="texto-127"/>
           <p:cNvSpPr txBox="1"/>
           <p:nvPr/>
         </p:nvSpPr>
@@ -4257,7 +4257,7 @@
       </p:sp>
       <p:sp>
         <p:nvSpPr>
-          <p:cNvPr id="5" name="texto-139"/>
+          <p:cNvPr id="5" name="texto-128"/>
           <p:cNvSpPr txBox="1"/>
           <p:nvPr/>
         </p:nvSpPr>
@@ -4293,7 +4293,7 @@
       </p:sp>
       <p:sp>
         <p:nvSpPr>
-          <p:cNvPr id="6" name="texto-140"/>
+          <p:cNvPr id="6" name="texto-129"/>
           <p:cNvSpPr txBox="1"/>
           <p:nvPr/>
         </p:nvSpPr>
@@ -4329,7 +4329,7 @@
       </p:sp>
       <p:sp>
         <p:nvSpPr>
-          <p:cNvPr id="7" name="texto-141"/>
+          <p:cNvPr id="7" name="texto-130"/>
           <p:cNvSpPr txBox="1"/>
           <p:nvPr/>
         </p:nvSpPr>
@@ -4365,7 +4365,7 @@
       </p:sp>
       <p:sp>
         <p:nvSpPr>
-          <p:cNvPr id="8" name="texto-142"/>
+          <p:cNvPr id="8" name="texto-131"/>
           <p:cNvSpPr txBox="1"/>
           <p:nvPr/>
         </p:nvSpPr>
@@ -4463,7 +4463,7 @@
       </p:sp>
       <p:sp>
         <p:nvSpPr>
-          <p:cNvPr id="9" name="painel-codigo-143"/>
+          <p:cNvPr id="9" name="painel-codigo-132"/>
           <p:cNvSpPr/>
           <p:nvPr/>
         </p:nvSpPr>
@@ -4485,7 +4485,7 @@
       </p:sp>
       <p:sp>
         <p:nvSpPr>
-          <p:cNvPr id="10" name="texto-144"/>
+          <p:cNvPr id="10" name="texto-133"/>
           <p:cNvSpPr txBox="1"/>
           <p:nvPr/>
         </p:nvSpPr>
@@ -4524,7 +4524,7 @@
       </p:sp>
       <p:sp>
         <p:nvSpPr>
-          <p:cNvPr id="11" name="texto-145"/>
+          <p:cNvPr id="11" name="texto-134"/>
           <p:cNvSpPr txBox="1"/>
           <p:nvPr/>
         </p:nvSpPr>
@@ -4637,7 +4637,7 @@
       </p:sp>
       <p:sp>
         <p:nvSpPr>
-          <p:cNvPr id="12" name="painel-codigo-146"/>
+          <p:cNvPr id="12" name="painel-codigo-135"/>
           <p:cNvSpPr/>
           <p:nvPr/>
         </p:nvSpPr>
@@ -4659,7 +4659,7 @@
       </p:sp>
       <p:sp>
         <p:nvSpPr>
-          <p:cNvPr id="13" name="texto-147"/>
+          <p:cNvPr id="13" name="texto-136"/>
           <p:cNvSpPr txBox="1"/>
           <p:nvPr/>
         </p:nvSpPr>
@@ -4698,7 +4698,7 @@
       </p:sp>
       <p:sp>
         <p:nvSpPr>
-          <p:cNvPr id="14" name="texto-148"/>
+          <p:cNvPr id="14" name="texto-137"/>
           <p:cNvSpPr txBox="1"/>
           <p:nvPr/>
         </p:nvSpPr>
@@ -4970,7 +4970,7 @@
       </p:sp>
       <p:sp>
         <p:nvSpPr>
-          <p:cNvPr id="3" name="etiqueta-149"/>
+          <p:cNvPr id="3" name="etiqueta-138"/>
           <p:cNvSpPr/>
           <p:nvPr/>
         </p:nvSpPr>
@@ -4992,7 +4992,7 @@
       </p:sp>
       <p:sp>
         <p:nvSpPr>
-          <p:cNvPr id="4" name="texto-150"/>
+          <p:cNvPr id="4" name="texto-139"/>
           <p:cNvSpPr txBox="1"/>
           <p:nvPr/>
         </p:nvSpPr>
@@ -5028,7 +5028,7 @@
       </p:sp>
       <p:sp>
         <p:nvSpPr>
-          <p:cNvPr id="5" name="texto-151"/>
+          <p:cNvPr id="5" name="texto-140"/>
           <p:cNvSpPr txBox="1"/>
           <p:nvPr/>
         </p:nvSpPr>
@@ -5064,7 +5064,7 @@
       </p:sp>
       <p:sp>
         <p:nvSpPr>
-          <p:cNvPr id="6" name="texto-152"/>
+          <p:cNvPr id="6" name="texto-141"/>
           <p:cNvSpPr txBox="1"/>
           <p:nvPr/>
         </p:nvSpPr>
@@ -5100,7 +5100,7 @@
       </p:sp>
       <p:sp>
         <p:nvSpPr>
-          <p:cNvPr id="7" name="texto-153"/>
+          <p:cNvPr id="7" name="texto-142"/>
           <p:cNvSpPr txBox="1"/>
           <p:nvPr/>
         </p:nvSpPr>
@@ -5136,7 +5136,7 @@
       </p:sp>
       <p:sp>
         <p:nvSpPr>
-          <p:cNvPr id="8" name="texto-154"/>
+          <p:cNvPr id="8" name="texto-143"/>
           <p:cNvSpPr txBox="1"/>
           <p:nvPr/>
         </p:nvSpPr>
@@ -5234,7 +5234,7 @@
       </p:sp>
       <p:sp>
         <p:nvSpPr>
-          <p:cNvPr id="9" name="painel-codigo-155"/>
+          <p:cNvPr id="9" name="painel-codigo-144"/>
           <p:cNvSpPr/>
           <p:nvPr/>
         </p:nvSpPr>
@@ -5256,7 +5256,7 @@
       </p:sp>
       <p:sp>
         <p:nvSpPr>
-          <p:cNvPr id="10" name="texto-156"/>
+          <p:cNvPr id="10" name="texto-145"/>
           <p:cNvSpPr txBox="1"/>
           <p:nvPr/>
         </p:nvSpPr>
@@ -5295,7 +5295,7 @@
       </p:sp>
       <p:sp>
         <p:nvSpPr>
-          <p:cNvPr id="11" name="texto-157"/>
+          <p:cNvPr id="11" name="texto-146"/>
           <p:cNvSpPr txBox="1"/>
           <p:nvPr/>
         </p:nvSpPr>
@@ -5459,7 +5459,7 @@
       </p:sp>
       <p:sp>
         <p:nvSpPr>
-          <p:cNvPr id="12" name="painel-codigo-158"/>
+          <p:cNvPr id="12" name="painel-codigo-147"/>
           <p:cNvSpPr/>
           <p:nvPr/>
         </p:nvSpPr>
@@ -5481,7 +5481,7 @@
       </p:sp>
       <p:sp>
         <p:nvSpPr>
-          <p:cNvPr id="13" name="texto-159"/>
+          <p:cNvPr id="13" name="texto-148"/>
           <p:cNvSpPr txBox="1"/>
           <p:nvPr/>
         </p:nvSpPr>
@@ -5520,7 +5520,7 @@
       </p:sp>
       <p:sp>
         <p:nvSpPr>
-          <p:cNvPr id="14" name="texto-160"/>
+          <p:cNvPr id="14" name="texto-149"/>
           <p:cNvSpPr txBox="1"/>
           <p:nvPr/>
         </p:nvSpPr>
@@ -5718,7 +5718,7 @@
       </p:sp>
       <p:sp>
         <p:nvSpPr>
-          <p:cNvPr id="3" name="etiqueta-161"/>
+          <p:cNvPr id="3" name="etiqueta-150"/>
           <p:cNvSpPr/>
           <p:nvPr/>
         </p:nvSpPr>
@@ -5740,7 +5740,7 @@
       </p:sp>
       <p:sp>
         <p:nvSpPr>
-          <p:cNvPr id="4" name="texto-162"/>
+          <p:cNvPr id="4" name="texto-151"/>
           <p:cNvSpPr txBox="1"/>
           <p:nvPr/>
         </p:nvSpPr>
@@ -5776,7 +5776,7 @@
       </p:sp>
       <p:sp>
         <p:nvSpPr>
-          <p:cNvPr id="5" name="texto-163"/>
+          <p:cNvPr id="5" name="texto-152"/>
           <p:cNvSpPr txBox="1"/>
           <p:nvPr/>
         </p:nvSpPr>
@@ -5812,7 +5812,7 @@
       </p:sp>
       <p:sp>
         <p:nvSpPr>
-          <p:cNvPr id="6" name="texto-164"/>
+          <p:cNvPr id="6" name="texto-153"/>
           <p:cNvSpPr txBox="1"/>
           <p:nvPr/>
         </p:nvSpPr>
@@ -5848,7 +5848,7 @@
       </p:sp>
       <p:sp>
         <p:nvSpPr>
-          <p:cNvPr id="7" name="texto-165"/>
+          <p:cNvPr id="7" name="texto-154"/>
           <p:cNvSpPr txBox="1"/>
           <p:nvPr/>
         </p:nvSpPr>
@@ -5884,7 +5884,7 @@
       </p:sp>
       <p:sp>
         <p:nvSpPr>
-          <p:cNvPr id="8" name="texto-166"/>
+          <p:cNvPr id="8" name="texto-155"/>
           <p:cNvSpPr txBox="1"/>
           <p:nvPr/>
         </p:nvSpPr>
@@ -5982,7 +5982,7 @@
       </p:sp>
       <p:sp>
         <p:nvSpPr>
-          <p:cNvPr id="9" name="painel-codigo-167"/>
+          <p:cNvPr id="9" name="painel-codigo-156"/>
           <p:cNvSpPr/>
           <p:nvPr/>
         </p:nvSpPr>
@@ -6004,7 +6004,7 @@
       </p:sp>
       <p:sp>
         <p:nvSpPr>
-          <p:cNvPr id="10" name="texto-168"/>
+          <p:cNvPr id="10" name="texto-157"/>
           <p:cNvSpPr txBox="1"/>
           <p:nvPr/>
         </p:nvSpPr>
@@ -6043,7 +6043,7 @@
       </p:sp>
       <p:sp>
         <p:nvSpPr>
-          <p:cNvPr id="11" name="texto-169"/>
+          <p:cNvPr id="11" name="texto-158"/>
           <p:cNvSpPr txBox="1"/>
           <p:nvPr/>
         </p:nvSpPr>
@@ -6133,7 +6133,7 @@
       </p:sp>
       <p:sp>
         <p:nvSpPr>
-          <p:cNvPr id="12" name="painel-codigo-170"/>
+          <p:cNvPr id="12" name="painel-codigo-159"/>
           <p:cNvSpPr/>
           <p:nvPr/>
         </p:nvSpPr>
@@ -6155,7 +6155,7 @@
       </p:sp>
       <p:sp>
         <p:nvSpPr>
-          <p:cNvPr id="13" name="texto-171"/>
+          <p:cNvPr id="13" name="texto-160"/>
           <p:cNvSpPr txBox="1"/>
           <p:nvPr/>
         </p:nvSpPr>
@@ -6194,7 +6194,7 @@
       </p:sp>
       <p:sp>
         <p:nvSpPr>
-          <p:cNvPr id="14" name="texto-172"/>
+          <p:cNvPr id="14" name="texto-161"/>
           <p:cNvSpPr txBox="1"/>
           <p:nvPr/>
         </p:nvSpPr>
@@ -8502,7 +8502,7 @@
         <p:spPr>
           <a:xfrm>
             <a:off x="548640" y="1325880"/>
-            <a:ext cx="5760720" cy="2241280"/>
+            <a:ext cx="6035040" cy="2348008"/>
           </a:xfrm>
           <a:prstGeom prst="rect">
             <a:avLst/>
@@ -8524,8 +8524,8 @@
         </p:nvSpPr>
         <p:spPr>
           <a:xfrm>
-            <a:off x="548640" y="3704320"/>
-            <a:ext cx="5760720" cy="365760"/>
+            <a:off x="548640" y="3811048"/>
+            <a:ext cx="6035040" cy="365760"/>
           </a:xfrm>
           <a:prstGeom prst="rect">
             <a:avLst/>
@@ -8554,29 +8554,84 @@
       </p:sp>
       <p:sp>
         <p:nvSpPr>
-          <p:cNvPr id="5" name="email-53"/>
-          <p:cNvSpPr/>
-          <p:nvPr/>
-        </p:nvSpPr>
-        <p:spPr>
-          <a:xfrm>
-            <a:off x="6675120" y="1325880"/>
-            <a:ext cx="4965192" cy="1828800"/>
-          </a:xfrm>
-          <a:prstGeom prst="roundRect">
-            <a:avLst>
-              <a:gd name="adj" fmla="val 4000"/>
-            </a:avLst>
-          </a:prstGeom>
-          <a:solidFill>
-            <a:schemeClr val="bg1"/>
-          </a:solidFill>
-          <a:ln w="12700">
-            <a:solidFill>
-              <a:schemeClr val="accent6"/>
-            </a:solidFill>
-            <a:prstDash val="solid"/>
-          </a:ln>
+          <p:cNvPr id="5" name="texto-53"/>
+          <p:cNvSpPr txBox="1"/>
+          <p:nvPr/>
+        </p:nvSpPr>
+        <p:spPr>
+          <a:xfrm>
+            <a:off x="548640" y="4663440"/>
+            <a:ext cx="6035040" cy="1554480"/>
+          </a:xfrm>
+          <a:prstGeom prst="rect">
+            <a:avLst/>
+          </a:prstGeom>
+          <a:noFill/>
+          <a:ln/>
+        </p:spPr>
+        <p:txBody>
+          <a:bodyPr wrap="square" lIns="0" tIns="0" rIns="0" bIns="0" rtlCol="0" anchor="t"/>
+          <a:lstStyle/>
+          <a:p>
+            <a:pPr marL="342900" indent="-342900">
+              <a:spcAft>
+                <a:spcPts val="800"/>
+              </a:spcAft>
+              <a:buSzPct val="100000"/>
+              <a:buChar char="•"/>
+            </a:pPr>
+            <a:r>
+              <a:rPr lang="en-US" sz="1700" dirty="0">
+                <a:solidFill>
+                  <a:schemeClr val="tx1"/>
+                </a:solidFill>
+              </a:rPr>
+              <a:t>No resgate saem dois e-mails: o cupom para o aluno e o aviso para a empresa.</a:t>
+            </a:r>
+            <a:endParaRPr lang="en-US" sz="1700" dirty="0"/>
+          </a:p>
+          <a:p>
+            <a:pPr marL="342900" indent="-342900">
+              <a:spcAft>
+                <a:spcPts val="800"/>
+              </a:spcAft>
+              <a:buSzPct val="100000"/>
+              <a:buChar char="•"/>
+            </a:pPr>
+            <a:r>
+              <a:rPr lang="en-US" sz="1700" dirty="0">
+                <a:solidFill>
+                  <a:schemeClr val="tx1"/>
+                </a:solidFill>
+              </a:rPr>
+              <a:t>O código é o mesmo nos dois de propósito: o aluno apresenta o cupom e a empresa confere com o código que recebeu.</a:t>
+            </a:r>
+            <a:endParaRPr lang="en-US" sz="1700" dirty="0"/>
+          </a:p>
+        </p:txBody>
+      </p:sp>
+      <p:pic>
+        <p:nvPicPr>
+          <p:cNvPr id="6" name="imagem-54" descr="Os três e-mails recebidos na caixa do Gmail">    </p:cNvPr>
+          <p:cNvPicPr>
+            <a:picLocks noChangeAspect="1"/>
+          </p:cNvPicPr>
+          <p:nvPr/>
+        </p:nvPicPr>
+        <p:blipFill>
+          <a:blip r:embed="rId2"/>
+          <a:stretch>
+            <a:fillRect/>
+          </a:stretch>
+        </p:blipFill>
+        <p:spPr>
+          <a:xfrm>
+            <a:off x="7967073" y="1325880"/>
+            <a:ext cx="2564166" cy="4663440"/>
+          </a:xfrm>
+          <a:prstGeom prst="rect">
+            <a:avLst/>
+          </a:prstGeom>
           <a:effectLst>
             <a:outerShdw sx="100000" sy="100000" kx="0" ky="0" algn="bl" rotWithShape="0" blurRad="101600" dist="25400" dir="5400000">
               <a:srgbClr val="000000">
@@ -8585,43 +8640,7 @@
             </a:outerShdw>
           </a:effectLst>
         </p:spPr>
-      </p:sp>
-      <p:sp>
-        <p:nvSpPr>
-          <p:cNvPr id="6" name="texto-54"/>
-          <p:cNvSpPr txBox="1"/>
-          <p:nvPr/>
-        </p:nvSpPr>
-        <p:spPr>
-          <a:xfrm>
-            <a:off x="6903720" y="1417320"/>
-            <a:ext cx="4572000" cy="274320"/>
-          </a:xfrm>
-          <a:prstGeom prst="rect">
-            <a:avLst/>
-          </a:prstGeom>
-          <a:noFill/>
-          <a:ln/>
-        </p:spPr>
-        <p:txBody>
-          <a:bodyPr wrap="square" lIns="0" tIns="0" rIns="0" bIns="0" rtlCol="0" anchor="ctr"/>
-          <a:lstStyle/>
-          <a:p>
-            <a:pPr indent="0" marL="0">
-              <a:buNone/>
-            </a:pPr>
-            <a:r>
-              <a:rPr lang="en-US" sz="1200" b="1" dirty="0">
-                <a:solidFill>
-                  <a:schemeClr val="accent1"/>
-                </a:solidFill>
-              </a:rPr>
-              <a:t>E-mail para o aluno</a:t>
-            </a:r>
-            <a:endParaRPr lang="en-US" sz="1200" dirty="0"/>
-          </a:p>
-        </p:txBody>
-      </p:sp>
+      </p:pic>
       <p:sp>
         <p:nvSpPr>
           <p:cNvPr id="7" name="texto-55"/>
@@ -8630,8 +8649,8 @@
         </p:nvSpPr>
         <p:spPr>
           <a:xfrm>
-            <a:off x="6903720" y="1709928"/>
-            <a:ext cx="4572000" cy="256032"/>
+            <a:off x="6858000" y="6126480"/>
+            <a:ext cx="4782312" cy="365760"/>
           </a:xfrm>
           <a:prstGeom prst="rect">
             <a:avLst/>
@@ -8643,394 +8662,18 @@
           <a:bodyPr wrap="square" lIns="0" tIns="0" rIns="0" bIns="0" rtlCol="0" anchor="ctr"/>
           <a:lstStyle/>
           <a:p>
-            <a:pPr indent="0" marL="0">
-              <a:buNone/>
-            </a:pPr>
-            <a:r>
-              <a:rPr lang="en-US" sz="1200" dirty="0">
+            <a:pPr algn="ctr" indent="0" marL="0">
+              <a:buNone/>
+            </a:pPr>
+            <a:r>
+              <a:rPr lang="en-US" sz="1400" dirty="0">
                 <a:solidFill>
                   <a:schemeClr val="accent6"/>
                 </a:solidFill>
               </a:rPr>
-              <a:t>Para: mariana@aluno.com.br</a:t>
-            </a:r>
-            <a:endParaRPr lang="en-US" sz="1200" dirty="0"/>
-          </a:p>
-        </p:txBody>
-      </p:sp>
-      <p:sp>
-        <p:nvSpPr>
-          <p:cNvPr id="8" name="texto-56"/>
-          <p:cNvSpPr txBox="1"/>
-          <p:nvPr/>
-        </p:nvSpPr>
-        <p:spPr>
-          <a:xfrm>
-            <a:off x="6903720" y="1965960"/>
-            <a:ext cx="4572000" cy="274320"/>
-          </a:xfrm>
-          <a:prstGeom prst="rect">
-            <a:avLst/>
-          </a:prstGeom>
-          <a:noFill/>
-          <a:ln/>
-        </p:spPr>
-        <p:txBody>
-          <a:bodyPr wrap="square" lIns="0" tIns="0" rIns="0" bIns="0" rtlCol="0" anchor="ctr"/>
-          <a:lstStyle/>
-          <a:p>
-            <a:pPr indent="0" marL="0">
-              <a:buNone/>
-            </a:pPr>
-            <a:r>
-              <a:rPr lang="en-US" sz="1300" b="1" dirty="0">
-                <a:solidFill>
-                  <a:schemeClr val="tx1"/>
-                </a:solidFill>
-              </a:rPr>
-              <a:t>Assunto: Seu cupom de resgate</a:t>
-            </a:r>
-            <a:endParaRPr lang="en-US" sz="1300" dirty="0"/>
-          </a:p>
-        </p:txBody>
-      </p:sp>
-      <p:sp>
-        <p:nvSpPr>
-          <p:cNvPr id="9" name="linha-57"/>
-          <p:cNvSpPr/>
-          <p:nvPr/>
-        </p:nvSpPr>
-        <p:spPr>
-          <a:xfrm>
-            <a:off x="6903720" y="2286000"/>
-            <a:ext cx="4507992" cy="0"/>
-          </a:xfrm>
-          <a:prstGeom prst="line">
-            <a:avLst/>
-          </a:prstGeom>
-          <a:noFill/>
-          <a:ln w="9525">
-            <a:solidFill>
-              <a:schemeClr val="accent6"/>
-            </a:solidFill>
-            <a:prstDash val="solid"/>
-          </a:ln>
-        </p:spPr>
-      </p:sp>
-      <p:sp>
-        <p:nvSpPr>
-          <p:cNvPr id="10" name="texto-58"/>
-          <p:cNvSpPr txBox="1"/>
-          <p:nvPr/>
-        </p:nvSpPr>
-        <p:spPr>
-          <a:xfrm>
-            <a:off x="6903720" y="2350008"/>
-            <a:ext cx="4507992" cy="731520"/>
-          </a:xfrm>
-          <a:prstGeom prst="rect">
-            <a:avLst/>
-          </a:prstGeom>
-          <a:noFill/>
-          <a:ln/>
-        </p:spPr>
-        <p:txBody>
-          <a:bodyPr wrap="square" lIns="0" tIns="0" rIns="0" bIns="0" rtlCol="0" anchor="t"/>
-          <a:lstStyle/>
-          <a:p>
-            <a:pPr indent="0" marL="0">
-              <a:buNone/>
-            </a:pPr>
-            <a:r>
-              <a:rPr lang="en-US" sz="1250" dirty="0">
-                <a:solidFill>
-                  <a:schemeClr val="tx1"/>
-                </a:solidFill>
-              </a:rPr>
-              <a:t>Você trocou 60 moedas pela vantagem "Almoço no restaurante universitário". </a:t>
-            </a:r>
-            <a:pPr indent="0" marL="0">
-              <a:buNone/>
-            </a:pPr>
-            <a:r>
-              <a:rPr lang="en-US" sz="1250" b="1" dirty="0">
-                <a:solidFill>
-                  <a:schemeClr val="tx1"/>
-                </a:solidFill>
-              </a:rPr>
-              <a:t>Código do cupom: 3823V2QQ</a:t>
-            </a:r>
-            <a:endParaRPr lang="en-US" sz="1250" dirty="0"/>
-          </a:p>
-        </p:txBody>
-      </p:sp>
-      <p:sp>
-        <p:nvSpPr>
-          <p:cNvPr id="11" name="email-59"/>
-          <p:cNvSpPr/>
-          <p:nvPr/>
-        </p:nvSpPr>
-        <p:spPr>
-          <a:xfrm>
-            <a:off x="6675120" y="3337560"/>
-            <a:ext cx="4965192" cy="1828800"/>
-          </a:xfrm>
-          <a:prstGeom prst="roundRect">
-            <a:avLst>
-              <a:gd name="adj" fmla="val 4000"/>
-            </a:avLst>
-          </a:prstGeom>
-          <a:solidFill>
-            <a:schemeClr val="bg1"/>
-          </a:solidFill>
-          <a:ln w="12700">
-            <a:solidFill>
-              <a:schemeClr val="accent6"/>
-            </a:solidFill>
-            <a:prstDash val="solid"/>
-          </a:ln>
-          <a:effectLst>
-            <a:outerShdw sx="100000" sy="100000" kx="0" ky="0" algn="bl" rotWithShape="0" blurRad="101600" dist="25400" dir="5400000">
-              <a:srgbClr val="000000">
-                <a:alpha val="18000"/>
-              </a:srgbClr>
-            </a:outerShdw>
-          </a:effectLst>
-        </p:spPr>
-      </p:sp>
-      <p:sp>
-        <p:nvSpPr>
-          <p:cNvPr id="12" name="texto-60"/>
-          <p:cNvSpPr txBox="1"/>
-          <p:nvPr/>
-        </p:nvSpPr>
-        <p:spPr>
-          <a:xfrm>
-            <a:off x="6903720" y="3429000"/>
-            <a:ext cx="4572000" cy="274320"/>
-          </a:xfrm>
-          <a:prstGeom prst="rect">
-            <a:avLst/>
-          </a:prstGeom>
-          <a:noFill/>
-          <a:ln/>
-        </p:spPr>
-        <p:txBody>
-          <a:bodyPr wrap="square" lIns="0" tIns="0" rIns="0" bIns="0" rtlCol="0" anchor="ctr"/>
-          <a:lstStyle/>
-          <a:p>
-            <a:pPr indent="0" marL="0">
-              <a:buNone/>
-            </a:pPr>
-            <a:r>
-              <a:rPr lang="en-US" sz="1200" b="1" dirty="0">
-                <a:solidFill>
-                  <a:schemeClr val="accent1"/>
-                </a:solidFill>
-              </a:rPr>
-              <a:t>E-mail para a empresa</a:t>
-            </a:r>
-            <a:endParaRPr lang="en-US" sz="1200" dirty="0"/>
-          </a:p>
-        </p:txBody>
-      </p:sp>
-      <p:sp>
-        <p:nvSpPr>
-          <p:cNvPr id="13" name="texto-61"/>
-          <p:cNvSpPr txBox="1"/>
-          <p:nvPr/>
-        </p:nvSpPr>
-        <p:spPr>
-          <a:xfrm>
-            <a:off x="6903720" y="3721608"/>
-            <a:ext cx="4572000" cy="256032"/>
-          </a:xfrm>
-          <a:prstGeom prst="rect">
-            <a:avLst/>
-          </a:prstGeom>
-          <a:noFill/>
-          <a:ln/>
-        </p:spPr>
-        <p:txBody>
-          <a:bodyPr wrap="square" lIns="0" tIns="0" rIns="0" bIns="0" rtlCol="0" anchor="ctr"/>
-          <a:lstStyle/>
-          <a:p>
-            <a:pPr indent="0" marL="0">
-              <a:buNone/>
-            </a:pPr>
-            <a:r>
-              <a:rPr lang="en-US" sz="1200" dirty="0">
-                <a:solidFill>
-                  <a:schemeClr val="accent6"/>
-                </a:solidFill>
-              </a:rPr>
-              <a:t>Para: contato@cantina.com.br</a:t>
-            </a:r>
-            <a:endParaRPr lang="en-US" sz="1200" dirty="0"/>
-          </a:p>
-        </p:txBody>
-      </p:sp>
-      <p:sp>
-        <p:nvSpPr>
-          <p:cNvPr id="14" name="texto-62"/>
-          <p:cNvSpPr txBox="1"/>
-          <p:nvPr/>
-        </p:nvSpPr>
-        <p:spPr>
-          <a:xfrm>
-            <a:off x="6903720" y="3977640"/>
-            <a:ext cx="4572000" cy="274320"/>
-          </a:xfrm>
-          <a:prstGeom prst="rect">
-            <a:avLst/>
-          </a:prstGeom>
-          <a:noFill/>
-          <a:ln/>
-        </p:spPr>
-        <p:txBody>
-          <a:bodyPr wrap="square" lIns="0" tIns="0" rIns="0" bIns="0" rtlCol="0" anchor="ctr"/>
-          <a:lstStyle/>
-          <a:p>
-            <a:pPr indent="0" marL="0">
-              <a:buNone/>
-            </a:pPr>
-            <a:r>
-              <a:rPr lang="en-US" sz="1300" b="1" dirty="0">
-                <a:solidFill>
-                  <a:schemeClr val="tx1"/>
-                </a:solidFill>
-              </a:rPr>
-              <a:t>Assunto: Um aluno resgatou uma vantagem</a:t>
-            </a:r>
-            <a:endParaRPr lang="en-US" sz="1300" dirty="0"/>
-          </a:p>
-        </p:txBody>
-      </p:sp>
-      <p:sp>
-        <p:nvSpPr>
-          <p:cNvPr id="15" name="linha-63"/>
-          <p:cNvSpPr/>
-          <p:nvPr/>
-        </p:nvSpPr>
-        <p:spPr>
-          <a:xfrm>
-            <a:off x="6903720" y="4297680"/>
-            <a:ext cx="4507992" cy="0"/>
-          </a:xfrm>
-          <a:prstGeom prst="line">
-            <a:avLst/>
-          </a:prstGeom>
-          <a:noFill/>
-          <a:ln w="9525">
-            <a:solidFill>
-              <a:schemeClr val="accent6"/>
-            </a:solidFill>
-            <a:prstDash val="solid"/>
-          </a:ln>
-        </p:spPr>
-      </p:sp>
-      <p:sp>
-        <p:nvSpPr>
-          <p:cNvPr id="16" name="texto-64"/>
-          <p:cNvSpPr txBox="1"/>
-          <p:nvPr/>
-        </p:nvSpPr>
-        <p:spPr>
-          <a:xfrm>
-            <a:off x="6903720" y="4361688"/>
-            <a:ext cx="4507992" cy="731520"/>
-          </a:xfrm>
-          <a:prstGeom prst="rect">
-            <a:avLst/>
-          </a:prstGeom>
-          <a:noFill/>
-          <a:ln/>
-        </p:spPr>
-        <p:txBody>
-          <a:bodyPr wrap="square" lIns="0" tIns="0" rIns="0" bIns="0" rtlCol="0" anchor="t"/>
-          <a:lstStyle/>
-          <a:p>
-            <a:pPr indent="0" marL="0">
-              <a:buNone/>
-            </a:pPr>
-            <a:r>
-              <a:rPr lang="en-US" sz="1250" dirty="0">
-                <a:solidFill>
-                  <a:schemeClr val="tx1"/>
-                </a:solidFill>
-              </a:rPr>
-              <a:t>O aluno Mariana Alves Ribeiro resgatou a vantagem "Almoço no restaurante universitário". </a:t>
-            </a:r>
-            <a:pPr indent="0" marL="0">
-              <a:buNone/>
-            </a:pPr>
-            <a:r>
-              <a:rPr lang="en-US" sz="1250" b="1" dirty="0">
-                <a:solidFill>
-                  <a:schemeClr val="tx1"/>
-                </a:solidFill>
-              </a:rPr>
-              <a:t>Código para conferência: 3823V2QQ</a:t>
-            </a:r>
-            <a:endParaRPr lang="en-US" sz="1250" dirty="0"/>
-          </a:p>
-        </p:txBody>
-      </p:sp>
-      <p:sp>
-        <p:nvSpPr>
-          <p:cNvPr id="17" name="cartao-65"/>
-          <p:cNvSpPr/>
-          <p:nvPr/>
-        </p:nvSpPr>
-        <p:spPr>
-          <a:xfrm>
-            <a:off x="548640" y="5440680"/>
-            <a:ext cx="11091672" cy="822960"/>
-          </a:xfrm>
-          <a:prstGeom prst="roundRect">
-            <a:avLst>
-              <a:gd name="adj" fmla="val 13333"/>
-            </a:avLst>
-          </a:prstGeom>
-          <a:solidFill>
-            <a:schemeClr val="tx2"/>
-          </a:solidFill>
-          <a:ln/>
-        </p:spPr>
-      </p:sp>
-      <p:sp>
-        <p:nvSpPr>
-          <p:cNvPr id="18" name="texto-66"/>
-          <p:cNvSpPr txBox="1"/>
-          <p:nvPr/>
-        </p:nvSpPr>
-        <p:spPr>
-          <a:xfrm>
-            <a:off x="822960" y="5486400"/>
-            <a:ext cx="10561320" cy="731520"/>
-          </a:xfrm>
-          <a:prstGeom prst="rect">
-            <a:avLst/>
-          </a:prstGeom>
-          <a:noFill/>
-          <a:ln/>
-        </p:spPr>
-        <p:txBody>
-          <a:bodyPr wrap="square" lIns="0" tIns="0" rIns="0" bIns="0" rtlCol="0" anchor="ctr"/>
-          <a:lstStyle/>
-          <a:p>
-            <a:pPr indent="0" marL="0">
-              <a:buNone/>
-            </a:pPr>
-            <a:r>
-              <a:rPr lang="en-US" sz="1600" dirty="0">
-                <a:solidFill>
-                  <a:schemeClr val="bg1"/>
-                </a:solidFill>
-              </a:rPr>
-              <a:t>O código é o mesmo nos dois e-mails de propósito: o aluno apresenta o cupom e a empresa confere com o código que recebeu.</a:t>
-            </a:r>
-            <a:endParaRPr lang="en-US" sz="1600" dirty="0"/>
+              <a:t>E-mails recebidos no Gmail durante o teste</a:t>
+            </a:r>
+            <a:endParaRPr lang="en-US" sz="1400" dirty="0"/>
           </a:p>
         </p:txBody>
       </p:sp>
@@ -9144,7 +8787,7 @@
       </p:sp>
       <p:sp>
         <p:nvSpPr>
-          <p:cNvPr id="3" name="cartao-67"/>
+          <p:cNvPr id="3" name="cartao-56"/>
           <p:cNvSpPr/>
           <p:nvPr/>
         </p:nvSpPr>
@@ -9166,7 +8809,7 @@
       </p:sp>
       <p:sp>
         <p:nvSpPr>
-          <p:cNvPr id="4" name="marcador-68"/>
+          <p:cNvPr id="4" name="marcador-57"/>
           <p:cNvSpPr/>
           <p:nvPr/>
         </p:nvSpPr>
@@ -9186,7 +8829,7 @@
       </p:sp>
       <p:sp>
         <p:nvSpPr>
-          <p:cNvPr id="5" name="texto-69"/>
+          <p:cNvPr id="5" name="texto-58"/>
           <p:cNvSpPr txBox="1"/>
           <p:nvPr/>
         </p:nvSpPr>
@@ -9222,7 +8865,7 @@
       </p:sp>
       <p:sp>
         <p:nvSpPr>
-          <p:cNvPr id="6" name="texto-70"/>
+          <p:cNvPr id="6" name="texto-59"/>
           <p:cNvSpPr txBox="1"/>
           <p:nvPr/>
         </p:nvSpPr>
@@ -9258,7 +8901,7 @@
       </p:sp>
       <p:sp>
         <p:nvSpPr>
-          <p:cNvPr id="7" name="texto-71"/>
+          <p:cNvPr id="7" name="texto-60"/>
           <p:cNvSpPr txBox="1"/>
           <p:nvPr/>
         </p:nvSpPr>
@@ -9294,7 +8937,7 @@
       </p:sp>
       <p:sp>
         <p:nvSpPr>
-          <p:cNvPr id="8" name="cartao-72"/>
+          <p:cNvPr id="8" name="cartao-61"/>
           <p:cNvSpPr/>
           <p:nvPr/>
         </p:nvSpPr>
@@ -9316,7 +8959,7 @@
       </p:sp>
       <p:sp>
         <p:nvSpPr>
-          <p:cNvPr id="9" name="marcador-73"/>
+          <p:cNvPr id="9" name="marcador-62"/>
           <p:cNvSpPr/>
           <p:nvPr/>
         </p:nvSpPr>
@@ -9336,7 +8979,7 @@
       </p:sp>
       <p:sp>
         <p:nvSpPr>
-          <p:cNvPr id="10" name="texto-74"/>
+          <p:cNvPr id="10" name="texto-63"/>
           <p:cNvSpPr txBox="1"/>
           <p:nvPr/>
         </p:nvSpPr>
@@ -9372,7 +9015,7 @@
       </p:sp>
       <p:sp>
         <p:nvSpPr>
-          <p:cNvPr id="11" name="texto-75"/>
+          <p:cNvPr id="11" name="texto-64"/>
           <p:cNvSpPr txBox="1"/>
           <p:nvPr/>
         </p:nvSpPr>
@@ -9408,7 +9051,7 @@
       </p:sp>
       <p:sp>
         <p:nvSpPr>
-          <p:cNvPr id="12" name="texto-76"/>
+          <p:cNvPr id="12" name="texto-65"/>
           <p:cNvSpPr txBox="1"/>
           <p:nvPr/>
         </p:nvSpPr>
@@ -9444,7 +9087,7 @@
       </p:sp>
       <p:sp>
         <p:nvSpPr>
-          <p:cNvPr id="13" name="cartao-77"/>
+          <p:cNvPr id="13" name="cartao-66"/>
           <p:cNvSpPr/>
           <p:nvPr/>
         </p:nvSpPr>
@@ -9466,7 +9109,7 @@
       </p:sp>
       <p:sp>
         <p:nvSpPr>
-          <p:cNvPr id="14" name="marcador-78"/>
+          <p:cNvPr id="14" name="marcador-67"/>
           <p:cNvSpPr/>
           <p:nvPr/>
         </p:nvSpPr>
@@ -9486,7 +9129,7 @@
       </p:sp>
       <p:sp>
         <p:nvSpPr>
-          <p:cNvPr id="15" name="texto-79"/>
+          <p:cNvPr id="15" name="texto-68"/>
           <p:cNvSpPr txBox="1"/>
           <p:nvPr/>
         </p:nvSpPr>
@@ -9522,7 +9165,7 @@
       </p:sp>
       <p:sp>
         <p:nvSpPr>
-          <p:cNvPr id="16" name="texto-80"/>
+          <p:cNvPr id="16" name="texto-69"/>
           <p:cNvSpPr txBox="1"/>
           <p:nvPr/>
         </p:nvSpPr>
@@ -9558,7 +9201,7 @@
       </p:sp>
       <p:sp>
         <p:nvSpPr>
-          <p:cNvPr id="17" name="texto-81"/>
+          <p:cNvPr id="17" name="texto-70"/>
           <p:cNvSpPr txBox="1"/>
           <p:nvPr/>
         </p:nvSpPr>
@@ -9594,7 +9237,7 @@
       </p:sp>
       <p:sp>
         <p:nvSpPr>
-          <p:cNvPr id="18" name="cartao-82"/>
+          <p:cNvPr id="18" name="cartao-71"/>
           <p:cNvSpPr/>
           <p:nvPr/>
         </p:nvSpPr>
@@ -9616,7 +9259,7 @@
       </p:sp>
       <p:sp>
         <p:nvSpPr>
-          <p:cNvPr id="19" name="marcador-83"/>
+          <p:cNvPr id="19" name="marcador-72"/>
           <p:cNvSpPr/>
           <p:nvPr/>
         </p:nvSpPr>
@@ -9636,7 +9279,7 @@
       </p:sp>
       <p:sp>
         <p:nvSpPr>
-          <p:cNvPr id="20" name="texto-84"/>
+          <p:cNvPr id="20" name="texto-73"/>
           <p:cNvSpPr txBox="1"/>
           <p:nvPr/>
         </p:nvSpPr>
@@ -9672,7 +9315,7 @@
       </p:sp>
       <p:sp>
         <p:nvSpPr>
-          <p:cNvPr id="21" name="texto-85"/>
+          <p:cNvPr id="21" name="texto-74"/>
           <p:cNvSpPr txBox="1"/>
           <p:nvPr/>
         </p:nvSpPr>
@@ -9708,7 +9351,7 @@
       </p:sp>
       <p:sp>
         <p:nvSpPr>
-          <p:cNvPr id="22" name="texto-86"/>
+          <p:cNvPr id="22" name="texto-75"/>
           <p:cNvSpPr txBox="1"/>
           <p:nvPr/>
         </p:nvSpPr>
@@ -9744,7 +9387,7 @@
       </p:sp>
       <p:sp>
         <p:nvSpPr>
-          <p:cNvPr id="23" name="cartao-87"/>
+          <p:cNvPr id="23" name="cartao-76"/>
           <p:cNvSpPr/>
           <p:nvPr/>
         </p:nvSpPr>
@@ -9766,7 +9409,7 @@
       </p:sp>
       <p:sp>
         <p:nvSpPr>
-          <p:cNvPr id="24" name="marcador-88"/>
+          <p:cNvPr id="24" name="marcador-77"/>
           <p:cNvSpPr/>
           <p:nvPr/>
         </p:nvSpPr>
@@ -9786,7 +9429,7 @@
       </p:sp>
       <p:sp>
         <p:nvSpPr>
-          <p:cNvPr id="25" name="texto-89"/>
+          <p:cNvPr id="25" name="texto-78"/>
           <p:cNvSpPr txBox="1"/>
           <p:nvPr/>
         </p:nvSpPr>
@@ -9822,7 +9465,7 @@
       </p:sp>
       <p:sp>
         <p:nvSpPr>
-          <p:cNvPr id="26" name="texto-90"/>
+          <p:cNvPr id="26" name="texto-79"/>
           <p:cNvSpPr txBox="1"/>
           <p:nvPr/>
         </p:nvSpPr>
@@ -9858,7 +9501,7 @@
       </p:sp>
       <p:sp>
         <p:nvSpPr>
-          <p:cNvPr id="27" name="texto-91"/>
+          <p:cNvPr id="27" name="texto-80"/>
           <p:cNvSpPr txBox="1"/>
           <p:nvPr/>
         </p:nvSpPr>
@@ -10002,7 +9645,7 @@
       </p:sp>
       <p:sp>
         <p:nvSpPr>
-          <p:cNvPr id="3" name="etiqueta-92"/>
+          <p:cNvPr id="3" name="etiqueta-81"/>
           <p:cNvSpPr/>
           <p:nvPr/>
         </p:nvSpPr>
@@ -10024,7 +9667,7 @@
       </p:sp>
       <p:sp>
         <p:nvSpPr>
-          <p:cNvPr id="4" name="texto-93"/>
+          <p:cNvPr id="4" name="texto-82"/>
           <p:cNvSpPr txBox="1"/>
           <p:nvPr/>
         </p:nvSpPr>
@@ -10060,7 +9703,7 @@
       </p:sp>
       <p:sp>
         <p:nvSpPr>
-          <p:cNvPr id="5" name="texto-94"/>
+          <p:cNvPr id="5" name="texto-83"/>
           <p:cNvSpPr txBox="1"/>
           <p:nvPr/>
         </p:nvSpPr>
@@ -10096,7 +9739,7 @@
       </p:sp>
       <p:sp>
         <p:nvSpPr>
-          <p:cNvPr id="6" name="texto-95"/>
+          <p:cNvPr id="6" name="texto-84"/>
           <p:cNvSpPr txBox="1"/>
           <p:nvPr/>
         </p:nvSpPr>
@@ -10132,7 +9775,7 @@
       </p:sp>
       <p:sp>
         <p:nvSpPr>
-          <p:cNvPr id="7" name="texto-96"/>
+          <p:cNvPr id="7" name="texto-85"/>
           <p:cNvSpPr txBox="1"/>
           <p:nvPr/>
         </p:nvSpPr>
@@ -10168,7 +9811,7 @@
       </p:sp>
       <p:sp>
         <p:nvSpPr>
-          <p:cNvPr id="8" name="texto-97"/>
+          <p:cNvPr id="8" name="texto-86"/>
           <p:cNvSpPr txBox="1"/>
           <p:nvPr/>
         </p:nvSpPr>
@@ -10266,7 +9909,7 @@
       </p:sp>
       <p:sp>
         <p:nvSpPr>
-          <p:cNvPr id="9" name="painel-codigo-98"/>
+          <p:cNvPr id="9" name="painel-codigo-87"/>
           <p:cNvSpPr/>
           <p:nvPr/>
         </p:nvSpPr>
@@ -10288,7 +9931,7 @@
       </p:sp>
       <p:sp>
         <p:nvSpPr>
-          <p:cNvPr id="10" name="texto-99"/>
+          <p:cNvPr id="10" name="texto-88"/>
           <p:cNvSpPr txBox="1"/>
           <p:nvPr/>
         </p:nvSpPr>
@@ -10327,7 +9970,7 @@
       </p:sp>
       <p:sp>
         <p:nvSpPr>
-          <p:cNvPr id="11" name="texto-100"/>
+          <p:cNvPr id="11" name="texto-89"/>
           <p:cNvSpPr txBox="1"/>
           <p:nvPr/>
         </p:nvSpPr>
@@ -10713,7 +10356,7 @@
       </p:sp>
       <p:sp>
         <p:nvSpPr>
-          <p:cNvPr id="3" name="etiqueta-101"/>
+          <p:cNvPr id="3" name="etiqueta-90"/>
           <p:cNvSpPr/>
           <p:nvPr/>
         </p:nvSpPr>
@@ -10735,7 +10378,7 @@
       </p:sp>
       <p:sp>
         <p:nvSpPr>
-          <p:cNvPr id="4" name="texto-102"/>
+          <p:cNvPr id="4" name="texto-91"/>
           <p:cNvSpPr txBox="1"/>
           <p:nvPr/>
         </p:nvSpPr>
@@ -10771,7 +10414,7 @@
       </p:sp>
       <p:sp>
         <p:nvSpPr>
-          <p:cNvPr id="5" name="texto-103"/>
+          <p:cNvPr id="5" name="texto-92"/>
           <p:cNvSpPr txBox="1"/>
           <p:nvPr/>
         </p:nvSpPr>
@@ -10807,7 +10450,7 @@
       </p:sp>
       <p:sp>
         <p:nvSpPr>
-          <p:cNvPr id="6" name="texto-104"/>
+          <p:cNvPr id="6" name="texto-93"/>
           <p:cNvSpPr txBox="1"/>
           <p:nvPr/>
         </p:nvSpPr>
@@ -10843,7 +10486,7 @@
       </p:sp>
       <p:sp>
         <p:nvSpPr>
-          <p:cNvPr id="7" name="texto-105"/>
+          <p:cNvPr id="7" name="texto-94"/>
           <p:cNvSpPr txBox="1"/>
           <p:nvPr/>
         </p:nvSpPr>
@@ -10879,7 +10522,7 @@
       </p:sp>
       <p:sp>
         <p:nvSpPr>
-          <p:cNvPr id="8" name="texto-106"/>
+          <p:cNvPr id="8" name="texto-95"/>
           <p:cNvSpPr txBox="1"/>
           <p:nvPr/>
         </p:nvSpPr>
@@ -10977,7 +10620,7 @@
       </p:sp>
       <p:sp>
         <p:nvSpPr>
-          <p:cNvPr id="9" name="painel-codigo-107"/>
+          <p:cNvPr id="9" name="painel-codigo-96"/>
           <p:cNvSpPr/>
           <p:nvPr/>
         </p:nvSpPr>
@@ -10999,7 +10642,7 @@
       </p:sp>
       <p:sp>
         <p:nvSpPr>
-          <p:cNvPr id="10" name="texto-108"/>
+          <p:cNvPr id="10" name="texto-97"/>
           <p:cNvSpPr txBox="1"/>
           <p:nvPr/>
         </p:nvSpPr>
@@ -11038,7 +10681,7 @@
       </p:sp>
       <p:sp>
         <p:nvSpPr>
-          <p:cNvPr id="11" name="texto-109"/>
+          <p:cNvPr id="11" name="texto-98"/>
           <p:cNvSpPr txBox="1"/>
           <p:nvPr/>
         </p:nvSpPr>
@@ -11134,7 +10777,7 @@
       </p:sp>
       <p:sp>
         <p:nvSpPr>
-          <p:cNvPr id="12" name="painel-codigo-110"/>
+          <p:cNvPr id="12" name="painel-codigo-99"/>
           <p:cNvSpPr/>
           <p:nvPr/>
         </p:nvSpPr>
@@ -11156,7 +10799,7 @@
       </p:sp>
       <p:sp>
         <p:nvSpPr>
-          <p:cNvPr id="13" name="texto-111"/>
+          <p:cNvPr id="13" name="texto-100"/>
           <p:cNvSpPr txBox="1"/>
           <p:nvPr/>
         </p:nvSpPr>
@@ -11195,7 +10838,7 @@
       </p:sp>
       <p:sp>
         <p:nvSpPr>
-          <p:cNvPr id="14" name="texto-112"/>
+          <p:cNvPr id="14" name="texto-101"/>
           <p:cNvSpPr txBox="1"/>
           <p:nvPr/>
         </p:nvSpPr>
@@ -11234,7 +10877,7 @@
       </p:sp>
       <p:sp>
         <p:nvSpPr>
-          <p:cNvPr id="15" name="painel-codigo-113"/>
+          <p:cNvPr id="15" name="painel-codigo-102"/>
           <p:cNvSpPr/>
           <p:nvPr/>
         </p:nvSpPr>
@@ -11256,7 +10899,7 @@
       </p:sp>
       <p:sp>
         <p:nvSpPr>
-          <p:cNvPr id="16" name="texto-114"/>
+          <p:cNvPr id="16" name="texto-103"/>
           <p:cNvSpPr txBox="1"/>
           <p:nvPr/>
         </p:nvSpPr>
@@ -11295,7 +10938,7 @@
       </p:sp>
       <p:sp>
         <p:nvSpPr>
-          <p:cNvPr id="17" name="texto-115"/>
+          <p:cNvPr id="17" name="texto-104"/>
           <p:cNvSpPr txBox="1"/>
           <p:nvPr/>
         </p:nvSpPr>
